--- a/NewAge_Innovators_AI_Saver_Agent_GrabHack2.pptx
+++ b/NewAge_Innovators_AI_Saver_Agent_GrabHack2.pptx
@@ -3146,8 +3146,51 @@
         </p:nvSpPr>
         <p:spPr>
           <a:xfrm>
-            <a:off x="5760720" y="-274319"/>
-            <a:ext cx="6400800" cy="6400800"/>
+            <a:off x="5212080" y="-228600"/>
+            <a:ext cx="6949440" cy="6949440"/>
+          </a:xfrm>
+          <a:prstGeom prst="ellipse">
+            <a:avLst/>
+          </a:prstGeom>
+          <a:noFill/>
+          <a:ln w="50800">
+            <a:solidFill>
+              <a:srgbClr val="00D4D0"/>
+            </a:solidFill>
+          </a:ln>
+        </p:spPr>
+        <p:style>
+          <a:lnRef idx="1">
+            <a:schemeClr val="accent1"/>
+          </a:lnRef>
+          <a:fillRef idx="3">
+            <a:schemeClr val="accent1"/>
+          </a:fillRef>
+          <a:effectRef idx="2">
+            <a:schemeClr val="accent1"/>
+          </a:effectRef>
+          <a:fontRef idx="minor">
+            <a:schemeClr val="lt1"/>
+          </a:fontRef>
+        </p:style>
+        <p:txBody>
+          <a:bodyPr rtlCol="0" anchor="ctr"/>
+          <a:lstStyle/>
+          <a:p>
+            <a:pPr algn="ctr"/>
+          </a:p>
+        </p:txBody>
+      </p:sp>
+      <p:sp>
+        <p:nvSpPr>
+          <p:cNvPr id="4" name="Oval 3"/>
+          <p:cNvSpPr/>
+          <p:nvPr/>
+        </p:nvSpPr>
+        <p:spPr>
+          <a:xfrm>
+            <a:off x="6126480" y="685800"/>
+            <a:ext cx="5120640" cy="5120640"/>
           </a:xfrm>
           <a:prstGeom prst="ellipse">
             <a:avLst/>
@@ -3183,22 +3226,22 @@
       </p:sp>
       <p:sp>
         <p:nvSpPr>
-          <p:cNvPr id="4" name="Oval 3"/>
+          <p:cNvPr id="5" name="Oval 4"/>
           <p:cNvSpPr/>
           <p:nvPr/>
         </p:nvSpPr>
         <p:spPr>
           <a:xfrm>
-            <a:off x="6583680" y="548640"/>
-            <a:ext cx="4754880" cy="4754880"/>
+            <a:off x="7040880" y="1600199"/>
+            <a:ext cx="3291840" cy="3291840"/>
           </a:xfrm>
           <a:prstGeom prst="ellipse">
             <a:avLst/>
           </a:prstGeom>
           <a:noFill/>
-          <a:ln w="50800">
+          <a:ln w="44450">
             <a:solidFill>
-              <a:srgbClr val="006E5E"/>
+              <a:srgbClr val="00D4D0"/>
             </a:solidFill>
           </a:ln>
         </p:spPr>
@@ -3226,20 +3269,20 @@
       </p:sp>
       <p:sp>
         <p:nvSpPr>
-          <p:cNvPr id="5" name="Oval 4"/>
+          <p:cNvPr id="6" name="Oval 5"/>
           <p:cNvSpPr/>
           <p:nvPr/>
         </p:nvSpPr>
         <p:spPr>
           <a:xfrm>
-            <a:off x="7315200" y="1280160"/>
-            <a:ext cx="3291840" cy="3291840"/>
+            <a:off x="7863840" y="2423160"/>
+            <a:ext cx="1645920" cy="1645920"/>
           </a:xfrm>
           <a:prstGeom prst="ellipse">
             <a:avLst/>
           </a:prstGeom>
           <a:noFill/>
-          <a:ln w="50800">
+          <a:ln w="38100">
             <a:solidFill>
               <a:srgbClr val="00A89C"/>
             </a:solidFill>
@@ -3267,16 +3310,40 @@
           </a:p>
         </p:txBody>
       </p:sp>
-      <p:sp>
-        <p:nvSpPr>
-          <p:cNvPr id="6" name="Rectangle 5"/>
+      <p:pic>
+        <p:nvPicPr>
+          <p:cNvPr id="7" name="Picture 6" descr="vr_cover.jpg"/>
+          <p:cNvPicPr>
+            <a:picLocks noChangeAspect="1"/>
+          </p:cNvPicPr>
+          <p:nvPr/>
+        </p:nvPicPr>
+        <p:blipFill>
+          <a:blip r:embed="rId2"/>
+          <a:stretch>
+            <a:fillRect/>
+          </a:stretch>
+        </p:blipFill>
+        <p:spPr>
+          <a:xfrm>
+            <a:off x="5120640" y="0"/>
+            <a:ext cx="7068312" cy="6858000"/>
+          </a:xfrm>
+          <a:prstGeom prst="rect">
+            <a:avLst/>
+          </a:prstGeom>
+        </p:spPr>
+      </p:pic>
+      <p:sp>
+        <p:nvSpPr>
+          <p:cNvPr id="8" name="Rectangle 7"/>
           <p:cNvSpPr/>
           <p:nvPr/>
         </p:nvSpPr>
         <p:spPr>
           <a:xfrm>
-            <a:off x="11430000" y="1645920"/>
-            <a:ext cx="758952" cy="1463040"/>
+            <a:off x="11384280" y="1920240"/>
+            <a:ext cx="804672" cy="438912"/>
           </a:xfrm>
           <a:prstGeom prst="rect">
             <a:avLst/>
@@ -3312,14 +3379,100 @@
       </p:sp>
       <p:sp>
         <p:nvSpPr>
-          <p:cNvPr id="7" name="TextBox 6"/>
+          <p:cNvPr id="9" name="Rectangle 8"/>
+          <p:cNvSpPr/>
+          <p:nvPr/>
+        </p:nvSpPr>
+        <p:spPr>
+          <a:xfrm>
+            <a:off x="11384280" y="2926080"/>
+            <a:ext cx="804672" cy="438912"/>
+          </a:xfrm>
+          <a:prstGeom prst="rect">
+            <a:avLst/>
+          </a:prstGeom>
+          <a:solidFill>
+            <a:srgbClr val="00D4D0"/>
+          </a:solidFill>
+          <a:ln>
+            <a:noFill/>
+          </a:ln>
+        </p:spPr>
+        <p:style>
+          <a:lnRef idx="1">
+            <a:schemeClr val="accent1"/>
+          </a:lnRef>
+          <a:fillRef idx="3">
+            <a:schemeClr val="accent1"/>
+          </a:fillRef>
+          <a:effectRef idx="2">
+            <a:schemeClr val="accent1"/>
+          </a:effectRef>
+          <a:fontRef idx="minor">
+            <a:schemeClr val="lt1"/>
+          </a:fontRef>
+        </p:style>
+        <p:txBody>
+          <a:bodyPr rtlCol="0" anchor="ctr"/>
+          <a:lstStyle/>
+          <a:p>
+            <a:pPr algn="ctr"/>
+          </a:p>
+        </p:txBody>
+      </p:sp>
+      <p:sp>
+        <p:nvSpPr>
+          <p:cNvPr id="10" name="Rectangle 9"/>
+          <p:cNvSpPr/>
+          <p:nvPr/>
+        </p:nvSpPr>
+        <p:spPr>
+          <a:xfrm>
+            <a:off x="11384280" y="3931920"/>
+            <a:ext cx="804672" cy="438912"/>
+          </a:xfrm>
+          <a:prstGeom prst="rect">
+            <a:avLst/>
+          </a:prstGeom>
+          <a:solidFill>
+            <a:srgbClr val="00D4D0"/>
+          </a:solidFill>
+          <a:ln>
+            <a:noFill/>
+          </a:ln>
+        </p:spPr>
+        <p:style>
+          <a:lnRef idx="1">
+            <a:schemeClr val="accent1"/>
+          </a:lnRef>
+          <a:fillRef idx="3">
+            <a:schemeClr val="accent1"/>
+          </a:fillRef>
+          <a:effectRef idx="2">
+            <a:schemeClr val="accent1"/>
+          </a:effectRef>
+          <a:fontRef idx="minor">
+            <a:schemeClr val="lt1"/>
+          </a:fontRef>
+        </p:style>
+        <p:txBody>
+          <a:bodyPr rtlCol="0" anchor="ctr"/>
+          <a:lstStyle/>
+          <a:p>
+            <a:pPr algn="ctr"/>
+          </a:p>
+        </p:txBody>
+      </p:sp>
+      <p:sp>
+        <p:nvSpPr>
+          <p:cNvPr id="11" name="TextBox 10"/>
           <p:cNvSpPr txBox="1"/>
           <p:nvPr/>
         </p:nvSpPr>
         <p:spPr>
           <a:xfrm>
-            <a:off x="502920" y="1463040"/>
-            <a:ext cx="4572000" cy="1005840"/>
+            <a:off x="411480" y="1325880"/>
+            <a:ext cx="5029200" cy="914400"/>
           </a:xfrm>
           <a:prstGeom prst="rect">
             <a:avLst/>
@@ -3334,7 +3487,7 @@
           <a:p>
             <a:pPr algn="l"/>
             <a:r>
-              <a:rPr sz="5400" b="1">
+              <a:rPr sz="5200" b="1">
                 <a:solidFill>
                   <a:srgbClr val="006E5E"/>
                 </a:solidFill>
@@ -3342,19 +3495,28 @@
               </a:rPr>
               <a:t>GrabHack</a:t>
             </a:r>
-          </a:p>
-        </p:txBody>
-      </p:sp>
-      <p:sp>
-        <p:nvSpPr>
-          <p:cNvPr id="8" name="TextBox 7"/>
+            <a:r>
+              <a:rPr sz="3000" b="1">
+                <a:solidFill>
+                  <a:srgbClr val="00A89C"/>
+                </a:solidFill>
+                <a:latin typeface="Calibri"/>
+              </a:rPr>
+              <a:t>2.0</a:t>
+            </a:r>
+          </a:p>
+        </p:txBody>
+      </p:sp>
+      <p:sp>
+        <p:nvSpPr>
+          <p:cNvPr id="12" name="TextBox 11"/>
           <p:cNvSpPr txBox="1"/>
           <p:nvPr/>
         </p:nvSpPr>
         <p:spPr>
           <a:xfrm>
-            <a:off x="4069080" y="1463040"/>
-            <a:ext cx="1280160" cy="1005840"/>
+            <a:off x="411480" y="2304288"/>
+            <a:ext cx="4754880" cy="457200"/>
           </a:xfrm>
           <a:prstGeom prst="rect">
             <a:avLst/>
@@ -3369,42 +3531,7 @@
           <a:p>
             <a:pPr algn="l"/>
             <a:r>
-              <a:rPr sz="5400" b="1">
-                <a:solidFill>
-                  <a:srgbClr val="00A89C"/>
-                </a:solidFill>
-                <a:latin typeface="Calibri"/>
-              </a:rPr>
-              <a:t>2.0</a:t>
-            </a:r>
-          </a:p>
-        </p:txBody>
-      </p:sp>
-      <p:sp>
-        <p:nvSpPr>
-          <p:cNvPr id="9" name="TextBox 8"/>
-          <p:cNvSpPr txBox="1"/>
-          <p:nvPr/>
-        </p:nvSpPr>
-        <p:spPr>
-          <a:xfrm>
-            <a:off x="502920" y="2423160"/>
-            <a:ext cx="5029200" cy="502920"/>
-          </a:xfrm>
-          <a:prstGeom prst="rect">
-            <a:avLst/>
-          </a:prstGeom>
-          <a:noFill/>
-        </p:spPr>
-        <p:txBody>
-          <a:bodyPr wrap="square">
-            <a:spAutoFit/>
-          </a:bodyPr>
-          <a:lstStyle/>
-          <a:p>
-            <a:pPr algn="l"/>
-            <a:r>
-              <a:rPr sz="2000" b="1">
+              <a:rPr sz="1900" b="1">
                 <a:solidFill>
                   <a:srgbClr val="006E5E"/>
                 </a:solidFill>
@@ -3417,14 +3544,14 @@
       </p:sp>
       <p:sp>
         <p:nvSpPr>
-          <p:cNvPr id="10" name="Rectangle 9"/>
+          <p:cNvPr id="13" name="Rectangle 12"/>
           <p:cNvSpPr/>
           <p:nvPr/>
         </p:nvSpPr>
         <p:spPr>
           <a:xfrm>
-            <a:off x="502920" y="3063240"/>
-            <a:ext cx="4754880" cy="36576"/>
+            <a:off x="411480" y="2907792"/>
+            <a:ext cx="4389120" cy="36576"/>
           </a:xfrm>
           <a:prstGeom prst="rect">
             <a:avLst/>
@@ -3460,14 +3587,14 @@
       </p:sp>
       <p:sp>
         <p:nvSpPr>
-          <p:cNvPr id="11" name="TextBox 10"/>
+          <p:cNvPr id="14" name="TextBox 13"/>
           <p:cNvSpPr txBox="1"/>
           <p:nvPr/>
         </p:nvSpPr>
         <p:spPr>
           <a:xfrm>
-            <a:off x="502920" y="3200400"/>
-            <a:ext cx="5486400" cy="502920"/>
+            <a:off x="411480" y="3017520"/>
+            <a:ext cx="5029200" cy="475488"/>
           </a:xfrm>
           <a:prstGeom prst="rect">
             <a:avLst/>
@@ -3482,7 +3609,7 @@
           <a:p>
             <a:pPr algn="l"/>
             <a:r>
-              <a:rPr sz="2200" b="1">
+              <a:rPr sz="2100" b="1">
                 <a:solidFill>
                   <a:srgbClr val="006E5E"/>
                 </a:solidFill>
@@ -3495,14 +3622,14 @@
       </p:sp>
       <p:sp>
         <p:nvSpPr>
-          <p:cNvPr id="12" name="TextBox 11"/>
+          <p:cNvPr id="15" name="TextBox 14"/>
           <p:cNvSpPr txBox="1"/>
           <p:nvPr/>
         </p:nvSpPr>
         <p:spPr>
           <a:xfrm>
-            <a:off x="502920" y="3703320"/>
-            <a:ext cx="6858000" cy="548640"/>
+            <a:off x="411480" y="3520440"/>
+            <a:ext cx="5029200" cy="438912"/>
           </a:xfrm>
           <a:prstGeom prst="rect">
             <a:avLst/>
@@ -3517,7 +3644,7 @@
           <a:p>
             <a:pPr algn="l"/>
             <a:r>
-              <a:rPr sz="1800" b="0">
+              <a:rPr sz="1600" b="0">
                 <a:solidFill>
                   <a:srgbClr val="006E5E"/>
                 </a:solidFill>
@@ -3530,14 +3657,14 @@
       </p:sp>
       <p:sp>
         <p:nvSpPr>
-          <p:cNvPr id="13" name="TextBox 12"/>
+          <p:cNvPr id="16" name="TextBox 15"/>
           <p:cNvSpPr txBox="1"/>
           <p:nvPr/>
         </p:nvSpPr>
         <p:spPr>
           <a:xfrm>
-            <a:off x="502920" y="4937760"/>
-            <a:ext cx="1828800" cy="256032"/>
+            <a:off x="411480" y="5029200"/>
+            <a:ext cx="2286000" cy="228600"/>
           </a:xfrm>
           <a:prstGeom prst="rect">
             <a:avLst/>
@@ -3552,7 +3679,7 @@
           <a:p>
             <a:pPr algn="l"/>
             <a:r>
-              <a:rPr sz="900" b="0">
+              <a:rPr sz="800" b="0">
                 <a:solidFill>
                   <a:srgbClr val="006E5E"/>
                 </a:solidFill>
@@ -3565,14 +3692,14 @@
       </p:sp>
       <p:sp>
         <p:nvSpPr>
-          <p:cNvPr id="14" name="TextBox 13"/>
+          <p:cNvPr id="17" name="TextBox 16"/>
           <p:cNvSpPr txBox="1"/>
           <p:nvPr/>
         </p:nvSpPr>
         <p:spPr>
           <a:xfrm>
-            <a:off x="502920" y="5166360"/>
-            <a:ext cx="914400" cy="347472"/>
+            <a:off x="411480" y="5239512"/>
+            <a:ext cx="1005840" cy="365760"/>
           </a:xfrm>
           <a:prstGeom prst="rect">
             <a:avLst/>
@@ -3587,7 +3714,7 @@
           <a:p>
             <a:pPr algn="l"/>
             <a:r>
-              <a:rPr sz="1600" b="1">
+              <a:rPr sz="1800" b="1">
                 <a:solidFill>
                   <a:srgbClr val="00B14F"/>
                 </a:solidFill>
@@ -3600,14 +3727,14 @@
       </p:sp>
       <p:sp>
         <p:nvSpPr>
-          <p:cNvPr id="15" name="TextBox 14"/>
+          <p:cNvPr id="18" name="TextBox 17"/>
           <p:cNvSpPr txBox="1"/>
           <p:nvPr/>
         </p:nvSpPr>
         <p:spPr>
           <a:xfrm>
-            <a:off x="1508760" y="5166360"/>
-            <a:ext cx="914400" cy="347472"/>
+            <a:off x="1481328" y="5239512"/>
+            <a:ext cx="1005840" cy="365760"/>
           </a:xfrm>
           <a:prstGeom prst="rect">
             <a:avLst/>
@@ -3622,9 +3749,9 @@
           <a:p>
             <a:pPr algn="l"/>
             <a:r>
-              <a:rPr sz="1600" b="1">
-                <a:solidFill>
-                  <a:srgbClr val="006E5E"/>
+              <a:rPr sz="1800" b="1">
+                <a:solidFill>
+                  <a:srgbClr val="7B2D8B"/>
                 </a:solidFill>
                 <a:latin typeface="Calibri"/>
               </a:rPr>
@@ -3635,14 +3762,14 @@
       </p:sp>
       <p:sp>
         <p:nvSpPr>
-          <p:cNvPr id="16" name="TextBox 15"/>
+          <p:cNvPr id="19" name="TextBox 18"/>
           <p:cNvSpPr txBox="1"/>
           <p:nvPr/>
         </p:nvSpPr>
         <p:spPr>
           <a:xfrm>
-            <a:off x="9601200" y="6309360"/>
-            <a:ext cx="2468880" cy="274320"/>
+            <a:off x="8686800" y="6382512"/>
+            <a:ext cx="3383280" cy="320040"/>
           </a:xfrm>
           <a:prstGeom prst="rect">
             <a:avLst/>
@@ -3663,51 +3790,8 @@
                 </a:solidFill>
                 <a:latin typeface="Calibri"/>
               </a:rPr>
-              <a:t>Platform Partner: unstop</a:t>
-            </a:r>
-          </a:p>
-        </p:txBody>
-      </p:sp>
-      <p:sp>
-        <p:nvSpPr>
-          <p:cNvPr id="17" name="Rectangle 16"/>
-          <p:cNvSpPr/>
-          <p:nvPr/>
-        </p:nvSpPr>
-        <p:spPr>
-          <a:xfrm>
-            <a:off x="0" y="6583680"/>
-            <a:ext cx="12188952" cy="274320"/>
-          </a:xfrm>
-          <a:prstGeom prst="rect">
-            <a:avLst/>
-          </a:prstGeom>
-          <a:solidFill>
-            <a:srgbClr val="C8F000"/>
-          </a:solidFill>
-          <a:ln>
-            <a:noFill/>
-          </a:ln>
-        </p:spPr>
-        <p:style>
-          <a:lnRef idx="1">
-            <a:schemeClr val="accent1"/>
-          </a:lnRef>
-          <a:fillRef idx="3">
-            <a:schemeClr val="accent1"/>
-          </a:fillRef>
-          <a:effectRef idx="2">
-            <a:schemeClr val="accent1"/>
-          </a:effectRef>
-          <a:fontRef idx="minor">
-            <a:schemeClr val="lt1"/>
-          </a:fontRef>
-        </p:style>
-        <p:txBody>
-          <a:bodyPr rtlCol="0" anchor="ctr"/>
-          <a:lstStyle/>
-          <a:p>
-            <a:pPr algn="ctr"/>
+              <a:t>Platform Partner  unstop</a:t>
+            </a:r>
           </a:p>
         </p:txBody>
       </p:sp>
@@ -3774,57 +3858,93 @@
       </p:sp>
       <p:sp>
         <p:nvSpPr>
-          <p:cNvPr id="3" name="Rectangle 2"/>
+          <p:cNvPr id="3" name="TextBox 2"/>
+          <p:cNvSpPr txBox="1"/>
+          <p:nvPr/>
+        </p:nvSpPr>
+        <p:spPr>
+          <a:xfrm>
+            <a:off x="164592" y="91440"/>
+            <a:ext cx="1280160" cy="347472"/>
+          </a:xfrm>
+          <a:prstGeom prst="rect">
+            <a:avLst/>
+          </a:prstGeom>
+          <a:noFill/>
+        </p:spPr>
+        <p:txBody>
+          <a:bodyPr wrap="square">
+            <a:spAutoFit/>
+          </a:bodyPr>
+          <a:lstStyle/>
+          <a:p>
+            <a:pPr algn="l"/>
+            <a:r>
+              <a:rPr sz="1800" b="1">
+                <a:solidFill>
+                  <a:srgbClr val="00B14F"/>
+                </a:solidFill>
+                <a:latin typeface="Calibri"/>
+              </a:rPr>
+              <a:t>Grab</a:t>
+            </a:r>
+          </a:p>
+        </p:txBody>
+      </p:sp>
+      <p:sp>
+        <p:nvSpPr>
+          <p:cNvPr id="4" name="TextBox 3"/>
+          <p:cNvSpPr txBox="1"/>
+          <p:nvPr/>
+        </p:nvSpPr>
+        <p:spPr>
+          <a:xfrm>
+            <a:off x="9326880" y="91440"/>
+            <a:ext cx="2743200" cy="347472"/>
+          </a:xfrm>
+          <a:prstGeom prst="rect">
+            <a:avLst/>
+          </a:prstGeom>
+          <a:noFill/>
+        </p:spPr>
+        <p:txBody>
+          <a:bodyPr wrap="square">
+            <a:spAutoFit/>
+          </a:bodyPr>
+          <a:lstStyle/>
+          <a:p>
+            <a:pPr algn="r"/>
+            <a:r>
+              <a:rPr sz="1600" b="1">
+                <a:solidFill>
+                  <a:srgbClr val="006E5E"/>
+                </a:solidFill>
+                <a:latin typeface="Calibri"/>
+              </a:rPr>
+              <a:t>GrabHack</a:t>
+            </a:r>
+            <a:r>
+              <a:rPr sz="1100" b="0">
+                <a:solidFill>
+                  <a:srgbClr val="006E5E"/>
+                </a:solidFill>
+                <a:latin typeface="Calibri"/>
+              </a:rPr>
+              <a:t>2.0</a:t>
+            </a:r>
+          </a:p>
+        </p:txBody>
+      </p:sp>
+      <p:sp>
+        <p:nvSpPr>
+          <p:cNvPr id="5" name="Rectangle 4"/>
           <p:cNvSpPr/>
           <p:nvPr/>
         </p:nvSpPr>
         <p:spPr>
           <a:xfrm>
-            <a:off x="0" y="0"/>
-            <a:ext cx="12188952" cy="411480"/>
-          </a:xfrm>
-          <a:prstGeom prst="rect">
-            <a:avLst/>
-          </a:prstGeom>
-          <a:solidFill>
-            <a:srgbClr val="FFFFFF"/>
-          </a:solidFill>
-          <a:ln>
-            <a:noFill/>
-          </a:ln>
-        </p:spPr>
-        <p:style>
-          <a:lnRef idx="1">
-            <a:schemeClr val="accent1"/>
-          </a:lnRef>
-          <a:fillRef idx="3">
-            <a:schemeClr val="accent1"/>
-          </a:fillRef>
-          <a:effectRef idx="2">
-            <a:schemeClr val="accent1"/>
-          </a:effectRef>
-          <a:fontRef idx="minor">
-            <a:schemeClr val="lt1"/>
-          </a:fontRef>
-        </p:style>
-        <p:txBody>
-          <a:bodyPr rtlCol="0" anchor="ctr"/>
-          <a:lstStyle/>
-          <a:p>
-            <a:pPr algn="ctr"/>
-          </a:p>
-        </p:txBody>
-      </p:sp>
-      <p:sp>
-        <p:nvSpPr>
-          <p:cNvPr id="4" name="Rectangle 3"/>
-          <p:cNvSpPr/>
-          <p:nvPr/>
-        </p:nvSpPr>
-        <p:spPr>
-          <a:xfrm>
-            <a:off x="0" y="393192"/>
-            <a:ext cx="12188952" cy="27432"/>
+            <a:off x="0" y="6656832"/>
+            <a:ext cx="12188952" cy="201168"/>
           </a:xfrm>
           <a:prstGeom prst="rect">
             <a:avLst/>
@@ -3860,14 +3980,14 @@
       </p:sp>
       <p:sp>
         <p:nvSpPr>
-          <p:cNvPr id="5" name="TextBox 4"/>
+          <p:cNvPr id="6" name="TextBox 5"/>
           <p:cNvSpPr txBox="1"/>
           <p:nvPr/>
         </p:nvSpPr>
         <p:spPr>
           <a:xfrm>
-            <a:off x="182880" y="45720"/>
-            <a:ext cx="1097280" cy="320040"/>
+            <a:off x="457200" y="594360"/>
+            <a:ext cx="8229600" cy="530352"/>
           </a:xfrm>
           <a:prstGeom prst="rect">
             <a:avLst/>
@@ -3882,27 +4002,27 @@
           <a:p>
             <a:pPr algn="l"/>
             <a:r>
-              <a:rPr sz="1600" b="1">
-                <a:solidFill>
-                  <a:srgbClr val="00B14F"/>
+              <a:rPr sz="2600" b="1">
+                <a:solidFill>
+                  <a:srgbClr val="006E5E"/>
                 </a:solidFill>
                 <a:latin typeface="Calibri"/>
               </a:rPr>
-              <a:t>Grab</a:t>
-            </a:r>
-          </a:p>
-        </p:txBody>
-      </p:sp>
-      <p:sp>
-        <p:nvSpPr>
-          <p:cNvPr id="6" name="TextBox 5"/>
+              <a:t>Team: NewAge Innovators</a:t>
+            </a:r>
+          </a:p>
+        </p:txBody>
+      </p:sp>
+      <p:sp>
+        <p:nvSpPr>
+          <p:cNvPr id="7" name="TextBox 6"/>
           <p:cNvSpPr txBox="1"/>
           <p:nvPr/>
         </p:nvSpPr>
         <p:spPr>
           <a:xfrm>
-            <a:off x="10515600" y="45720"/>
-            <a:ext cx="1554480" cy="320040"/>
+            <a:off x="457200" y="1170432"/>
+            <a:ext cx="8229600" cy="384048"/>
           </a:xfrm>
           <a:prstGeom prst="rect">
             <a:avLst/>
@@ -3915,29 +4035,29 @@
           </a:bodyPr>
           <a:lstStyle/>
           <a:p>
-            <a:pPr algn="r"/>
-            <a:r>
-              <a:rPr sz="1300" b="1">
-                <a:solidFill>
-                  <a:srgbClr val="006E5E"/>
+            <a:pPr algn="l"/>
+            <a:r>
+              <a:rPr sz="1600" b="0">
+                <a:solidFill>
+                  <a:srgbClr val="00A89C"/>
                 </a:solidFill>
                 <a:latin typeface="Calibri"/>
               </a:rPr>
-              <a:t>GrabHack 2.0</a:t>
-            </a:r>
-          </a:p>
-        </p:txBody>
-      </p:sp>
-      <p:sp>
-        <p:nvSpPr>
-          <p:cNvPr id="7" name="Rectangle 6"/>
+              <a:t>AI Saver Agent for Gig Workers</a:t>
+            </a:r>
+          </a:p>
+        </p:txBody>
+      </p:sp>
+      <p:sp>
+        <p:nvSpPr>
+          <p:cNvPr id="8" name="Rectangle 7"/>
           <p:cNvSpPr/>
           <p:nvPr/>
         </p:nvSpPr>
         <p:spPr>
           <a:xfrm>
-            <a:off x="0" y="6583680"/>
-            <a:ext cx="12188952" cy="274320"/>
+            <a:off x="457200" y="1645920"/>
+            <a:ext cx="11247120" cy="45720"/>
           </a:xfrm>
           <a:prstGeom prst="rect">
             <a:avLst/>
@@ -3973,14 +4093,57 @@
       </p:sp>
       <p:sp>
         <p:nvSpPr>
-          <p:cNvPr id="8" name="Rectangle 7"/>
+          <p:cNvPr id="9" name="Rectangle 8"/>
           <p:cNvSpPr/>
           <p:nvPr/>
         </p:nvSpPr>
         <p:spPr>
           <a:xfrm>
-            <a:off x="457200" y="548640"/>
-            <a:ext cx="2560320" cy="256032"/>
+            <a:off x="548640" y="2011680"/>
+            <a:ext cx="3520440" cy="4114800"/>
+          </a:xfrm>
+          <a:prstGeom prst="rect">
+            <a:avLst/>
+          </a:prstGeom>
+          <a:solidFill>
+            <a:srgbClr val="F4F4F4"/>
+          </a:solidFill>
+          <a:ln>
+            <a:noFill/>
+          </a:ln>
+        </p:spPr>
+        <p:style>
+          <a:lnRef idx="1">
+            <a:schemeClr val="accent1"/>
+          </a:lnRef>
+          <a:fillRef idx="3">
+            <a:schemeClr val="accent1"/>
+          </a:fillRef>
+          <a:effectRef idx="2">
+            <a:schemeClr val="accent1"/>
+          </a:effectRef>
+          <a:fontRef idx="minor">
+            <a:schemeClr val="lt1"/>
+          </a:fontRef>
+        </p:style>
+        <p:txBody>
+          <a:bodyPr rtlCol="0" anchor="ctr"/>
+          <a:lstStyle/>
+          <a:p>
+            <a:pPr algn="ctr"/>
+          </a:p>
+        </p:txBody>
+      </p:sp>
+      <p:sp>
+        <p:nvSpPr>
+          <p:cNvPr id="10" name="Rectangle 9"/>
+          <p:cNvSpPr/>
+          <p:nvPr/>
+        </p:nvSpPr>
+        <p:spPr>
+          <a:xfrm>
+            <a:off x="548640" y="2011680"/>
+            <a:ext cx="3520440" cy="73152"/>
           </a:xfrm>
           <a:prstGeom prst="rect">
             <a:avLst/>
@@ -4016,207 +4179,16 @@
       </p:sp>
       <p:sp>
         <p:nvSpPr>
-          <p:cNvPr id="9" name="TextBox 8"/>
-          <p:cNvSpPr txBox="1"/>
-          <p:nvPr/>
-        </p:nvSpPr>
-        <p:spPr>
-          <a:xfrm>
-            <a:off x="502920" y="548640"/>
-            <a:ext cx="2468880" cy="256032"/>
-          </a:xfrm>
-          <a:prstGeom prst="rect">
-            <a:avLst/>
-          </a:prstGeom>
-          <a:noFill/>
-        </p:spPr>
-        <p:txBody>
-          <a:bodyPr wrap="square">
-            <a:spAutoFit/>
-          </a:bodyPr>
-          <a:lstStyle/>
-          <a:p>
-            <a:pPr algn="l"/>
-            <a:r>
-              <a:rPr sz="900" b="1">
-                <a:solidFill>
-                  <a:srgbClr val="FFFFFF"/>
-                </a:solidFill>
-                <a:latin typeface="Calibri"/>
-              </a:rPr>
-              <a:t>TEAM</a:t>
-            </a:r>
-          </a:p>
-        </p:txBody>
-      </p:sp>
-      <p:sp>
-        <p:nvSpPr>
-          <p:cNvPr id="10" name="TextBox 9"/>
-          <p:cNvSpPr txBox="1"/>
-          <p:nvPr/>
-        </p:nvSpPr>
-        <p:spPr>
-          <a:xfrm>
-            <a:off x="457200" y="960120"/>
-            <a:ext cx="8229600" cy="640080"/>
-          </a:xfrm>
-          <a:prstGeom prst="rect">
-            <a:avLst/>
-          </a:prstGeom>
-          <a:noFill/>
-        </p:spPr>
-        <p:txBody>
-          <a:bodyPr wrap="square">
-            <a:spAutoFit/>
-          </a:bodyPr>
-          <a:lstStyle/>
-          <a:p>
-            <a:pPr algn="l"/>
-            <a:r>
-              <a:rPr sz="3200" b="1">
-                <a:solidFill>
-                  <a:srgbClr val="006E5E"/>
-                </a:solidFill>
-                <a:latin typeface="Calibri"/>
-              </a:rPr>
-              <a:t>NewAge Innovators</a:t>
-            </a:r>
-          </a:p>
-        </p:txBody>
-      </p:sp>
-      <p:sp>
-        <p:nvSpPr>
-          <p:cNvPr id="11" name="TextBox 10"/>
-          <p:cNvSpPr txBox="1"/>
-          <p:nvPr/>
-        </p:nvSpPr>
-        <p:spPr>
-          <a:xfrm>
-            <a:off x="457200" y="1600200"/>
-            <a:ext cx="9144000" cy="457200"/>
-          </a:xfrm>
-          <a:prstGeom prst="rect">
-            <a:avLst/>
-          </a:prstGeom>
-          <a:noFill/>
-        </p:spPr>
-        <p:txBody>
-          <a:bodyPr wrap="square">
-            <a:spAutoFit/>
-          </a:bodyPr>
-          <a:lstStyle/>
-          <a:p>
-            <a:pPr algn="l"/>
-            <a:r>
-              <a:rPr sz="2000" b="0">
-                <a:solidFill>
-                  <a:srgbClr val="00A89C"/>
-                </a:solidFill>
-                <a:latin typeface="Calibri"/>
-              </a:rPr>
-              <a:t>AI Saver Agent for Gig Workers</a:t>
-            </a:r>
-          </a:p>
-        </p:txBody>
-      </p:sp>
-      <p:sp>
-        <p:nvSpPr>
-          <p:cNvPr id="12" name="Rectangle 11"/>
+          <p:cNvPr id="11" name="Oval 10"/>
           <p:cNvSpPr/>
           <p:nvPr/>
         </p:nvSpPr>
         <p:spPr>
           <a:xfrm>
-            <a:off x="457200" y="2194560"/>
-            <a:ext cx="11247120" cy="45720"/>
-          </a:xfrm>
-          <a:prstGeom prst="rect">
-            <a:avLst/>
-          </a:prstGeom>
-          <a:solidFill>
-            <a:srgbClr val="C8F000"/>
-          </a:solidFill>
-          <a:ln>
-            <a:noFill/>
-          </a:ln>
-        </p:spPr>
-        <p:style>
-          <a:lnRef idx="1">
-            <a:schemeClr val="accent1"/>
-          </a:lnRef>
-          <a:fillRef idx="3">
-            <a:schemeClr val="accent1"/>
-          </a:fillRef>
-          <a:effectRef idx="2">
-            <a:schemeClr val="accent1"/>
-          </a:effectRef>
-          <a:fontRef idx="minor">
-            <a:schemeClr val="lt1"/>
-          </a:fontRef>
-        </p:style>
-        <p:txBody>
-          <a:bodyPr rtlCol="0" anchor="ctr"/>
-          <a:lstStyle/>
-          <a:p>
-            <a:pPr algn="ctr"/>
-          </a:p>
-        </p:txBody>
-      </p:sp>
-      <p:sp>
-        <p:nvSpPr>
-          <p:cNvPr id="13" name="Rectangle 12"/>
-          <p:cNvSpPr/>
-          <p:nvPr/>
-        </p:nvSpPr>
-        <p:spPr>
-          <a:xfrm>
-            <a:off x="640080" y="2468880"/>
-            <a:ext cx="5303520" cy="1188720"/>
-          </a:xfrm>
-          <a:prstGeom prst="rect">
-            <a:avLst/>
-          </a:prstGeom>
-          <a:solidFill>
-            <a:srgbClr val="F5F5F5"/>
-          </a:solidFill>
-          <a:ln>
-            <a:noFill/>
-          </a:ln>
-        </p:spPr>
-        <p:style>
-          <a:lnRef idx="1">
-            <a:schemeClr val="accent1"/>
-          </a:lnRef>
-          <a:fillRef idx="3">
-            <a:schemeClr val="accent1"/>
-          </a:fillRef>
-          <a:effectRef idx="2">
-            <a:schemeClr val="accent1"/>
-          </a:effectRef>
-          <a:fontRef idx="minor">
-            <a:schemeClr val="lt1"/>
-          </a:fontRef>
-        </p:style>
-        <p:txBody>
-          <a:bodyPr rtlCol="0" anchor="ctr"/>
-          <a:lstStyle/>
-          <a:p>
-            <a:pPr algn="ctr"/>
-          </a:p>
-        </p:txBody>
-      </p:sp>
-      <p:sp>
-        <p:nvSpPr>
-          <p:cNvPr id="14" name="Rectangle 13"/>
-          <p:cNvSpPr/>
-          <p:nvPr/>
-        </p:nvSpPr>
-        <p:spPr>
-          <a:xfrm>
-            <a:off x="640080" y="2468880"/>
-            <a:ext cx="109728" cy="1188720"/>
-          </a:xfrm>
-          <a:prstGeom prst="rect">
+            <a:off x="1554480" y="2240280"/>
+            <a:ext cx="1508760" cy="1508760"/>
+          </a:xfrm>
+          <a:prstGeom prst="ellipse">
             <a:avLst/>
           </a:prstGeom>
           <a:solidFill>
@@ -4250,14 +4222,14 @@
       </p:sp>
       <p:sp>
         <p:nvSpPr>
-          <p:cNvPr id="15" name="TextBox 14"/>
+          <p:cNvPr id="12" name="TextBox 11"/>
           <p:cNvSpPr txBox="1"/>
           <p:nvPr/>
         </p:nvSpPr>
         <p:spPr>
           <a:xfrm>
-            <a:off x="914400" y="2606040"/>
-            <a:ext cx="4754880" cy="411480"/>
+            <a:off x="1554480" y="2514600"/>
+            <a:ext cx="1508760" cy="822960"/>
           </a:xfrm>
           <a:prstGeom prst="rect">
             <a:avLst/>
@@ -4270,29 +4242,29 @@
           </a:bodyPr>
           <a:lstStyle/>
           <a:p>
-            <a:pPr algn="l"/>
-            <a:r>
-              <a:rPr sz="1600" b="1">
-                <a:solidFill>
-                  <a:srgbClr val="006E5E"/>
+            <a:pPr algn="ctr"/>
+            <a:r>
+              <a:rPr sz="2800" b="1">
+                <a:solidFill>
+                  <a:srgbClr val="FFFFFF"/>
                 </a:solidFill>
                 <a:latin typeface="Calibri"/>
               </a:rPr>
-              <a:t>Member 1</a:t>
-            </a:r>
-          </a:p>
-        </p:txBody>
-      </p:sp>
-      <p:sp>
-        <p:nvSpPr>
-          <p:cNvPr id="16" name="TextBox 15"/>
+              <a:t>NG</a:t>
+            </a:r>
+          </a:p>
+        </p:txBody>
+      </p:sp>
+      <p:sp>
+        <p:nvSpPr>
+          <p:cNvPr id="13" name="TextBox 12"/>
           <p:cNvSpPr txBox="1"/>
           <p:nvPr/>
         </p:nvSpPr>
         <p:spPr>
           <a:xfrm>
-            <a:off x="914400" y="3017520"/>
-            <a:ext cx="4754880" cy="365760"/>
+            <a:off x="685800" y="3931920"/>
+            <a:ext cx="3246120" cy="457200"/>
           </a:xfrm>
           <a:prstGeom prst="rect">
             <a:avLst/>
@@ -4305,35 +4277,70 @@
           </a:bodyPr>
           <a:lstStyle/>
           <a:p>
-            <a:pPr algn="l"/>
-            <a:r>
-              <a:rPr sz="1300" b="0">
-                <a:solidFill>
-                  <a:srgbClr val="1A1A1A"/>
+            <a:pPr algn="ctr"/>
+            <a:r>
+              <a:rPr sz="1500" b="1">
+                <a:solidFill>
+                  <a:srgbClr val="006E5E"/>
                 </a:solidFill>
                 <a:latin typeface="Calibri"/>
               </a:rPr>
-              <a:t>Role / Expertise</a:t>
-            </a:r>
-          </a:p>
-        </p:txBody>
-      </p:sp>
-      <p:sp>
-        <p:nvSpPr>
-          <p:cNvPr id="17" name="Rectangle 16"/>
+              <a:t>Naman Goyal</a:t>
+            </a:r>
+          </a:p>
+        </p:txBody>
+      </p:sp>
+      <p:sp>
+        <p:nvSpPr>
+          <p:cNvPr id="14" name="TextBox 13"/>
+          <p:cNvSpPr txBox="1"/>
+          <p:nvPr/>
+        </p:nvSpPr>
+        <p:spPr>
+          <a:xfrm>
+            <a:off x="685800" y="4407408"/>
+            <a:ext cx="3246120" cy="594360"/>
+          </a:xfrm>
+          <a:prstGeom prst="rect">
+            <a:avLst/>
+          </a:prstGeom>
+          <a:noFill/>
+        </p:spPr>
+        <p:txBody>
+          <a:bodyPr wrap="square">
+            <a:spAutoFit/>
+          </a:bodyPr>
+          <a:lstStyle/>
+          <a:p>
+            <a:pPr algn="ctr"/>
+            <a:r>
+              <a:rPr sz="1100" b="0">
+                <a:solidFill>
+                  <a:srgbClr val="1A1A1A"/>
+                </a:solidFill>
+                <a:latin typeface="Calibri"/>
+              </a:rPr>
+              <a:t>Team Lead / Product &amp; Strategy</a:t>
+            </a:r>
+          </a:p>
+        </p:txBody>
+      </p:sp>
+      <p:sp>
+        <p:nvSpPr>
+          <p:cNvPr id="15" name="Rectangle 14"/>
           <p:cNvSpPr/>
           <p:nvPr/>
         </p:nvSpPr>
         <p:spPr>
           <a:xfrm>
-            <a:off x="6492240" y="2468880"/>
-            <a:ext cx="5303520" cy="1188720"/>
+            <a:off x="4407407" y="2011680"/>
+            <a:ext cx="3520440" cy="4114800"/>
           </a:xfrm>
           <a:prstGeom prst="rect">
             <a:avLst/>
           </a:prstGeom>
           <a:solidFill>
-            <a:srgbClr val="F5F5F5"/>
+            <a:srgbClr val="F4F4F4"/>
           </a:solidFill>
           <a:ln>
             <a:noFill/>
@@ -4363,14 +4370,14 @@
       </p:sp>
       <p:sp>
         <p:nvSpPr>
-          <p:cNvPr id="18" name="Rectangle 17"/>
+          <p:cNvPr id="16" name="Rectangle 15"/>
           <p:cNvSpPr/>
           <p:nvPr/>
         </p:nvSpPr>
         <p:spPr>
           <a:xfrm>
-            <a:off x="6492240" y="2468880"/>
-            <a:ext cx="109728" cy="1188720"/>
+            <a:off x="4407407" y="2011680"/>
+            <a:ext cx="3520440" cy="73152"/>
           </a:xfrm>
           <a:prstGeom prst="rect">
             <a:avLst/>
@@ -4406,129 +4413,16 @@
       </p:sp>
       <p:sp>
         <p:nvSpPr>
-          <p:cNvPr id="19" name="TextBox 18"/>
-          <p:cNvSpPr txBox="1"/>
-          <p:nvPr/>
-        </p:nvSpPr>
-        <p:spPr>
-          <a:xfrm>
-            <a:off x="6766560" y="2606040"/>
-            <a:ext cx="4754880" cy="411480"/>
-          </a:xfrm>
-          <a:prstGeom prst="rect">
-            <a:avLst/>
-          </a:prstGeom>
-          <a:noFill/>
-        </p:spPr>
-        <p:txBody>
-          <a:bodyPr wrap="square">
-            <a:spAutoFit/>
-          </a:bodyPr>
-          <a:lstStyle/>
-          <a:p>
-            <a:pPr algn="l"/>
-            <a:r>
-              <a:rPr sz="1600" b="1">
-                <a:solidFill>
-                  <a:srgbClr val="006E5E"/>
-                </a:solidFill>
-                <a:latin typeface="Calibri"/>
-              </a:rPr>
-              <a:t>Member 2</a:t>
-            </a:r>
-          </a:p>
-        </p:txBody>
-      </p:sp>
-      <p:sp>
-        <p:nvSpPr>
-          <p:cNvPr id="20" name="TextBox 19"/>
-          <p:cNvSpPr txBox="1"/>
-          <p:nvPr/>
-        </p:nvSpPr>
-        <p:spPr>
-          <a:xfrm>
-            <a:off x="6766560" y="3017520"/>
-            <a:ext cx="4754880" cy="365760"/>
-          </a:xfrm>
-          <a:prstGeom prst="rect">
-            <a:avLst/>
-          </a:prstGeom>
-          <a:noFill/>
-        </p:spPr>
-        <p:txBody>
-          <a:bodyPr wrap="square">
-            <a:spAutoFit/>
-          </a:bodyPr>
-          <a:lstStyle/>
-          <a:p>
-            <a:pPr algn="l"/>
-            <a:r>
-              <a:rPr sz="1300" b="0">
-                <a:solidFill>
-                  <a:srgbClr val="1A1A1A"/>
-                </a:solidFill>
-                <a:latin typeface="Calibri"/>
-              </a:rPr>
-              <a:t>Role / Expertise</a:t>
-            </a:r>
-          </a:p>
-        </p:txBody>
-      </p:sp>
-      <p:sp>
-        <p:nvSpPr>
-          <p:cNvPr id="21" name="Rectangle 20"/>
+          <p:cNvPr id="17" name="Oval 16"/>
           <p:cNvSpPr/>
           <p:nvPr/>
         </p:nvSpPr>
         <p:spPr>
           <a:xfrm>
-            <a:off x="640080" y="3931920"/>
-            <a:ext cx="5303520" cy="1188720"/>
-          </a:xfrm>
-          <a:prstGeom prst="rect">
-            <a:avLst/>
-          </a:prstGeom>
-          <a:solidFill>
-            <a:srgbClr val="F5F5F5"/>
-          </a:solidFill>
-          <a:ln>
-            <a:noFill/>
-          </a:ln>
-        </p:spPr>
-        <p:style>
-          <a:lnRef idx="1">
-            <a:schemeClr val="accent1"/>
-          </a:lnRef>
-          <a:fillRef idx="3">
-            <a:schemeClr val="accent1"/>
-          </a:fillRef>
-          <a:effectRef idx="2">
-            <a:schemeClr val="accent1"/>
-          </a:effectRef>
-          <a:fontRef idx="minor">
-            <a:schemeClr val="lt1"/>
-          </a:fontRef>
-        </p:style>
-        <p:txBody>
-          <a:bodyPr rtlCol="0" anchor="ctr"/>
-          <a:lstStyle/>
-          <a:p>
-            <a:pPr algn="ctr"/>
-          </a:p>
-        </p:txBody>
-      </p:sp>
-      <p:sp>
-        <p:nvSpPr>
-          <p:cNvPr id="22" name="Rectangle 21"/>
-          <p:cNvSpPr/>
-          <p:nvPr/>
-        </p:nvSpPr>
-        <p:spPr>
-          <a:xfrm>
-            <a:off x="640080" y="3931920"/>
-            <a:ext cx="109728" cy="1188720"/>
-          </a:xfrm>
-          <a:prstGeom prst="rect">
+            <a:off x="5413248" y="2240280"/>
+            <a:ext cx="1508760" cy="1508760"/>
+          </a:xfrm>
+          <a:prstGeom prst="ellipse">
             <a:avLst/>
           </a:prstGeom>
           <a:solidFill>
@@ -4562,14 +4456,14 @@
       </p:sp>
       <p:sp>
         <p:nvSpPr>
-          <p:cNvPr id="23" name="TextBox 22"/>
+          <p:cNvPr id="18" name="TextBox 17"/>
           <p:cNvSpPr txBox="1"/>
           <p:nvPr/>
         </p:nvSpPr>
         <p:spPr>
           <a:xfrm>
-            <a:off x="914400" y="4069080"/>
-            <a:ext cx="4754880" cy="411480"/>
+            <a:off x="5413248" y="2514600"/>
+            <a:ext cx="1508760" cy="822960"/>
           </a:xfrm>
           <a:prstGeom prst="rect">
             <a:avLst/>
@@ -4582,29 +4476,29 @@
           </a:bodyPr>
           <a:lstStyle/>
           <a:p>
-            <a:pPr algn="l"/>
-            <a:r>
-              <a:rPr sz="1600" b="1">
-                <a:solidFill>
-                  <a:srgbClr val="006E5E"/>
+            <a:pPr algn="ctr"/>
+            <a:r>
+              <a:rPr sz="2800" b="1">
+                <a:solidFill>
+                  <a:srgbClr val="FFFFFF"/>
                 </a:solidFill>
                 <a:latin typeface="Calibri"/>
               </a:rPr>
-              <a:t>Member 3</a:t>
-            </a:r>
-          </a:p>
-        </p:txBody>
-      </p:sp>
-      <p:sp>
-        <p:nvSpPr>
-          <p:cNvPr id="24" name="TextBox 23"/>
+              <a:t>S</a:t>
+            </a:r>
+          </a:p>
+        </p:txBody>
+      </p:sp>
+      <p:sp>
+        <p:nvSpPr>
+          <p:cNvPr id="19" name="TextBox 18"/>
           <p:cNvSpPr txBox="1"/>
           <p:nvPr/>
         </p:nvSpPr>
         <p:spPr>
           <a:xfrm>
-            <a:off x="914400" y="4480560"/>
-            <a:ext cx="4754880" cy="365760"/>
+            <a:off x="4544568" y="3931920"/>
+            <a:ext cx="3246120" cy="457200"/>
           </a:xfrm>
           <a:prstGeom prst="rect">
             <a:avLst/>
@@ -4617,35 +4511,70 @@
           </a:bodyPr>
           <a:lstStyle/>
           <a:p>
-            <a:pPr algn="l"/>
-            <a:r>
-              <a:rPr sz="1300" b="0">
-                <a:solidFill>
-                  <a:srgbClr val="1A1A1A"/>
+            <a:pPr algn="ctr"/>
+            <a:r>
+              <a:rPr sz="1500" b="1">
+                <a:solidFill>
+                  <a:srgbClr val="006E5E"/>
                 </a:solidFill>
                 <a:latin typeface="Calibri"/>
               </a:rPr>
-              <a:t>Role / Expertise</a:t>
-            </a:r>
-          </a:p>
-        </p:txBody>
-      </p:sp>
-      <p:sp>
-        <p:nvSpPr>
-          <p:cNvPr id="25" name="Rectangle 24"/>
+              <a:t>Suyash</a:t>
+            </a:r>
+          </a:p>
+        </p:txBody>
+      </p:sp>
+      <p:sp>
+        <p:nvSpPr>
+          <p:cNvPr id="20" name="TextBox 19"/>
+          <p:cNvSpPr txBox="1"/>
+          <p:nvPr/>
+        </p:nvSpPr>
+        <p:spPr>
+          <a:xfrm>
+            <a:off x="4544568" y="4407408"/>
+            <a:ext cx="3246120" cy="594360"/>
+          </a:xfrm>
+          <a:prstGeom prst="rect">
+            <a:avLst/>
+          </a:prstGeom>
+          <a:noFill/>
+        </p:spPr>
+        <p:txBody>
+          <a:bodyPr wrap="square">
+            <a:spAutoFit/>
+          </a:bodyPr>
+          <a:lstStyle/>
+          <a:p>
+            <a:pPr algn="ctr"/>
+            <a:r>
+              <a:rPr sz="1100" b="0">
+                <a:solidFill>
+                  <a:srgbClr val="1A1A1A"/>
+                </a:solidFill>
+                <a:latin typeface="Calibri"/>
+              </a:rPr>
+              <a:t>AI / ML Engineer</a:t>
+            </a:r>
+          </a:p>
+        </p:txBody>
+      </p:sp>
+      <p:sp>
+        <p:nvSpPr>
+          <p:cNvPr id="21" name="Rectangle 20"/>
           <p:cNvSpPr/>
           <p:nvPr/>
         </p:nvSpPr>
         <p:spPr>
           <a:xfrm>
-            <a:off x="6492240" y="3931920"/>
-            <a:ext cx="5303520" cy="1188720"/>
+            <a:off x="8266175" y="2011680"/>
+            <a:ext cx="3520440" cy="4114800"/>
           </a:xfrm>
           <a:prstGeom prst="rect">
             <a:avLst/>
           </a:prstGeom>
           <a:solidFill>
-            <a:srgbClr val="F5F5F5"/>
+            <a:srgbClr val="F4F4F4"/>
           </a:solidFill>
           <a:ln>
             <a:noFill/>
@@ -4675,14 +4604,14 @@
       </p:sp>
       <p:sp>
         <p:nvSpPr>
-          <p:cNvPr id="26" name="Rectangle 25"/>
+          <p:cNvPr id="22" name="Rectangle 21"/>
           <p:cNvSpPr/>
           <p:nvPr/>
         </p:nvSpPr>
         <p:spPr>
           <a:xfrm>
-            <a:off x="6492240" y="3931920"/>
-            <a:ext cx="109728" cy="1188720"/>
+            <a:off x="8266175" y="2011680"/>
+            <a:ext cx="3520440" cy="73152"/>
           </a:xfrm>
           <a:prstGeom prst="rect">
             <a:avLst/>
@@ -4718,14 +4647,57 @@
       </p:sp>
       <p:sp>
         <p:nvSpPr>
-          <p:cNvPr id="27" name="TextBox 26"/>
+          <p:cNvPr id="23" name="Oval 22"/>
+          <p:cNvSpPr/>
+          <p:nvPr/>
+        </p:nvSpPr>
+        <p:spPr>
+          <a:xfrm>
+            <a:off x="9272015" y="2240280"/>
+            <a:ext cx="1508760" cy="1508760"/>
+          </a:xfrm>
+          <a:prstGeom prst="ellipse">
+            <a:avLst/>
+          </a:prstGeom>
+          <a:solidFill>
+            <a:srgbClr val="00A89C"/>
+          </a:solidFill>
+          <a:ln>
+            <a:noFill/>
+          </a:ln>
+        </p:spPr>
+        <p:style>
+          <a:lnRef idx="1">
+            <a:schemeClr val="accent1"/>
+          </a:lnRef>
+          <a:fillRef idx="3">
+            <a:schemeClr val="accent1"/>
+          </a:fillRef>
+          <a:effectRef idx="2">
+            <a:schemeClr val="accent1"/>
+          </a:effectRef>
+          <a:fontRef idx="minor">
+            <a:schemeClr val="lt1"/>
+          </a:fontRef>
+        </p:style>
+        <p:txBody>
+          <a:bodyPr rtlCol="0" anchor="ctr"/>
+          <a:lstStyle/>
+          <a:p>
+            <a:pPr algn="ctr"/>
+          </a:p>
+        </p:txBody>
+      </p:sp>
+      <p:sp>
+        <p:nvSpPr>
+          <p:cNvPr id="24" name="TextBox 23"/>
           <p:cNvSpPr txBox="1"/>
           <p:nvPr/>
         </p:nvSpPr>
         <p:spPr>
           <a:xfrm>
-            <a:off x="6766560" y="4069080"/>
-            <a:ext cx="4754880" cy="411480"/>
+            <a:off x="9272015" y="2514600"/>
+            <a:ext cx="1508760" cy="822960"/>
           </a:xfrm>
           <a:prstGeom prst="rect">
             <a:avLst/>
@@ -4738,29 +4710,29 @@
           </a:bodyPr>
           <a:lstStyle/>
           <a:p>
-            <a:pPr algn="l"/>
-            <a:r>
-              <a:rPr sz="1600" b="1">
-                <a:solidFill>
-                  <a:srgbClr val="006E5E"/>
+            <a:pPr algn="ctr"/>
+            <a:r>
+              <a:rPr sz="2800" b="1">
+                <a:solidFill>
+                  <a:srgbClr val="FFFFFF"/>
                 </a:solidFill>
                 <a:latin typeface="Calibri"/>
               </a:rPr>
-              <a:t>Member 4</a:t>
-            </a:r>
-          </a:p>
-        </p:txBody>
-      </p:sp>
-      <p:sp>
-        <p:nvSpPr>
-          <p:cNvPr id="28" name="TextBox 27"/>
+              <a:t>MV</a:t>
+            </a:r>
+          </a:p>
+        </p:txBody>
+      </p:sp>
+      <p:sp>
+        <p:nvSpPr>
+          <p:cNvPr id="25" name="TextBox 24"/>
           <p:cNvSpPr txBox="1"/>
           <p:nvPr/>
         </p:nvSpPr>
         <p:spPr>
           <a:xfrm>
-            <a:off x="6766560" y="4480560"/>
-            <a:ext cx="4754880" cy="365760"/>
+            <a:off x="8403336" y="3931920"/>
+            <a:ext cx="3246120" cy="457200"/>
           </a:xfrm>
           <a:prstGeom prst="rect">
             <a:avLst/>
@@ -4773,15 +4745,50 @@
           </a:bodyPr>
           <a:lstStyle/>
           <a:p>
-            <a:pPr algn="l"/>
-            <a:r>
-              <a:rPr sz="1300" b="0">
-                <a:solidFill>
-                  <a:srgbClr val="1A1A1A"/>
+            <a:pPr algn="ctr"/>
+            <a:r>
+              <a:rPr sz="1500" b="1">
+                <a:solidFill>
+                  <a:srgbClr val="006E5E"/>
                 </a:solidFill>
                 <a:latin typeface="Calibri"/>
               </a:rPr>
-              <a:t>Role / Expertise</a:t>
+              <a:t>Mridul Verma</a:t>
+            </a:r>
+          </a:p>
+        </p:txBody>
+      </p:sp>
+      <p:sp>
+        <p:nvSpPr>
+          <p:cNvPr id="26" name="TextBox 25"/>
+          <p:cNvSpPr txBox="1"/>
+          <p:nvPr/>
+        </p:nvSpPr>
+        <p:spPr>
+          <a:xfrm>
+            <a:off x="8403336" y="4407408"/>
+            <a:ext cx="3246120" cy="594360"/>
+          </a:xfrm>
+          <a:prstGeom prst="rect">
+            <a:avLst/>
+          </a:prstGeom>
+          <a:noFill/>
+        </p:spPr>
+        <p:txBody>
+          <a:bodyPr wrap="square">
+            <a:spAutoFit/>
+          </a:bodyPr>
+          <a:lstStyle/>
+          <a:p>
+            <a:pPr algn="ctr"/>
+            <a:r>
+              <a:rPr sz="1100" b="0">
+                <a:solidFill>
+                  <a:srgbClr val="1A1A1A"/>
+                </a:solidFill>
+                <a:latin typeface="Calibri"/>
+              </a:rPr>
+              <a:t>Full-Stack Developer</a:t>
             </a:r>
           </a:p>
         </p:txBody>
@@ -4849,57 +4856,93 @@
       </p:sp>
       <p:sp>
         <p:nvSpPr>
-          <p:cNvPr id="3" name="Rectangle 2"/>
+          <p:cNvPr id="3" name="TextBox 2"/>
+          <p:cNvSpPr txBox="1"/>
+          <p:nvPr/>
+        </p:nvSpPr>
+        <p:spPr>
+          <a:xfrm>
+            <a:off x="164592" y="91440"/>
+            <a:ext cx="1280160" cy="347472"/>
+          </a:xfrm>
+          <a:prstGeom prst="rect">
+            <a:avLst/>
+          </a:prstGeom>
+          <a:noFill/>
+        </p:spPr>
+        <p:txBody>
+          <a:bodyPr wrap="square">
+            <a:spAutoFit/>
+          </a:bodyPr>
+          <a:lstStyle/>
+          <a:p>
+            <a:pPr algn="l"/>
+            <a:r>
+              <a:rPr sz="1800" b="1">
+                <a:solidFill>
+                  <a:srgbClr val="00B14F"/>
+                </a:solidFill>
+                <a:latin typeface="Calibri"/>
+              </a:rPr>
+              <a:t>Grab</a:t>
+            </a:r>
+          </a:p>
+        </p:txBody>
+      </p:sp>
+      <p:sp>
+        <p:nvSpPr>
+          <p:cNvPr id="4" name="TextBox 3"/>
+          <p:cNvSpPr txBox="1"/>
+          <p:nvPr/>
+        </p:nvSpPr>
+        <p:spPr>
+          <a:xfrm>
+            <a:off x="9326880" y="91440"/>
+            <a:ext cx="2743200" cy="347472"/>
+          </a:xfrm>
+          <a:prstGeom prst="rect">
+            <a:avLst/>
+          </a:prstGeom>
+          <a:noFill/>
+        </p:spPr>
+        <p:txBody>
+          <a:bodyPr wrap="square">
+            <a:spAutoFit/>
+          </a:bodyPr>
+          <a:lstStyle/>
+          <a:p>
+            <a:pPr algn="r"/>
+            <a:r>
+              <a:rPr sz="1600" b="1">
+                <a:solidFill>
+                  <a:srgbClr val="006E5E"/>
+                </a:solidFill>
+                <a:latin typeface="Calibri"/>
+              </a:rPr>
+              <a:t>GrabHack</a:t>
+            </a:r>
+            <a:r>
+              <a:rPr sz="1100" b="0">
+                <a:solidFill>
+                  <a:srgbClr val="006E5E"/>
+                </a:solidFill>
+                <a:latin typeface="Calibri"/>
+              </a:rPr>
+              <a:t>2.0</a:t>
+            </a:r>
+          </a:p>
+        </p:txBody>
+      </p:sp>
+      <p:sp>
+        <p:nvSpPr>
+          <p:cNvPr id="5" name="Rectangle 4"/>
           <p:cNvSpPr/>
           <p:nvPr/>
         </p:nvSpPr>
         <p:spPr>
           <a:xfrm>
-            <a:off x="0" y="0"/>
-            <a:ext cx="12188952" cy="411480"/>
-          </a:xfrm>
-          <a:prstGeom prst="rect">
-            <a:avLst/>
-          </a:prstGeom>
-          <a:solidFill>
-            <a:srgbClr val="FFFFFF"/>
-          </a:solidFill>
-          <a:ln>
-            <a:noFill/>
-          </a:ln>
-        </p:spPr>
-        <p:style>
-          <a:lnRef idx="1">
-            <a:schemeClr val="accent1"/>
-          </a:lnRef>
-          <a:fillRef idx="3">
-            <a:schemeClr val="accent1"/>
-          </a:fillRef>
-          <a:effectRef idx="2">
-            <a:schemeClr val="accent1"/>
-          </a:effectRef>
-          <a:fontRef idx="minor">
-            <a:schemeClr val="lt1"/>
-          </a:fontRef>
-        </p:style>
-        <p:txBody>
-          <a:bodyPr rtlCol="0" anchor="ctr"/>
-          <a:lstStyle/>
-          <a:p>
-            <a:pPr algn="ctr"/>
-          </a:p>
-        </p:txBody>
-      </p:sp>
-      <p:sp>
-        <p:nvSpPr>
-          <p:cNvPr id="4" name="Rectangle 3"/>
-          <p:cNvSpPr/>
-          <p:nvPr/>
-        </p:nvSpPr>
-        <p:spPr>
-          <a:xfrm>
-            <a:off x="0" y="393192"/>
-            <a:ext cx="12188952" cy="27432"/>
+            <a:off x="0" y="6656832"/>
+            <a:ext cx="12188952" cy="201168"/>
           </a:xfrm>
           <a:prstGeom prst="rect">
             <a:avLst/>
@@ -4935,14 +4978,14 @@
       </p:sp>
       <p:sp>
         <p:nvSpPr>
-          <p:cNvPr id="5" name="TextBox 4"/>
+          <p:cNvPr id="6" name="TextBox 5"/>
           <p:cNvSpPr txBox="1"/>
           <p:nvPr/>
         </p:nvSpPr>
         <p:spPr>
           <a:xfrm>
-            <a:off x="182880" y="45720"/>
-            <a:ext cx="1097280" cy="320040"/>
+            <a:off x="457200" y="548640"/>
+            <a:ext cx="8229600" cy="502920"/>
           </a:xfrm>
           <a:prstGeom prst="rect">
             <a:avLst/>
@@ -4957,48 +5000,13 @@
           <a:p>
             <a:pPr algn="l"/>
             <a:r>
-              <a:rPr sz="1600" b="1">
-                <a:solidFill>
-                  <a:srgbClr val="00B14F"/>
+              <a:rPr sz="2600" b="1">
+                <a:solidFill>
+                  <a:srgbClr val="006E5E"/>
                 </a:solidFill>
                 <a:latin typeface="Calibri"/>
               </a:rPr>
-              <a:t>Grab</a:t>
-            </a:r>
-          </a:p>
-        </p:txBody>
-      </p:sp>
-      <p:sp>
-        <p:nvSpPr>
-          <p:cNvPr id="6" name="TextBox 5"/>
-          <p:cNvSpPr txBox="1"/>
-          <p:nvPr/>
-        </p:nvSpPr>
-        <p:spPr>
-          <a:xfrm>
-            <a:off x="10515600" y="45720"/>
-            <a:ext cx="1554480" cy="320040"/>
-          </a:xfrm>
-          <a:prstGeom prst="rect">
-            <a:avLst/>
-          </a:prstGeom>
-          <a:noFill/>
-        </p:spPr>
-        <p:txBody>
-          <a:bodyPr wrap="square">
-            <a:spAutoFit/>
-          </a:bodyPr>
-          <a:lstStyle/>
-          <a:p>
-            <a:pPr algn="r"/>
-            <a:r>
-              <a:rPr sz="1300" b="1">
-                <a:solidFill>
-                  <a:srgbClr val="006E5E"/>
-                </a:solidFill>
-                <a:latin typeface="Calibri"/>
-              </a:rPr>
-              <a:t>GrabHack 2.0</a:t>
+              <a:t>Problem Statement</a:t>
             </a:r>
           </a:p>
         </p:txBody>
@@ -5011,8 +5019,8 @@
         </p:nvSpPr>
         <p:spPr>
           <a:xfrm>
-            <a:off x="0" y="6583680"/>
-            <a:ext cx="12188952" cy="274320"/>
+            <a:off x="457200" y="1115568"/>
+            <a:ext cx="11247120" cy="45720"/>
           </a:xfrm>
           <a:prstGeom prst="rect">
             <a:avLst/>
@@ -5054,8 +5062,51 @@
         </p:nvSpPr>
         <p:spPr>
           <a:xfrm>
-            <a:off x="457200" y="548640"/>
-            <a:ext cx="2560320" cy="256032"/>
+            <a:off x="502920" y="1325880"/>
+            <a:ext cx="5577840" cy="2377440"/>
+          </a:xfrm>
+          <a:prstGeom prst="rect">
+            <a:avLst/>
+          </a:prstGeom>
+          <a:solidFill>
+            <a:srgbClr val="F4F4F4"/>
+          </a:solidFill>
+          <a:ln>
+            <a:noFill/>
+          </a:ln>
+        </p:spPr>
+        <p:style>
+          <a:lnRef idx="1">
+            <a:schemeClr val="accent1"/>
+          </a:lnRef>
+          <a:fillRef idx="3">
+            <a:schemeClr val="accent1"/>
+          </a:fillRef>
+          <a:effectRef idx="2">
+            <a:schemeClr val="accent1"/>
+          </a:effectRef>
+          <a:fontRef idx="minor">
+            <a:schemeClr val="lt1"/>
+          </a:fontRef>
+        </p:style>
+        <p:txBody>
+          <a:bodyPr rtlCol="0" anchor="ctr"/>
+          <a:lstStyle/>
+          <a:p>
+            <a:pPr algn="ctr"/>
+          </a:p>
+        </p:txBody>
+      </p:sp>
+      <p:sp>
+        <p:nvSpPr>
+          <p:cNvPr id="9" name="Rectangle 8"/>
+          <p:cNvSpPr/>
+          <p:nvPr/>
+        </p:nvSpPr>
+        <p:spPr>
+          <a:xfrm>
+            <a:off x="502920" y="1325880"/>
+            <a:ext cx="109728" cy="2377440"/>
           </a:xfrm>
           <a:prstGeom prst="rect">
             <a:avLst/>
@@ -5091,14 +5142,14 @@
       </p:sp>
       <p:sp>
         <p:nvSpPr>
-          <p:cNvPr id="9" name="TextBox 8"/>
+          <p:cNvPr id="10" name="TextBox 9"/>
           <p:cNvSpPr txBox="1"/>
           <p:nvPr/>
         </p:nvSpPr>
         <p:spPr>
           <a:xfrm>
-            <a:off x="502920" y="548640"/>
-            <a:ext cx="2468880" cy="256032"/>
+            <a:off x="731520" y="1490472"/>
+            <a:ext cx="5166360" cy="411480"/>
           </a:xfrm>
           <a:prstGeom prst="rect">
             <a:avLst/>
@@ -5113,27 +5164,27 @@
           <a:p>
             <a:pPr algn="l"/>
             <a:r>
-              <a:rPr sz="900" b="1">
-                <a:solidFill>
-                  <a:srgbClr val="FFFFFF"/>
+              <a:rPr sz="1400" b="1">
+                <a:solidFill>
+                  <a:srgbClr val="006E5E"/>
                 </a:solidFill>
                 <a:latin typeface="Calibri"/>
               </a:rPr>
-              <a:t>PROBLEM STATEMENT</a:t>
-            </a:r>
-          </a:p>
-        </p:txBody>
-      </p:sp>
-      <p:sp>
-        <p:nvSpPr>
-          <p:cNvPr id="10" name="TextBox 9"/>
+              <a:t>Irregular Income</a:t>
+            </a:r>
+          </a:p>
+        </p:txBody>
+      </p:sp>
+      <p:sp>
+        <p:nvSpPr>
+          <p:cNvPr id="11" name="TextBox 10"/>
           <p:cNvSpPr txBox="1"/>
           <p:nvPr/>
         </p:nvSpPr>
         <p:spPr>
           <a:xfrm>
-            <a:off x="457200" y="960120"/>
-            <a:ext cx="8229600" cy="548640"/>
+            <a:off x="731520" y="1947672"/>
+            <a:ext cx="5166360" cy="1554480"/>
           </a:xfrm>
           <a:prstGeom prst="rect">
             <a:avLst/>
@@ -5148,33 +5199,33 @@
           <a:p>
             <a:pPr algn="l"/>
             <a:r>
-              <a:rPr sz="2800" b="1">
-                <a:solidFill>
-                  <a:srgbClr val="006E5E"/>
+              <a:rPr sz="1100" b="0">
+                <a:solidFill>
+                  <a:srgbClr val="1A1A1A"/>
                 </a:solidFill>
                 <a:latin typeface="Calibri"/>
               </a:rPr>
-              <a:t>The Problem</a:t>
-            </a:r>
-          </a:p>
-        </p:txBody>
-      </p:sp>
-      <p:sp>
-        <p:nvSpPr>
-          <p:cNvPr id="11" name="Rectangle 10"/>
+              <a:t>Gig workers face unpredictable, volatile earnings making savings planning nearly impossible.</a:t>
+            </a:r>
+          </a:p>
+        </p:txBody>
+      </p:sp>
+      <p:sp>
+        <p:nvSpPr>
+          <p:cNvPr id="12" name="Rectangle 11"/>
           <p:cNvSpPr/>
           <p:nvPr/>
         </p:nvSpPr>
         <p:spPr>
           <a:xfrm>
-            <a:off x="457200" y="1554480"/>
-            <a:ext cx="11247120" cy="45720"/>
+            <a:off x="6400800" y="1325880"/>
+            <a:ext cx="5577840" cy="2377440"/>
           </a:xfrm>
           <a:prstGeom prst="rect">
             <a:avLst/>
           </a:prstGeom>
           <a:solidFill>
-            <a:srgbClr val="C8F000"/>
+            <a:srgbClr val="F4F4F4"/>
           </a:solidFill>
           <a:ln>
             <a:noFill/>
@@ -5204,57 +5255,14 @@
       </p:sp>
       <p:sp>
         <p:nvSpPr>
-          <p:cNvPr id="12" name="Rectangle 11"/>
-          <p:cNvSpPr/>
-          <p:nvPr/>
-        </p:nvSpPr>
-        <p:spPr>
-          <a:xfrm>
-            <a:off x="548640" y="1783080"/>
-            <a:ext cx="5577840" cy="1920240"/>
-          </a:xfrm>
-          <a:prstGeom prst="rect">
-            <a:avLst/>
-          </a:prstGeom>
-          <a:solidFill>
-            <a:srgbClr val="F5F5F5"/>
-          </a:solidFill>
-          <a:ln>
-            <a:noFill/>
-          </a:ln>
-        </p:spPr>
-        <p:style>
-          <a:lnRef idx="1">
-            <a:schemeClr val="accent1"/>
-          </a:lnRef>
-          <a:fillRef idx="3">
-            <a:schemeClr val="accent1"/>
-          </a:fillRef>
-          <a:effectRef idx="2">
-            <a:schemeClr val="accent1"/>
-          </a:effectRef>
-          <a:fontRef idx="minor">
-            <a:schemeClr val="lt1"/>
-          </a:fontRef>
-        </p:style>
-        <p:txBody>
-          <a:bodyPr rtlCol="0" anchor="ctr"/>
-          <a:lstStyle/>
-          <a:p>
-            <a:pPr algn="ctr"/>
-          </a:p>
-        </p:txBody>
-      </p:sp>
-      <p:sp>
-        <p:nvSpPr>
           <p:cNvPr id="13" name="Rectangle 12"/>
           <p:cNvSpPr/>
           <p:nvPr/>
         </p:nvSpPr>
         <p:spPr>
           <a:xfrm>
-            <a:off x="548640" y="1783080"/>
-            <a:ext cx="5577840" cy="64008"/>
+            <a:off x="6400800" y="1325880"/>
+            <a:ext cx="109728" cy="2377440"/>
           </a:xfrm>
           <a:prstGeom prst="rect">
             <a:avLst/>
@@ -5296,8 +5304,8 @@
         </p:nvSpPr>
         <p:spPr>
           <a:xfrm>
-            <a:off x="731520" y="1920240"/>
-            <a:ext cx="5212080" cy="411480"/>
+            <a:off x="6629400" y="1490472"/>
+            <a:ext cx="5166360" cy="411480"/>
           </a:xfrm>
           <a:prstGeom prst="rect">
             <a:avLst/>
@@ -5318,7 +5326,7 @@
                 </a:solidFill>
                 <a:latin typeface="Calibri"/>
               </a:rPr>
-              <a:t>⚡  Irregular Income</a:t>
+              <a:t>No Safety Net</a:t>
             </a:r>
           </a:p>
         </p:txBody>
@@ -5331,8 +5339,8 @@
         </p:nvSpPr>
         <p:spPr>
           <a:xfrm>
-            <a:off x="731520" y="2331720"/>
-            <a:ext cx="5212080" cy="1188720"/>
+            <a:off x="6629400" y="1947672"/>
+            <a:ext cx="5166360" cy="1554480"/>
           </a:xfrm>
           <a:prstGeom prst="rect">
             <a:avLst/>
@@ -5353,7 +5361,7 @@
                 </a:solidFill>
                 <a:latin typeface="Calibri"/>
               </a:rPr>
-              <a:t>Gig workers face unpredictable earnings, making it hard to plan savings or meet financial goals.</a:t>
+              <a:t>No employer-backed benefits – one bad week can wipe out a gig worker's financial stability.</a:t>
             </a:r>
           </a:p>
         </p:txBody>
@@ -5366,14 +5374,14 @@
         </p:nvSpPr>
         <p:spPr>
           <a:xfrm>
-            <a:off x="6446520" y="1783080"/>
-            <a:ext cx="5577840" cy="1920240"/>
+            <a:off x="502920" y="3931920"/>
+            <a:ext cx="5577840" cy="2377440"/>
           </a:xfrm>
           <a:prstGeom prst="rect">
             <a:avLst/>
           </a:prstGeom>
           <a:solidFill>
-            <a:srgbClr val="F5F5F5"/>
+            <a:srgbClr val="F4F4F4"/>
           </a:solidFill>
           <a:ln>
             <a:noFill/>
@@ -5409,8 +5417,8 @@
         </p:nvSpPr>
         <p:spPr>
           <a:xfrm>
-            <a:off x="6446520" y="1783080"/>
-            <a:ext cx="5577840" cy="64008"/>
+            <a:off x="502920" y="3931920"/>
+            <a:ext cx="109728" cy="2377440"/>
           </a:xfrm>
           <a:prstGeom prst="rect">
             <a:avLst/>
@@ -5452,8 +5460,8 @@
         </p:nvSpPr>
         <p:spPr>
           <a:xfrm>
-            <a:off x="6629400" y="1920240"/>
-            <a:ext cx="5212080" cy="411480"/>
+            <a:off x="731520" y="4096511"/>
+            <a:ext cx="5166360" cy="411480"/>
           </a:xfrm>
           <a:prstGeom prst="rect">
             <a:avLst/>
@@ -5474,7 +5482,7 @@
                 </a:solidFill>
                 <a:latin typeface="Calibri"/>
               </a:rPr>
-              <a:t>⚡  No Safety Net</a:t>
+              <a:t>Low Financial Literacy</a:t>
             </a:r>
           </a:p>
         </p:txBody>
@@ -5487,8 +5495,8 @@
         </p:nvSpPr>
         <p:spPr>
           <a:xfrm>
-            <a:off x="6629400" y="2331720"/>
-            <a:ext cx="5212080" cy="1188720"/>
+            <a:off x="731520" y="4553712"/>
+            <a:ext cx="5166360" cy="1554480"/>
           </a:xfrm>
           <a:prstGeom prst="rect">
             <a:avLst/>
@@ -5509,7 +5517,7 @@
                 </a:solidFill>
                 <a:latin typeface="Calibri"/>
               </a:rPr>
-              <a:t>Lack of employer-backed benefits leaves gig workers exposed to financial shocks and emergencies.</a:t>
+              <a:t>Limited access to personalised guidance leaves workers unaware of savings opportunities.</a:t>
             </a:r>
           </a:p>
         </p:txBody>
@@ -5522,14 +5530,14 @@
         </p:nvSpPr>
         <p:spPr>
           <a:xfrm>
-            <a:off x="548640" y="3931920"/>
-            <a:ext cx="5577840" cy="1920240"/>
+            <a:off x="6400800" y="3931920"/>
+            <a:ext cx="5577840" cy="2377440"/>
           </a:xfrm>
           <a:prstGeom prst="rect">
             <a:avLst/>
           </a:prstGeom>
           <a:solidFill>
-            <a:srgbClr val="F5F5F5"/>
+            <a:srgbClr val="F4F4F4"/>
           </a:solidFill>
           <a:ln>
             <a:noFill/>
@@ -5565,8 +5573,8 @@
         </p:nvSpPr>
         <p:spPr>
           <a:xfrm>
-            <a:off x="548640" y="3931920"/>
-            <a:ext cx="5577840" cy="64008"/>
+            <a:off x="6400800" y="3931920"/>
+            <a:ext cx="109728" cy="2377440"/>
           </a:xfrm>
           <a:prstGeom prst="rect">
             <a:avLst/>
@@ -5608,8 +5616,8 @@
         </p:nvSpPr>
         <p:spPr>
           <a:xfrm>
-            <a:off x="731520" y="4069080"/>
-            <a:ext cx="5212080" cy="411480"/>
+            <a:off x="6629400" y="4096511"/>
+            <a:ext cx="5166360" cy="411480"/>
           </a:xfrm>
           <a:prstGeom prst="rect">
             <a:avLst/>
@@ -5630,7 +5638,7 @@
                 </a:solidFill>
                 <a:latin typeface="Calibri"/>
               </a:rPr>
-              <a:t>⚡  Low Financial Literacy</a:t>
+              <a:t>Missed Micro-Savings</a:t>
             </a:r>
           </a:p>
         </p:txBody>
@@ -5643,8 +5651,8 @@
         </p:nvSpPr>
         <p:spPr>
           <a:xfrm>
-            <a:off x="731520" y="4480559"/>
-            <a:ext cx="5212080" cy="1188720"/>
+            <a:off x="6629400" y="4553712"/>
+            <a:ext cx="5166360" cy="1554480"/>
           </a:xfrm>
           <a:prstGeom prst="rect">
             <a:avLst/>
@@ -5665,163 +5673,7 @@
                 </a:solidFill>
                 <a:latin typeface="Calibri"/>
               </a:rPr>
-              <a:t>Most gig workers have limited access to personalised financial guidance or smart savings tools.</a:t>
-            </a:r>
-          </a:p>
-        </p:txBody>
-      </p:sp>
-      <p:sp>
-        <p:nvSpPr>
-          <p:cNvPr id="24" name="Rectangle 23"/>
-          <p:cNvSpPr/>
-          <p:nvPr/>
-        </p:nvSpPr>
-        <p:spPr>
-          <a:xfrm>
-            <a:off x="6446520" y="3931920"/>
-            <a:ext cx="5577840" cy="1920240"/>
-          </a:xfrm>
-          <a:prstGeom prst="rect">
-            <a:avLst/>
-          </a:prstGeom>
-          <a:solidFill>
-            <a:srgbClr val="F5F5F5"/>
-          </a:solidFill>
-          <a:ln>
-            <a:noFill/>
-          </a:ln>
-        </p:spPr>
-        <p:style>
-          <a:lnRef idx="1">
-            <a:schemeClr val="accent1"/>
-          </a:lnRef>
-          <a:fillRef idx="3">
-            <a:schemeClr val="accent1"/>
-          </a:fillRef>
-          <a:effectRef idx="2">
-            <a:schemeClr val="accent1"/>
-          </a:effectRef>
-          <a:fontRef idx="minor">
-            <a:schemeClr val="lt1"/>
-          </a:fontRef>
-        </p:style>
-        <p:txBody>
-          <a:bodyPr rtlCol="0" anchor="ctr"/>
-          <a:lstStyle/>
-          <a:p>
-            <a:pPr algn="ctr"/>
-          </a:p>
-        </p:txBody>
-      </p:sp>
-      <p:sp>
-        <p:nvSpPr>
-          <p:cNvPr id="25" name="Rectangle 24"/>
-          <p:cNvSpPr/>
-          <p:nvPr/>
-        </p:nvSpPr>
-        <p:spPr>
-          <a:xfrm>
-            <a:off x="6446520" y="3931920"/>
-            <a:ext cx="5577840" cy="64008"/>
-          </a:xfrm>
-          <a:prstGeom prst="rect">
-            <a:avLst/>
-          </a:prstGeom>
-          <a:solidFill>
-            <a:srgbClr val="00A89C"/>
-          </a:solidFill>
-          <a:ln>
-            <a:noFill/>
-          </a:ln>
-        </p:spPr>
-        <p:style>
-          <a:lnRef idx="1">
-            <a:schemeClr val="accent1"/>
-          </a:lnRef>
-          <a:fillRef idx="3">
-            <a:schemeClr val="accent1"/>
-          </a:fillRef>
-          <a:effectRef idx="2">
-            <a:schemeClr val="accent1"/>
-          </a:effectRef>
-          <a:fontRef idx="minor">
-            <a:schemeClr val="lt1"/>
-          </a:fontRef>
-        </p:style>
-        <p:txBody>
-          <a:bodyPr rtlCol="0" anchor="ctr"/>
-          <a:lstStyle/>
-          <a:p>
-            <a:pPr algn="ctr"/>
-          </a:p>
-        </p:txBody>
-      </p:sp>
-      <p:sp>
-        <p:nvSpPr>
-          <p:cNvPr id="26" name="TextBox 25"/>
-          <p:cNvSpPr txBox="1"/>
-          <p:nvPr/>
-        </p:nvSpPr>
-        <p:spPr>
-          <a:xfrm>
-            <a:off x="6629400" y="4069080"/>
-            <a:ext cx="5212080" cy="411480"/>
-          </a:xfrm>
-          <a:prstGeom prst="rect">
-            <a:avLst/>
-          </a:prstGeom>
-          <a:noFill/>
-        </p:spPr>
-        <p:txBody>
-          <a:bodyPr wrap="square">
-            <a:spAutoFit/>
-          </a:bodyPr>
-          <a:lstStyle/>
-          <a:p>
-            <a:pPr algn="l"/>
-            <a:r>
-              <a:rPr sz="1400" b="1">
-                <a:solidFill>
-                  <a:srgbClr val="006E5E"/>
-                </a:solidFill>
-                <a:latin typeface="Calibri"/>
-              </a:rPr>
-              <a:t>⚡  Missed Micro-Savings Opportunities</a:t>
-            </a:r>
-          </a:p>
-        </p:txBody>
-      </p:sp>
-      <p:sp>
-        <p:nvSpPr>
-          <p:cNvPr id="27" name="TextBox 26"/>
-          <p:cNvSpPr txBox="1"/>
-          <p:nvPr/>
-        </p:nvSpPr>
-        <p:spPr>
-          <a:xfrm>
-            <a:off x="6629400" y="4480559"/>
-            <a:ext cx="5212080" cy="1188720"/>
-          </a:xfrm>
-          <a:prstGeom prst="rect">
-            <a:avLst/>
-          </a:prstGeom>
-          <a:noFill/>
-        </p:spPr>
-        <p:txBody>
-          <a:bodyPr wrap="square">
-            <a:spAutoFit/>
-          </a:bodyPr>
-          <a:lstStyle/>
-          <a:p>
-            <a:pPr algn="l"/>
-            <a:r>
-              <a:rPr sz="1100" b="0">
-                <a:solidFill>
-                  <a:srgbClr val="1A1A1A"/>
-                </a:solidFill>
-                <a:latin typeface="Calibri"/>
-              </a:rPr>
-              <a:t>High transaction volumes present untapped opportunities for automated, low-friction savings.</a:t>
+              <a:t>High-frequency trips generate untapped moments for automated, frictionless micro-savings.</a:t>
             </a:r>
           </a:p>
         </p:txBody>
@@ -5889,57 +5741,93 @@
       </p:sp>
       <p:sp>
         <p:nvSpPr>
-          <p:cNvPr id="3" name="Rectangle 2"/>
+          <p:cNvPr id="3" name="TextBox 2"/>
+          <p:cNvSpPr txBox="1"/>
+          <p:nvPr/>
+        </p:nvSpPr>
+        <p:spPr>
+          <a:xfrm>
+            <a:off x="164592" y="91440"/>
+            <a:ext cx="1280160" cy="347472"/>
+          </a:xfrm>
+          <a:prstGeom prst="rect">
+            <a:avLst/>
+          </a:prstGeom>
+          <a:noFill/>
+        </p:spPr>
+        <p:txBody>
+          <a:bodyPr wrap="square">
+            <a:spAutoFit/>
+          </a:bodyPr>
+          <a:lstStyle/>
+          <a:p>
+            <a:pPr algn="l"/>
+            <a:r>
+              <a:rPr sz="1800" b="1">
+                <a:solidFill>
+                  <a:srgbClr val="00B14F"/>
+                </a:solidFill>
+                <a:latin typeface="Calibri"/>
+              </a:rPr>
+              <a:t>Grab</a:t>
+            </a:r>
+          </a:p>
+        </p:txBody>
+      </p:sp>
+      <p:sp>
+        <p:nvSpPr>
+          <p:cNvPr id="4" name="TextBox 3"/>
+          <p:cNvSpPr txBox="1"/>
+          <p:nvPr/>
+        </p:nvSpPr>
+        <p:spPr>
+          <a:xfrm>
+            <a:off x="9326880" y="91440"/>
+            <a:ext cx="2743200" cy="347472"/>
+          </a:xfrm>
+          <a:prstGeom prst="rect">
+            <a:avLst/>
+          </a:prstGeom>
+          <a:noFill/>
+        </p:spPr>
+        <p:txBody>
+          <a:bodyPr wrap="square">
+            <a:spAutoFit/>
+          </a:bodyPr>
+          <a:lstStyle/>
+          <a:p>
+            <a:pPr algn="r"/>
+            <a:r>
+              <a:rPr sz="1600" b="1">
+                <a:solidFill>
+                  <a:srgbClr val="006E5E"/>
+                </a:solidFill>
+                <a:latin typeface="Calibri"/>
+              </a:rPr>
+              <a:t>GrabHack</a:t>
+            </a:r>
+            <a:r>
+              <a:rPr sz="1100" b="0">
+                <a:solidFill>
+                  <a:srgbClr val="006E5E"/>
+                </a:solidFill>
+                <a:latin typeface="Calibri"/>
+              </a:rPr>
+              <a:t>2.0</a:t>
+            </a:r>
+          </a:p>
+        </p:txBody>
+      </p:sp>
+      <p:sp>
+        <p:nvSpPr>
+          <p:cNvPr id="5" name="Rectangle 4"/>
           <p:cNvSpPr/>
           <p:nvPr/>
         </p:nvSpPr>
         <p:spPr>
           <a:xfrm>
-            <a:off x="0" y="0"/>
-            <a:ext cx="12188952" cy="411480"/>
-          </a:xfrm>
-          <a:prstGeom prst="rect">
-            <a:avLst/>
-          </a:prstGeom>
-          <a:solidFill>
-            <a:srgbClr val="FFFFFF"/>
-          </a:solidFill>
-          <a:ln>
-            <a:noFill/>
-          </a:ln>
-        </p:spPr>
-        <p:style>
-          <a:lnRef idx="1">
-            <a:schemeClr val="accent1"/>
-          </a:lnRef>
-          <a:fillRef idx="3">
-            <a:schemeClr val="accent1"/>
-          </a:fillRef>
-          <a:effectRef idx="2">
-            <a:schemeClr val="accent1"/>
-          </a:effectRef>
-          <a:fontRef idx="minor">
-            <a:schemeClr val="lt1"/>
-          </a:fontRef>
-        </p:style>
-        <p:txBody>
-          <a:bodyPr rtlCol="0" anchor="ctr"/>
-          <a:lstStyle/>
-          <a:p>
-            <a:pPr algn="ctr"/>
-          </a:p>
-        </p:txBody>
-      </p:sp>
-      <p:sp>
-        <p:nvSpPr>
-          <p:cNvPr id="4" name="Rectangle 3"/>
-          <p:cNvSpPr/>
-          <p:nvPr/>
-        </p:nvSpPr>
-        <p:spPr>
-          <a:xfrm>
-            <a:off x="0" y="393192"/>
-            <a:ext cx="12188952" cy="27432"/>
+            <a:off x="0" y="6656832"/>
+            <a:ext cx="12188952" cy="201168"/>
           </a:xfrm>
           <a:prstGeom prst="rect">
             <a:avLst/>
@@ -5975,14 +5863,14 @@
       </p:sp>
       <p:sp>
         <p:nvSpPr>
-          <p:cNvPr id="5" name="TextBox 4"/>
+          <p:cNvPr id="6" name="TextBox 5"/>
           <p:cNvSpPr txBox="1"/>
           <p:nvPr/>
         </p:nvSpPr>
         <p:spPr>
           <a:xfrm>
-            <a:off x="182880" y="45720"/>
-            <a:ext cx="1097280" cy="320040"/>
+            <a:off x="457200" y="548640"/>
+            <a:ext cx="9144000" cy="502920"/>
           </a:xfrm>
           <a:prstGeom prst="rect">
             <a:avLst/>
@@ -5997,48 +5885,13 @@
           <a:p>
             <a:pPr algn="l"/>
             <a:r>
-              <a:rPr sz="1600" b="1">
-                <a:solidFill>
-                  <a:srgbClr val="00B14F"/>
+              <a:rPr sz="2600" b="1">
+                <a:solidFill>
+                  <a:srgbClr val="006E5E"/>
                 </a:solidFill>
                 <a:latin typeface="Calibri"/>
               </a:rPr>
-              <a:t>Grab</a:t>
-            </a:r>
-          </a:p>
-        </p:txBody>
-      </p:sp>
-      <p:sp>
-        <p:nvSpPr>
-          <p:cNvPr id="6" name="TextBox 5"/>
-          <p:cNvSpPr txBox="1"/>
-          <p:nvPr/>
-        </p:nvSpPr>
-        <p:spPr>
-          <a:xfrm>
-            <a:off x="10515600" y="45720"/>
-            <a:ext cx="1554480" cy="320040"/>
-          </a:xfrm>
-          <a:prstGeom prst="rect">
-            <a:avLst/>
-          </a:prstGeom>
-          <a:noFill/>
-        </p:spPr>
-        <p:txBody>
-          <a:bodyPr wrap="square">
-            <a:spAutoFit/>
-          </a:bodyPr>
-          <a:lstStyle/>
-          <a:p>
-            <a:pPr algn="r"/>
-            <a:r>
-              <a:rPr sz="1300" b="1">
-                <a:solidFill>
-                  <a:srgbClr val="006E5E"/>
-                </a:solidFill>
-                <a:latin typeface="Calibri"/>
-              </a:rPr>
-              <a:t>GrabHack 2.0</a:t>
+              <a:t>Our Solution: AI Saver Agent</a:t>
             </a:r>
           </a:p>
         </p:txBody>
@@ -6051,8 +5904,8 @@
         </p:nvSpPr>
         <p:spPr>
           <a:xfrm>
-            <a:off x="0" y="6583680"/>
-            <a:ext cx="12188952" cy="274320"/>
+            <a:off x="457200" y="1115568"/>
+            <a:ext cx="11247120" cy="45720"/>
           </a:xfrm>
           <a:prstGeom prst="rect">
             <a:avLst/>
@@ -6088,14 +5941,92 @@
       </p:sp>
       <p:sp>
         <p:nvSpPr>
-          <p:cNvPr id="8" name="Rectangle 7"/>
+          <p:cNvPr id="8" name="TextBox 7"/>
+          <p:cNvSpPr txBox="1"/>
+          <p:nvPr/>
+        </p:nvSpPr>
+        <p:spPr>
+          <a:xfrm>
+            <a:off x="457200" y="1234440"/>
+            <a:ext cx="11247120" cy="731520"/>
+          </a:xfrm>
+          <a:prstGeom prst="rect">
+            <a:avLst/>
+          </a:prstGeom>
+          <a:noFill/>
+        </p:spPr>
+        <p:txBody>
+          <a:bodyPr wrap="square">
+            <a:spAutoFit/>
+          </a:bodyPr>
+          <a:lstStyle/>
+          <a:p>
+            <a:pPr algn="l"/>
+            <a:r>
+              <a:rPr sz="1200" b="0">
+                <a:solidFill>
+                  <a:srgbClr val="1A1A1A"/>
+                </a:solidFill>
+                <a:latin typeface="Calibri"/>
+              </a:rPr>
+              <a:t>An intelligent AI agent embedded in the Grab SuperApp that helps gig workers auto-save into GXS accounts through personalised micro-savings rules, behavioural nudges, and real-time income analytics.</a:t>
+            </a:r>
+          </a:p>
+        </p:txBody>
+      </p:sp>
+      <p:sp>
+        <p:nvSpPr>
+          <p:cNvPr id="9" name="Rectangle 8"/>
           <p:cNvSpPr/>
           <p:nvPr/>
         </p:nvSpPr>
         <p:spPr>
           <a:xfrm>
-            <a:off x="457200" y="548640"/>
-            <a:ext cx="2560320" cy="256032"/>
+            <a:off x="457200" y="2103120"/>
+            <a:ext cx="3657600" cy="1965960"/>
+          </a:xfrm>
+          <a:prstGeom prst="rect">
+            <a:avLst/>
+          </a:prstGeom>
+          <a:solidFill>
+            <a:srgbClr val="F4F4F4"/>
+          </a:solidFill>
+          <a:ln>
+            <a:noFill/>
+          </a:ln>
+        </p:spPr>
+        <p:style>
+          <a:lnRef idx="1">
+            <a:schemeClr val="accent1"/>
+          </a:lnRef>
+          <a:fillRef idx="3">
+            <a:schemeClr val="accent1"/>
+          </a:fillRef>
+          <a:effectRef idx="2">
+            <a:schemeClr val="accent1"/>
+          </a:effectRef>
+          <a:fontRef idx="minor">
+            <a:schemeClr val="lt1"/>
+          </a:fontRef>
+        </p:style>
+        <p:txBody>
+          <a:bodyPr rtlCol="0" anchor="ctr"/>
+          <a:lstStyle/>
+          <a:p>
+            <a:pPr algn="ctr"/>
+          </a:p>
+        </p:txBody>
+      </p:sp>
+      <p:sp>
+        <p:nvSpPr>
+          <p:cNvPr id="10" name="Rectangle 9"/>
+          <p:cNvSpPr/>
+          <p:nvPr/>
+        </p:nvSpPr>
+        <p:spPr>
+          <a:xfrm>
+            <a:off x="457200" y="2103120"/>
+            <a:ext cx="3657600" cy="64008"/>
           </a:xfrm>
           <a:prstGeom prst="rect">
             <a:avLst/>
@@ -6131,14 +6062,14 @@
       </p:sp>
       <p:sp>
         <p:nvSpPr>
-          <p:cNvPr id="9" name="TextBox 8"/>
+          <p:cNvPr id="11" name="TextBox 10"/>
           <p:cNvSpPr txBox="1"/>
           <p:nvPr/>
         </p:nvSpPr>
         <p:spPr>
           <a:xfrm>
-            <a:off x="502920" y="548640"/>
-            <a:ext cx="2468880" cy="256032"/>
+            <a:off x="594360" y="2267712"/>
+            <a:ext cx="3383280" cy="384048"/>
           </a:xfrm>
           <a:prstGeom prst="rect">
             <a:avLst/>
@@ -6153,27 +6084,27 @@
           <a:p>
             <a:pPr algn="l"/>
             <a:r>
-              <a:rPr sz="900" b="1">
-                <a:solidFill>
-                  <a:srgbClr val="FFFFFF"/>
+              <a:rPr sz="1200" b="1">
+                <a:solidFill>
+                  <a:srgbClr val="006E5E"/>
                 </a:solidFill>
                 <a:latin typeface="Calibri"/>
               </a:rPr>
-              <a:t>SOLUTION</a:t>
-            </a:r>
-          </a:p>
-        </p:txBody>
-      </p:sp>
-      <p:sp>
-        <p:nvSpPr>
-          <p:cNvPr id="10" name="TextBox 9"/>
+              <a:t>Smart Savings Agent</a:t>
+            </a:r>
+          </a:p>
+        </p:txBody>
+      </p:sp>
+      <p:sp>
+        <p:nvSpPr>
+          <p:cNvPr id="12" name="TextBox 11"/>
           <p:cNvSpPr txBox="1"/>
           <p:nvPr/>
         </p:nvSpPr>
         <p:spPr>
           <a:xfrm>
-            <a:off x="457200" y="960120"/>
-            <a:ext cx="9144000" cy="594360"/>
+            <a:off x="594360" y="2697479"/>
+            <a:ext cx="3383280" cy="1234440"/>
           </a:xfrm>
           <a:prstGeom prst="rect">
             <a:avLst/>
@@ -6188,33 +6119,33 @@
           <a:p>
             <a:pPr algn="l"/>
             <a:r>
-              <a:rPr sz="2600" b="1">
-                <a:solidFill>
-                  <a:srgbClr val="006E5E"/>
+              <a:rPr sz="1000" b="0">
+                <a:solidFill>
+                  <a:srgbClr val="1A1A1A"/>
                 </a:solidFill>
                 <a:latin typeface="Calibri"/>
               </a:rPr>
-              <a:t>AI Saver Agent for Gig Workers</a:t>
-            </a:r>
-          </a:p>
-        </p:txBody>
-      </p:sp>
-      <p:sp>
-        <p:nvSpPr>
-          <p:cNvPr id="11" name="Rectangle 10"/>
+              <a:t>Conversational AI understands income patterns and auto-saves via configurable rules.</a:t>
+            </a:r>
+          </a:p>
+        </p:txBody>
+      </p:sp>
+      <p:sp>
+        <p:nvSpPr>
+          <p:cNvPr id="13" name="Rectangle 12"/>
           <p:cNvSpPr/>
           <p:nvPr/>
         </p:nvSpPr>
         <p:spPr>
           <a:xfrm>
-            <a:off x="457200" y="1600200"/>
-            <a:ext cx="11247120" cy="45720"/>
+            <a:off x="4389120" y="2103120"/>
+            <a:ext cx="3657600" cy="1965960"/>
           </a:xfrm>
           <a:prstGeom prst="rect">
             <a:avLst/>
           </a:prstGeom>
           <a:solidFill>
-            <a:srgbClr val="C8F000"/>
+            <a:srgbClr val="F4F4F4"/>
           </a:solidFill>
           <a:ln>
             <a:noFill/>
@@ -6244,92 +6175,14 @@
       </p:sp>
       <p:sp>
         <p:nvSpPr>
-          <p:cNvPr id="12" name="TextBox 11"/>
-          <p:cNvSpPr txBox="1"/>
-          <p:nvPr/>
-        </p:nvSpPr>
-        <p:spPr>
-          <a:xfrm>
-            <a:off x="457200" y="1737360"/>
-            <a:ext cx="11247120" cy="822960"/>
-          </a:xfrm>
-          <a:prstGeom prst="rect">
-            <a:avLst/>
-          </a:prstGeom>
-          <a:noFill/>
-        </p:spPr>
-        <p:txBody>
-          <a:bodyPr wrap="square">
-            <a:spAutoFit/>
-          </a:bodyPr>
-          <a:lstStyle/>
-          <a:p>
-            <a:pPr algn="l"/>
-            <a:r>
-              <a:rPr sz="1300" b="0">
-                <a:solidFill>
-                  <a:srgbClr val="1A1A1A"/>
-                </a:solidFill>
-                <a:latin typeface="Calibri"/>
-              </a:rPr>
-              <a:t>An intelligent, conversational AI agent embedded in Grab SuperApp that helps gig workers automatically save money in GXS Bank accounts using personalised micro-savings rules, behavioural nudges, and real-time income analytics.</a:t>
-            </a:r>
-          </a:p>
-        </p:txBody>
-      </p:sp>
-      <p:sp>
-        <p:nvSpPr>
-          <p:cNvPr id="13" name="Rectangle 12"/>
-          <p:cNvSpPr/>
-          <p:nvPr/>
-        </p:nvSpPr>
-        <p:spPr>
-          <a:xfrm>
-            <a:off x="457200" y="2788920"/>
-            <a:ext cx="3657600" cy="1508760"/>
-          </a:xfrm>
-          <a:prstGeom prst="rect">
-            <a:avLst/>
-          </a:prstGeom>
-          <a:solidFill>
-            <a:srgbClr val="F5F5F5"/>
-          </a:solidFill>
-          <a:ln>
-            <a:noFill/>
-          </a:ln>
-        </p:spPr>
-        <p:style>
-          <a:lnRef idx="1">
-            <a:schemeClr val="accent1"/>
-          </a:lnRef>
-          <a:fillRef idx="3">
-            <a:schemeClr val="accent1"/>
-          </a:fillRef>
-          <a:effectRef idx="2">
-            <a:schemeClr val="accent1"/>
-          </a:effectRef>
-          <a:fontRef idx="minor">
-            <a:schemeClr val="lt1"/>
-          </a:fontRef>
-        </p:style>
-        <p:txBody>
-          <a:bodyPr rtlCol="0" anchor="ctr"/>
-          <a:lstStyle/>
-          <a:p>
-            <a:pPr algn="ctr"/>
-          </a:p>
-        </p:txBody>
-      </p:sp>
-      <p:sp>
-        <p:nvSpPr>
           <p:cNvPr id="14" name="Rectangle 13"/>
           <p:cNvSpPr/>
           <p:nvPr/>
         </p:nvSpPr>
         <p:spPr>
           <a:xfrm>
-            <a:off x="457200" y="2788920"/>
-            <a:ext cx="91440" cy="1508760"/>
+            <a:off x="4389120" y="2103120"/>
+            <a:ext cx="3657600" cy="64008"/>
           </a:xfrm>
           <a:prstGeom prst="rect">
             <a:avLst/>
@@ -6371,8 +6224,8 @@
         </p:nvSpPr>
         <p:spPr>
           <a:xfrm>
-            <a:off x="640080" y="2880360"/>
-            <a:ext cx="3383280" cy="365760"/>
+            <a:off x="4526280" y="2267712"/>
+            <a:ext cx="3383280" cy="384048"/>
           </a:xfrm>
           <a:prstGeom prst="rect">
             <a:avLst/>
@@ -6393,7 +6246,7 @@
                 </a:solidFill>
                 <a:latin typeface="Calibri"/>
               </a:rPr>
-              <a:t>🤖  Smart Savings Agent</a:t>
+              <a:t>Income Analytics</a:t>
             </a:r>
           </a:p>
         </p:txBody>
@@ -6406,8 +6259,8 @@
         </p:nvSpPr>
         <p:spPr>
           <a:xfrm>
-            <a:off x="640080" y="3246120"/>
-            <a:ext cx="3383280" cy="914400"/>
+            <a:off x="4526280" y="2697479"/>
+            <a:ext cx="3383280" cy="1234440"/>
           </a:xfrm>
           <a:prstGeom prst="rect">
             <a:avLst/>
@@ -6428,7 +6281,7 @@
                 </a:solidFill>
                 <a:latin typeface="Calibri"/>
               </a:rPr>
-              <a:t>Conversational AI understands income patterns and auto-saves based on configurable rules.</a:t>
+              <a:t>Real-time dashboard of earnings, trends, and savings progress across Grab services.</a:t>
             </a:r>
           </a:p>
         </p:txBody>
@@ -6441,14 +6294,14 @@
         </p:nvSpPr>
         <p:spPr>
           <a:xfrm>
-            <a:off x="4370832" y="2788920"/>
-            <a:ext cx="3657600" cy="1508760"/>
+            <a:off x="8321040" y="2103120"/>
+            <a:ext cx="3657600" cy="1965960"/>
           </a:xfrm>
           <a:prstGeom prst="rect">
             <a:avLst/>
           </a:prstGeom>
           <a:solidFill>
-            <a:srgbClr val="F5F5F5"/>
+            <a:srgbClr val="F4F4F4"/>
           </a:solidFill>
           <a:ln>
             <a:noFill/>
@@ -6484,8 +6337,8 @@
         </p:nvSpPr>
         <p:spPr>
           <a:xfrm>
-            <a:off x="4370832" y="2788920"/>
-            <a:ext cx="91440" cy="1508760"/>
+            <a:off x="8321040" y="2103120"/>
+            <a:ext cx="3657600" cy="64008"/>
           </a:xfrm>
           <a:prstGeom prst="rect">
             <a:avLst/>
@@ -6527,8 +6380,8 @@
         </p:nvSpPr>
         <p:spPr>
           <a:xfrm>
-            <a:off x="4553712" y="2880360"/>
-            <a:ext cx="3383280" cy="365760"/>
+            <a:off x="8458200" y="2267712"/>
+            <a:ext cx="3383280" cy="384048"/>
           </a:xfrm>
           <a:prstGeom prst="rect">
             <a:avLst/>
@@ -6549,7 +6402,7 @@
                 </a:solidFill>
                 <a:latin typeface="Calibri"/>
               </a:rPr>
-              <a:t>📊  Income Analytics</a:t>
+              <a:t>Goal-Based Savings</a:t>
             </a:r>
           </a:p>
         </p:txBody>
@@ -6562,8 +6415,8 @@
         </p:nvSpPr>
         <p:spPr>
           <a:xfrm>
-            <a:off x="4553712" y="3246120"/>
-            <a:ext cx="3383280" cy="914400"/>
+            <a:off x="8458200" y="2697479"/>
+            <a:ext cx="3383280" cy="1234440"/>
           </a:xfrm>
           <a:prstGeom prst="rect">
             <a:avLst/>
@@ -6584,7 +6437,7 @@
                 </a:solidFill>
                 <a:latin typeface="Calibri"/>
               </a:rPr>
-              <a:t>Real-time dashboard of earnings, spending trends and savings progress across Grab rides &amp; deliveries.</a:t>
+              <a:t>Set goals (emergency fund, insurance, festival) with AI-driven milestones.</a:t>
             </a:r>
           </a:p>
         </p:txBody>
@@ -6597,14 +6450,14 @@
         </p:nvSpPr>
         <p:spPr>
           <a:xfrm>
-            <a:off x="8284464" y="2788920"/>
-            <a:ext cx="3657600" cy="1508760"/>
+            <a:off x="457200" y="4251960"/>
+            <a:ext cx="3657600" cy="1965960"/>
           </a:xfrm>
           <a:prstGeom prst="rect">
             <a:avLst/>
           </a:prstGeom>
           <a:solidFill>
-            <a:srgbClr val="F5F5F5"/>
+            <a:srgbClr val="F4F4F4"/>
           </a:solidFill>
           <a:ln>
             <a:noFill/>
@@ -6640,8 +6493,8 @@
         </p:nvSpPr>
         <p:spPr>
           <a:xfrm>
-            <a:off x="8284464" y="2788920"/>
-            <a:ext cx="91440" cy="1508760"/>
+            <a:off x="457200" y="4251960"/>
+            <a:ext cx="3657600" cy="64008"/>
           </a:xfrm>
           <a:prstGeom prst="rect">
             <a:avLst/>
@@ -6683,8 +6536,8 @@
         </p:nvSpPr>
         <p:spPr>
           <a:xfrm>
-            <a:off x="8467344" y="2880360"/>
-            <a:ext cx="3383280" cy="365760"/>
+            <a:off x="594360" y="4416552"/>
+            <a:ext cx="3383280" cy="384048"/>
           </a:xfrm>
           <a:prstGeom prst="rect">
             <a:avLst/>
@@ -6705,7 +6558,7 @@
                 </a:solidFill>
                 <a:latin typeface="Calibri"/>
               </a:rPr>
-              <a:t>🎯  Goal-Based Savings</a:t>
+              <a:t>Behavioural Nudges</a:t>
             </a:r>
           </a:p>
         </p:txBody>
@@ -6718,8 +6571,8 @@
         </p:nvSpPr>
         <p:spPr>
           <a:xfrm>
-            <a:off x="8467344" y="3246120"/>
-            <a:ext cx="3383280" cy="914400"/>
+            <a:off x="594360" y="4846320"/>
+            <a:ext cx="3383280" cy="1234440"/>
           </a:xfrm>
           <a:prstGeom prst="rect">
             <a:avLst/>
@@ -6740,7 +6593,7 @@
                 </a:solidFill>
                 <a:latin typeface="Calibri"/>
               </a:rPr>
-              <a:t>Set savings goals (emergency fund, insurance, festival) with AI-driven milestones &amp; motivation.</a:t>
+              <a:t>Context-aware push notifications post-trip, on payday, or during low-activity periods.</a:t>
             </a:r>
           </a:p>
         </p:txBody>
@@ -6753,14 +6606,14 @@
         </p:nvSpPr>
         <p:spPr>
           <a:xfrm>
-            <a:off x="457200" y="4480560"/>
-            <a:ext cx="3657600" cy="1508760"/>
+            <a:off x="4389120" y="4251960"/>
+            <a:ext cx="3657600" cy="1965960"/>
           </a:xfrm>
           <a:prstGeom prst="rect">
             <a:avLst/>
           </a:prstGeom>
           <a:solidFill>
-            <a:srgbClr val="F5F5F5"/>
+            <a:srgbClr val="F4F4F4"/>
           </a:solidFill>
           <a:ln>
             <a:noFill/>
@@ -6796,8 +6649,8 @@
         </p:nvSpPr>
         <p:spPr>
           <a:xfrm>
-            <a:off x="457200" y="4480560"/>
-            <a:ext cx="91440" cy="1508760"/>
+            <a:off x="4389120" y="4251960"/>
+            <a:ext cx="3657600" cy="64008"/>
           </a:xfrm>
           <a:prstGeom prst="rect">
             <a:avLst/>
@@ -6839,8 +6692,8 @@
         </p:nvSpPr>
         <p:spPr>
           <a:xfrm>
-            <a:off x="640080" y="4572000"/>
-            <a:ext cx="3383280" cy="365760"/>
+            <a:off x="4526280" y="4416552"/>
+            <a:ext cx="3383280" cy="384048"/>
           </a:xfrm>
           <a:prstGeom prst="rect">
             <a:avLst/>
@@ -6861,7 +6714,7 @@
                 </a:solidFill>
                 <a:latin typeface="Calibri"/>
               </a:rPr>
-              <a:t>💡  Behavioural Nudges</a:t>
+              <a:t>GXS Integration</a:t>
             </a:r>
           </a:p>
         </p:txBody>
@@ -6874,8 +6727,8 @@
         </p:nvSpPr>
         <p:spPr>
           <a:xfrm>
-            <a:off x="640080" y="4937760"/>
-            <a:ext cx="3383280" cy="914400"/>
+            <a:off x="4526280" y="4846320"/>
+            <a:ext cx="3383280" cy="1234440"/>
           </a:xfrm>
           <a:prstGeom prst="rect">
             <a:avLst/>
@@ -6896,7 +6749,7 @@
                 </a:solidFill>
                 <a:latin typeface="Calibri"/>
               </a:rPr>
-              <a:t>Context-aware notifications at the right moment – post-trip, payday, or low-activity periods.</a:t>
+              <a:t>One-tap deposit into GXS savings pots with competitive interest rates.</a:t>
             </a:r>
           </a:p>
         </p:txBody>
@@ -6909,14 +6762,14 @@
         </p:nvSpPr>
         <p:spPr>
           <a:xfrm>
-            <a:off x="4370832" y="4480560"/>
-            <a:ext cx="3657600" cy="1508760"/>
+            <a:off x="8321040" y="4251960"/>
+            <a:ext cx="3657600" cy="1965960"/>
           </a:xfrm>
           <a:prstGeom prst="rect">
             <a:avLst/>
           </a:prstGeom>
           <a:solidFill>
-            <a:srgbClr val="F5F5F5"/>
+            <a:srgbClr val="F4F4F4"/>
           </a:solidFill>
           <a:ln>
             <a:noFill/>
@@ -6952,8 +6805,8 @@
         </p:nvSpPr>
         <p:spPr>
           <a:xfrm>
-            <a:off x="4370832" y="4480560"/>
-            <a:ext cx="91440" cy="1508760"/>
+            <a:off x="8321040" y="4251960"/>
+            <a:ext cx="3657600" cy="64008"/>
           </a:xfrm>
           <a:prstGeom prst="rect">
             <a:avLst/>
@@ -6995,8 +6848,8 @@
         </p:nvSpPr>
         <p:spPr>
           <a:xfrm>
-            <a:off x="4553712" y="4572000"/>
-            <a:ext cx="3383280" cy="365760"/>
+            <a:off x="8458200" y="4416552"/>
+            <a:ext cx="3383280" cy="384048"/>
           </a:xfrm>
           <a:prstGeom prst="rect">
             <a:avLst/>
@@ -7017,7 +6870,7 @@
                 </a:solidFill>
                 <a:latin typeface="Calibri"/>
               </a:rPr>
-              <a:t>🔒  GXS Integration</a:t>
+              <a:t>Gamification</a:t>
             </a:r>
           </a:p>
         </p:txBody>
@@ -7030,8 +6883,8 @@
         </p:nvSpPr>
         <p:spPr>
           <a:xfrm>
-            <a:off x="4553712" y="4937760"/>
-            <a:ext cx="3383280" cy="914400"/>
+            <a:off x="8458200" y="4846320"/>
+            <a:ext cx="3383280" cy="1234440"/>
           </a:xfrm>
           <a:prstGeom prst="rect">
             <a:avLst/>
@@ -7052,163 +6905,7 @@
                 </a:solidFill>
                 <a:latin typeface="Calibri"/>
               </a:rPr>
-              <a:t>Seamless one-tap deposit into GXS savings pots with competitive interest rates.</a:t>
-            </a:r>
-          </a:p>
-        </p:txBody>
-      </p:sp>
-      <p:sp>
-        <p:nvSpPr>
-          <p:cNvPr id="33" name="Rectangle 32"/>
-          <p:cNvSpPr/>
-          <p:nvPr/>
-        </p:nvSpPr>
-        <p:spPr>
-          <a:xfrm>
-            <a:off x="8284464" y="4480560"/>
-            <a:ext cx="3657600" cy="1508760"/>
-          </a:xfrm>
-          <a:prstGeom prst="rect">
-            <a:avLst/>
-          </a:prstGeom>
-          <a:solidFill>
-            <a:srgbClr val="F5F5F5"/>
-          </a:solidFill>
-          <a:ln>
-            <a:noFill/>
-          </a:ln>
-        </p:spPr>
-        <p:style>
-          <a:lnRef idx="1">
-            <a:schemeClr val="accent1"/>
-          </a:lnRef>
-          <a:fillRef idx="3">
-            <a:schemeClr val="accent1"/>
-          </a:fillRef>
-          <a:effectRef idx="2">
-            <a:schemeClr val="accent1"/>
-          </a:effectRef>
-          <a:fontRef idx="minor">
-            <a:schemeClr val="lt1"/>
-          </a:fontRef>
-        </p:style>
-        <p:txBody>
-          <a:bodyPr rtlCol="0" anchor="ctr"/>
-          <a:lstStyle/>
-          <a:p>
-            <a:pPr algn="ctr"/>
-          </a:p>
-        </p:txBody>
-      </p:sp>
-      <p:sp>
-        <p:nvSpPr>
-          <p:cNvPr id="34" name="Rectangle 33"/>
-          <p:cNvSpPr/>
-          <p:nvPr/>
-        </p:nvSpPr>
-        <p:spPr>
-          <a:xfrm>
-            <a:off x="8284464" y="4480560"/>
-            <a:ext cx="91440" cy="1508760"/>
-          </a:xfrm>
-          <a:prstGeom prst="rect">
-            <a:avLst/>
-          </a:prstGeom>
-          <a:solidFill>
-            <a:srgbClr val="00A89C"/>
-          </a:solidFill>
-          <a:ln>
-            <a:noFill/>
-          </a:ln>
-        </p:spPr>
-        <p:style>
-          <a:lnRef idx="1">
-            <a:schemeClr val="accent1"/>
-          </a:lnRef>
-          <a:fillRef idx="3">
-            <a:schemeClr val="accent1"/>
-          </a:fillRef>
-          <a:effectRef idx="2">
-            <a:schemeClr val="accent1"/>
-          </a:effectRef>
-          <a:fontRef idx="minor">
-            <a:schemeClr val="lt1"/>
-          </a:fontRef>
-        </p:style>
-        <p:txBody>
-          <a:bodyPr rtlCol="0" anchor="ctr"/>
-          <a:lstStyle/>
-          <a:p>
-            <a:pPr algn="ctr"/>
-          </a:p>
-        </p:txBody>
-      </p:sp>
-      <p:sp>
-        <p:nvSpPr>
-          <p:cNvPr id="35" name="TextBox 34"/>
-          <p:cNvSpPr txBox="1"/>
-          <p:nvPr/>
-        </p:nvSpPr>
-        <p:spPr>
-          <a:xfrm>
-            <a:off x="8467344" y="4572000"/>
-            <a:ext cx="3383280" cy="365760"/>
-          </a:xfrm>
-          <a:prstGeom prst="rect">
-            <a:avLst/>
-          </a:prstGeom>
-          <a:noFill/>
-        </p:spPr>
-        <p:txBody>
-          <a:bodyPr wrap="square">
-            <a:spAutoFit/>
-          </a:bodyPr>
-          <a:lstStyle/>
-          <a:p>
-            <a:pPr algn="l"/>
-            <a:r>
-              <a:rPr sz="1200" b="1">
-                <a:solidFill>
-                  <a:srgbClr val="006E5E"/>
-                </a:solidFill>
-                <a:latin typeface="Calibri"/>
-              </a:rPr>
-              <a:t>🏆  Gamification</a:t>
-            </a:r>
-          </a:p>
-        </p:txBody>
-      </p:sp>
-      <p:sp>
-        <p:nvSpPr>
-          <p:cNvPr id="36" name="TextBox 35"/>
-          <p:cNvSpPr txBox="1"/>
-          <p:nvPr/>
-        </p:nvSpPr>
-        <p:spPr>
-          <a:xfrm>
-            <a:off x="8467344" y="4937760"/>
-            <a:ext cx="3383280" cy="914400"/>
-          </a:xfrm>
-          <a:prstGeom prst="rect">
-            <a:avLst/>
-          </a:prstGeom>
-          <a:noFill/>
-        </p:spPr>
-        <p:txBody>
-          <a:bodyPr wrap="square">
-            <a:spAutoFit/>
-          </a:bodyPr>
-          <a:lstStyle/>
-          <a:p>
-            <a:pPr algn="l"/>
-            <a:r>
-              <a:rPr sz="1000" b="0">
-                <a:solidFill>
-                  <a:srgbClr val="1A1A1A"/>
-                </a:solidFill>
-                <a:latin typeface="Calibri"/>
-              </a:rPr>
-              <a:t>Streaks, badges and leaderboards to drive consistent saving habits among gig workers.</a:t>
+              <a:t>Streaks, badges, and leaderboards to build consistent saving habits.</a:t>
             </a:r>
           </a:p>
         </p:txBody>
@@ -7276,57 +6973,93 @@
       </p:sp>
       <p:sp>
         <p:nvSpPr>
-          <p:cNvPr id="3" name="Rectangle 2"/>
+          <p:cNvPr id="3" name="TextBox 2"/>
+          <p:cNvSpPr txBox="1"/>
+          <p:nvPr/>
+        </p:nvSpPr>
+        <p:spPr>
+          <a:xfrm>
+            <a:off x="164592" y="91440"/>
+            <a:ext cx="1280160" cy="347472"/>
+          </a:xfrm>
+          <a:prstGeom prst="rect">
+            <a:avLst/>
+          </a:prstGeom>
+          <a:noFill/>
+        </p:spPr>
+        <p:txBody>
+          <a:bodyPr wrap="square">
+            <a:spAutoFit/>
+          </a:bodyPr>
+          <a:lstStyle/>
+          <a:p>
+            <a:pPr algn="l"/>
+            <a:r>
+              <a:rPr sz="1800" b="1">
+                <a:solidFill>
+                  <a:srgbClr val="00B14F"/>
+                </a:solidFill>
+                <a:latin typeface="Calibri"/>
+              </a:rPr>
+              <a:t>Grab</a:t>
+            </a:r>
+          </a:p>
+        </p:txBody>
+      </p:sp>
+      <p:sp>
+        <p:nvSpPr>
+          <p:cNvPr id="4" name="TextBox 3"/>
+          <p:cNvSpPr txBox="1"/>
+          <p:nvPr/>
+        </p:nvSpPr>
+        <p:spPr>
+          <a:xfrm>
+            <a:off x="9326880" y="91440"/>
+            <a:ext cx="2743200" cy="347472"/>
+          </a:xfrm>
+          <a:prstGeom prst="rect">
+            <a:avLst/>
+          </a:prstGeom>
+          <a:noFill/>
+        </p:spPr>
+        <p:txBody>
+          <a:bodyPr wrap="square">
+            <a:spAutoFit/>
+          </a:bodyPr>
+          <a:lstStyle/>
+          <a:p>
+            <a:pPr algn="r"/>
+            <a:r>
+              <a:rPr sz="1600" b="1">
+                <a:solidFill>
+                  <a:srgbClr val="006E5E"/>
+                </a:solidFill>
+                <a:latin typeface="Calibri"/>
+              </a:rPr>
+              <a:t>GrabHack</a:t>
+            </a:r>
+            <a:r>
+              <a:rPr sz="1100" b="0">
+                <a:solidFill>
+                  <a:srgbClr val="006E5E"/>
+                </a:solidFill>
+                <a:latin typeface="Calibri"/>
+              </a:rPr>
+              <a:t>2.0</a:t>
+            </a:r>
+          </a:p>
+        </p:txBody>
+      </p:sp>
+      <p:sp>
+        <p:nvSpPr>
+          <p:cNvPr id="5" name="Rectangle 4"/>
           <p:cNvSpPr/>
           <p:nvPr/>
         </p:nvSpPr>
         <p:spPr>
           <a:xfrm>
-            <a:off x="0" y="0"/>
-            <a:ext cx="12188952" cy="411480"/>
-          </a:xfrm>
-          <a:prstGeom prst="rect">
-            <a:avLst/>
-          </a:prstGeom>
-          <a:solidFill>
-            <a:srgbClr val="FFFFFF"/>
-          </a:solidFill>
-          <a:ln>
-            <a:noFill/>
-          </a:ln>
-        </p:spPr>
-        <p:style>
-          <a:lnRef idx="1">
-            <a:schemeClr val="accent1"/>
-          </a:lnRef>
-          <a:fillRef idx="3">
-            <a:schemeClr val="accent1"/>
-          </a:fillRef>
-          <a:effectRef idx="2">
-            <a:schemeClr val="accent1"/>
-          </a:effectRef>
-          <a:fontRef idx="minor">
-            <a:schemeClr val="lt1"/>
-          </a:fontRef>
-        </p:style>
-        <p:txBody>
-          <a:bodyPr rtlCol="0" anchor="ctr"/>
-          <a:lstStyle/>
-          <a:p>
-            <a:pPr algn="ctr"/>
-          </a:p>
-        </p:txBody>
-      </p:sp>
-      <p:sp>
-        <p:nvSpPr>
-          <p:cNvPr id="4" name="Rectangle 3"/>
-          <p:cNvSpPr/>
-          <p:nvPr/>
-        </p:nvSpPr>
-        <p:spPr>
-          <a:xfrm>
-            <a:off x="0" y="393192"/>
-            <a:ext cx="12188952" cy="27432"/>
+            <a:off x="0" y="6656832"/>
+            <a:ext cx="12188952" cy="201168"/>
           </a:xfrm>
           <a:prstGeom prst="rect">
             <a:avLst/>
@@ -7362,14 +7095,14 @@
       </p:sp>
       <p:sp>
         <p:nvSpPr>
-          <p:cNvPr id="5" name="TextBox 4"/>
+          <p:cNvPr id="6" name="TextBox 5"/>
           <p:cNvSpPr txBox="1"/>
           <p:nvPr/>
         </p:nvSpPr>
         <p:spPr>
           <a:xfrm>
-            <a:off x="182880" y="45720"/>
-            <a:ext cx="1097280" cy="320040"/>
+            <a:off x="457200" y="548640"/>
+            <a:ext cx="8229600" cy="502920"/>
           </a:xfrm>
           <a:prstGeom prst="rect">
             <a:avLst/>
@@ -7384,48 +7117,13 @@
           <a:p>
             <a:pPr algn="l"/>
             <a:r>
-              <a:rPr sz="1600" b="1">
-                <a:solidFill>
-                  <a:srgbClr val="00B14F"/>
+              <a:rPr sz="2600" b="1">
+                <a:solidFill>
+                  <a:srgbClr val="006E5E"/>
                 </a:solidFill>
                 <a:latin typeface="Calibri"/>
               </a:rPr>
-              <a:t>Grab</a:t>
-            </a:r>
-          </a:p>
-        </p:txBody>
-      </p:sp>
-      <p:sp>
-        <p:nvSpPr>
-          <p:cNvPr id="6" name="TextBox 5"/>
-          <p:cNvSpPr txBox="1"/>
-          <p:nvPr/>
-        </p:nvSpPr>
-        <p:spPr>
-          <a:xfrm>
-            <a:off x="10515600" y="45720"/>
-            <a:ext cx="1554480" cy="320040"/>
-          </a:xfrm>
-          <a:prstGeom prst="rect">
-            <a:avLst/>
-          </a:prstGeom>
-          <a:noFill/>
-        </p:spPr>
-        <p:txBody>
-          <a:bodyPr wrap="square">
-            <a:spAutoFit/>
-          </a:bodyPr>
-          <a:lstStyle/>
-          <a:p>
-            <a:pPr algn="r"/>
-            <a:r>
-              <a:rPr sz="1300" b="1">
-                <a:solidFill>
-                  <a:srgbClr val="006E5E"/>
-                </a:solidFill>
-                <a:latin typeface="Calibri"/>
-              </a:rPr>
-              <a:t>GrabHack 2.0</a:t>
+              <a:t>Technical Architecture</a:t>
             </a:r>
           </a:p>
         </p:txBody>
@@ -7438,8 +7136,8 @@
         </p:nvSpPr>
         <p:spPr>
           <a:xfrm>
-            <a:off x="0" y="6583680"/>
-            <a:ext cx="12188952" cy="274320"/>
+            <a:off x="457200" y="1115568"/>
+            <a:ext cx="11247120" cy="45720"/>
           </a:xfrm>
           <a:prstGeom prst="rect">
             <a:avLst/>
@@ -7481,8 +7179,51 @@
         </p:nvSpPr>
         <p:spPr>
           <a:xfrm>
-            <a:off x="457200" y="548640"/>
-            <a:ext cx="2560320" cy="256032"/>
+            <a:off x="457200" y="1325880"/>
+            <a:ext cx="11247120" cy="1078992"/>
+          </a:xfrm>
+          <a:prstGeom prst="rect">
+            <a:avLst/>
+          </a:prstGeom>
+          <a:solidFill>
+            <a:srgbClr val="F4F4F4"/>
+          </a:solidFill>
+          <a:ln>
+            <a:noFill/>
+          </a:ln>
+        </p:spPr>
+        <p:style>
+          <a:lnRef idx="1">
+            <a:schemeClr val="accent1"/>
+          </a:lnRef>
+          <a:fillRef idx="3">
+            <a:schemeClr val="accent1"/>
+          </a:fillRef>
+          <a:effectRef idx="2">
+            <a:schemeClr val="accent1"/>
+          </a:effectRef>
+          <a:fontRef idx="minor">
+            <a:schemeClr val="lt1"/>
+          </a:fontRef>
+        </p:style>
+        <p:txBody>
+          <a:bodyPr rtlCol="0" anchor="ctr"/>
+          <a:lstStyle/>
+          <a:p>
+            <a:pPr algn="ctr"/>
+          </a:p>
+        </p:txBody>
+      </p:sp>
+      <p:sp>
+        <p:nvSpPr>
+          <p:cNvPr id="9" name="Rectangle 8"/>
+          <p:cNvSpPr/>
+          <p:nvPr/>
+        </p:nvSpPr>
+        <p:spPr>
+          <a:xfrm>
+            <a:off x="457200" y="1325880"/>
+            <a:ext cx="128016" cy="1078992"/>
           </a:xfrm>
           <a:prstGeom prst="rect">
             <a:avLst/>
@@ -7518,14 +7259,14 @@
       </p:sp>
       <p:sp>
         <p:nvSpPr>
-          <p:cNvPr id="9" name="TextBox 8"/>
+          <p:cNvPr id="10" name="TextBox 9"/>
           <p:cNvSpPr txBox="1"/>
           <p:nvPr/>
         </p:nvSpPr>
         <p:spPr>
           <a:xfrm>
-            <a:off x="502920" y="548640"/>
-            <a:ext cx="2468880" cy="256032"/>
+            <a:off x="731520" y="1417320"/>
+            <a:ext cx="2560320" cy="365760"/>
           </a:xfrm>
           <a:prstGeom prst="rect">
             <a:avLst/>
@@ -7540,27 +7281,27 @@
           <a:p>
             <a:pPr algn="l"/>
             <a:r>
-              <a:rPr sz="900" b="1">
-                <a:solidFill>
-                  <a:srgbClr val="FFFFFF"/>
+              <a:rPr sz="1200" b="1">
+                <a:solidFill>
+                  <a:srgbClr val="00A89C"/>
                 </a:solidFill>
                 <a:latin typeface="Calibri"/>
               </a:rPr>
-              <a:t>TECHNICAL ARCHITECTURE</a:t>
-            </a:r>
-          </a:p>
-        </p:txBody>
-      </p:sp>
-      <p:sp>
-        <p:nvSpPr>
-          <p:cNvPr id="10" name="TextBox 9"/>
+              <a:t>User Layer</a:t>
+            </a:r>
+          </a:p>
+        </p:txBody>
+      </p:sp>
+      <p:sp>
+        <p:nvSpPr>
+          <p:cNvPr id="11" name="TextBox 10"/>
           <p:cNvSpPr txBox="1"/>
           <p:nvPr/>
         </p:nvSpPr>
         <p:spPr>
           <a:xfrm>
-            <a:off x="457200" y="960120"/>
-            <a:ext cx="8229600" cy="548640"/>
+            <a:off x="731520" y="1828800"/>
+            <a:ext cx="10332720" cy="411480"/>
           </a:xfrm>
           <a:prstGeom prst="rect">
             <a:avLst/>
@@ -7575,33 +7316,68 @@
           <a:p>
             <a:pPr algn="l"/>
             <a:r>
-              <a:rPr sz="2800" b="1">
-                <a:solidFill>
-                  <a:srgbClr val="006E5E"/>
+              <a:rPr sz="1000" b="0">
+                <a:solidFill>
+                  <a:srgbClr val="1A1A1A"/>
                 </a:solidFill>
                 <a:latin typeface="Calibri"/>
               </a:rPr>
-              <a:t>How It Works</a:t>
-            </a:r>
-          </a:p>
-        </p:txBody>
-      </p:sp>
-      <p:sp>
-        <p:nvSpPr>
-          <p:cNvPr id="11" name="Rectangle 10"/>
+              <a:t>Grab SuperApp  ·  Driver &amp; Delivery Partner Interface  ·  React Native</a:t>
+            </a:r>
+          </a:p>
+        </p:txBody>
+      </p:sp>
+      <p:sp>
+        <p:nvSpPr>
+          <p:cNvPr id="12" name="TextBox 11"/>
+          <p:cNvSpPr txBox="1"/>
+          <p:nvPr/>
+        </p:nvSpPr>
+        <p:spPr>
+          <a:xfrm>
+            <a:off x="5943600" y="2377439"/>
+            <a:ext cx="457200" cy="256032"/>
+          </a:xfrm>
+          <a:prstGeom prst="rect">
+            <a:avLst/>
+          </a:prstGeom>
+          <a:noFill/>
+        </p:spPr>
+        <p:txBody>
+          <a:bodyPr wrap="square">
+            <a:spAutoFit/>
+          </a:bodyPr>
+          <a:lstStyle/>
+          <a:p>
+            <a:pPr algn="ctr"/>
+            <a:r>
+              <a:rPr sz="1100" b="1">
+                <a:solidFill>
+                  <a:srgbClr val="00A89C"/>
+                </a:solidFill>
+                <a:latin typeface="Calibri"/>
+              </a:rPr>
+              <a:t>▼</a:t>
+            </a:r>
+          </a:p>
+        </p:txBody>
+      </p:sp>
+      <p:sp>
+        <p:nvSpPr>
+          <p:cNvPr id="13" name="Rectangle 12"/>
           <p:cNvSpPr/>
           <p:nvPr/>
         </p:nvSpPr>
         <p:spPr>
           <a:xfrm>
-            <a:off x="457200" y="1554480"/>
-            <a:ext cx="11247120" cy="45720"/>
+            <a:off x="457200" y="2587752"/>
+            <a:ext cx="11247120" cy="1078992"/>
           </a:xfrm>
           <a:prstGeom prst="rect">
             <a:avLst/>
           </a:prstGeom>
           <a:solidFill>
-            <a:srgbClr val="C8F000"/>
+            <a:srgbClr val="F4F4F4"/>
           </a:solidFill>
           <a:ln>
             <a:noFill/>
@@ -7631,248 +7407,14 @@
       </p:sp>
       <p:sp>
         <p:nvSpPr>
-          <p:cNvPr id="12" name="Rectangle 11"/>
+          <p:cNvPr id="14" name="Rectangle 13"/>
           <p:cNvSpPr/>
           <p:nvPr/>
         </p:nvSpPr>
         <p:spPr>
           <a:xfrm>
-            <a:off x="457200" y="1783080"/>
-            <a:ext cx="11247120" cy="868680"/>
-          </a:xfrm>
-          <a:prstGeom prst="rect">
-            <a:avLst/>
-          </a:prstGeom>
-          <a:solidFill>
-            <a:srgbClr val="F5F5F5"/>
-          </a:solidFill>
-          <a:ln>
-            <a:noFill/>
-          </a:ln>
-        </p:spPr>
-        <p:style>
-          <a:lnRef idx="1">
-            <a:schemeClr val="accent1"/>
-          </a:lnRef>
-          <a:fillRef idx="3">
-            <a:schemeClr val="accent1"/>
-          </a:fillRef>
-          <a:effectRef idx="2">
-            <a:schemeClr val="accent1"/>
-          </a:effectRef>
-          <a:fontRef idx="minor">
-            <a:schemeClr val="lt1"/>
-          </a:fontRef>
-        </p:style>
-        <p:txBody>
-          <a:bodyPr rtlCol="0" anchor="ctr"/>
-          <a:lstStyle/>
-          <a:p>
-            <a:pPr algn="ctr"/>
-          </a:p>
-        </p:txBody>
-      </p:sp>
-      <p:sp>
-        <p:nvSpPr>
-          <p:cNvPr id="13" name="Rectangle 12"/>
-          <p:cNvSpPr/>
-          <p:nvPr/>
-        </p:nvSpPr>
-        <p:spPr>
-          <a:xfrm>
-            <a:off x="457200" y="1783080"/>
-            <a:ext cx="137160" cy="868680"/>
-          </a:xfrm>
-          <a:prstGeom prst="rect">
-            <a:avLst/>
-          </a:prstGeom>
-          <a:solidFill>
-            <a:srgbClr val="00A89C"/>
-          </a:solidFill>
-          <a:ln>
-            <a:noFill/>
-          </a:ln>
-        </p:spPr>
-        <p:style>
-          <a:lnRef idx="1">
-            <a:schemeClr val="accent1"/>
-          </a:lnRef>
-          <a:fillRef idx="3">
-            <a:schemeClr val="accent1"/>
-          </a:fillRef>
-          <a:effectRef idx="2">
-            <a:schemeClr val="accent1"/>
-          </a:effectRef>
-          <a:fontRef idx="minor">
-            <a:schemeClr val="lt1"/>
-          </a:fontRef>
-        </p:style>
-        <p:txBody>
-          <a:bodyPr rtlCol="0" anchor="ctr"/>
-          <a:lstStyle/>
-          <a:p>
-            <a:pPr algn="ctr"/>
-          </a:p>
-        </p:txBody>
-      </p:sp>
-      <p:sp>
-        <p:nvSpPr>
-          <p:cNvPr id="14" name="TextBox 13"/>
-          <p:cNvSpPr txBox="1"/>
-          <p:nvPr/>
-        </p:nvSpPr>
-        <p:spPr>
-          <a:xfrm>
-            <a:off x="731520" y="1828800"/>
-            <a:ext cx="2560320" cy="347472"/>
-          </a:xfrm>
-          <a:prstGeom prst="rect">
-            <a:avLst/>
-          </a:prstGeom>
-          <a:noFill/>
-        </p:spPr>
-        <p:txBody>
-          <a:bodyPr wrap="square">
-            <a:spAutoFit/>
-          </a:bodyPr>
-          <a:lstStyle/>
-          <a:p>
-            <a:pPr algn="l"/>
-            <a:r>
-              <a:rPr sz="1200" b="1">
-                <a:solidFill>
-                  <a:srgbClr val="00A89C"/>
-                </a:solidFill>
-                <a:latin typeface="Calibri"/>
-              </a:rPr>
-              <a:t>User Layer</a:t>
-            </a:r>
-          </a:p>
-        </p:txBody>
-      </p:sp>
-      <p:sp>
-        <p:nvSpPr>
-          <p:cNvPr id="15" name="TextBox 14"/>
-          <p:cNvSpPr txBox="1"/>
-          <p:nvPr/>
-        </p:nvSpPr>
-        <p:spPr>
-          <a:xfrm>
-            <a:off x="731520" y="2194560"/>
-            <a:ext cx="10515600" cy="347472"/>
-          </a:xfrm>
-          <a:prstGeom prst="rect">
-            <a:avLst/>
-          </a:prstGeom>
-          <a:noFill/>
-        </p:spPr>
-        <p:txBody>
-          <a:bodyPr wrap="square">
-            <a:spAutoFit/>
-          </a:bodyPr>
-          <a:lstStyle/>
-          <a:p>
-            <a:pPr algn="l"/>
-            <a:r>
-              <a:rPr sz="1100" b="0">
-                <a:solidFill>
-                  <a:srgbClr val="1A1A1A"/>
-                </a:solidFill>
-                <a:latin typeface="Calibri"/>
-              </a:rPr>
-              <a:t>Grab SuperApp (Driver / Delivery Partner)</a:t>
-            </a:r>
-          </a:p>
-        </p:txBody>
-      </p:sp>
-      <p:sp>
-        <p:nvSpPr>
-          <p:cNvPr id="16" name="TextBox 15"/>
-          <p:cNvSpPr txBox="1"/>
-          <p:nvPr/>
-        </p:nvSpPr>
-        <p:spPr>
-          <a:xfrm>
-            <a:off x="5852160" y="2651760"/>
-            <a:ext cx="457200" cy="274320"/>
-          </a:xfrm>
-          <a:prstGeom prst="rect">
-            <a:avLst/>
-          </a:prstGeom>
-          <a:noFill/>
-        </p:spPr>
-        <p:txBody>
-          <a:bodyPr wrap="square">
-            <a:spAutoFit/>
-          </a:bodyPr>
-          <a:lstStyle/>
-          <a:p>
-            <a:pPr algn="ctr"/>
-            <a:r>
-              <a:rPr sz="1200" b="1">
-                <a:solidFill>
-                  <a:srgbClr val="00A89C"/>
-                </a:solidFill>
-                <a:latin typeface="Calibri"/>
-              </a:rPr>
-              <a:t>▼</a:t>
-            </a:r>
-          </a:p>
-        </p:txBody>
-      </p:sp>
-      <p:sp>
-        <p:nvSpPr>
-          <p:cNvPr id="17" name="Rectangle 16"/>
-          <p:cNvSpPr/>
-          <p:nvPr/>
-        </p:nvSpPr>
-        <p:spPr>
-          <a:xfrm>
-            <a:off x="457200" y="2862072"/>
-            <a:ext cx="11247120" cy="868680"/>
-          </a:xfrm>
-          <a:prstGeom prst="rect">
-            <a:avLst/>
-          </a:prstGeom>
-          <a:solidFill>
-            <a:srgbClr val="F5F5F5"/>
-          </a:solidFill>
-          <a:ln>
-            <a:noFill/>
-          </a:ln>
-        </p:spPr>
-        <p:style>
-          <a:lnRef idx="1">
-            <a:schemeClr val="accent1"/>
-          </a:lnRef>
-          <a:fillRef idx="3">
-            <a:schemeClr val="accent1"/>
-          </a:fillRef>
-          <a:effectRef idx="2">
-            <a:schemeClr val="accent1"/>
-          </a:effectRef>
-          <a:fontRef idx="minor">
-            <a:schemeClr val="lt1"/>
-          </a:fontRef>
-        </p:style>
-        <p:txBody>
-          <a:bodyPr rtlCol="0" anchor="ctr"/>
-          <a:lstStyle/>
-          <a:p>
-            <a:pPr algn="ctr"/>
-          </a:p>
-        </p:txBody>
-      </p:sp>
-      <p:sp>
-        <p:nvSpPr>
-          <p:cNvPr id="18" name="Rectangle 17"/>
-          <p:cNvSpPr/>
-          <p:nvPr/>
-        </p:nvSpPr>
-        <p:spPr>
-          <a:xfrm>
-            <a:off x="457200" y="2862072"/>
-            <a:ext cx="137160" cy="868680"/>
+            <a:off x="457200" y="2587752"/>
+            <a:ext cx="128016" cy="1078992"/>
           </a:xfrm>
           <a:prstGeom prst="rect">
             <a:avLst/>
@@ -7908,14 +7450,14 @@
       </p:sp>
       <p:sp>
         <p:nvSpPr>
-          <p:cNvPr id="19" name="TextBox 18"/>
+          <p:cNvPr id="15" name="TextBox 14"/>
           <p:cNvSpPr txBox="1"/>
           <p:nvPr/>
         </p:nvSpPr>
         <p:spPr>
           <a:xfrm>
-            <a:off x="731520" y="2907791"/>
-            <a:ext cx="2560320" cy="347472"/>
+            <a:off x="731520" y="2679192"/>
+            <a:ext cx="2560320" cy="365760"/>
           </a:xfrm>
           <a:prstGeom prst="rect">
             <a:avLst/>
@@ -7943,14 +7485,14 @@
       </p:sp>
       <p:sp>
         <p:nvSpPr>
-          <p:cNvPr id="20" name="TextBox 19"/>
+          <p:cNvPr id="16" name="TextBox 15"/>
           <p:cNvSpPr txBox="1"/>
           <p:nvPr/>
         </p:nvSpPr>
         <p:spPr>
           <a:xfrm>
-            <a:off x="731520" y="3273552"/>
-            <a:ext cx="10515600" cy="347472"/>
+            <a:off x="731520" y="3090672"/>
+            <a:ext cx="10332720" cy="411480"/>
           </a:xfrm>
           <a:prstGeom prst="rect">
             <a:avLst/>
@@ -7965,27 +7507,27 @@
           <a:p>
             <a:pPr algn="l"/>
             <a:r>
-              <a:rPr sz="1100" b="0">
+              <a:rPr sz="1000" b="0">
                 <a:solidFill>
                   <a:srgbClr val="1A1A1A"/>
                 </a:solidFill>
                 <a:latin typeface="Calibri"/>
               </a:rPr>
-              <a:t>Conversational Agent · Income Analyser · Nudge Engine · Goal Tracker</a:t>
-            </a:r>
-          </a:p>
-        </p:txBody>
-      </p:sp>
-      <p:sp>
-        <p:nvSpPr>
-          <p:cNvPr id="21" name="TextBox 20"/>
+              <a:t>Conversational Agent  ·  Income Analyser  ·  Nudge Engine  ·  Goal Tracker  (LangChain / Claude API)</a:t>
+            </a:r>
+          </a:p>
+        </p:txBody>
+      </p:sp>
+      <p:sp>
+        <p:nvSpPr>
+          <p:cNvPr id="17" name="TextBox 16"/>
           <p:cNvSpPr txBox="1"/>
           <p:nvPr/>
         </p:nvSpPr>
         <p:spPr>
           <a:xfrm>
-            <a:off x="5852160" y="3730752"/>
-            <a:ext cx="457200" cy="274320"/>
+            <a:off x="5943600" y="3639312"/>
+            <a:ext cx="457200" cy="256032"/>
           </a:xfrm>
           <a:prstGeom prst="rect">
             <a:avLst/>
@@ -8000,7 +7542,7 @@
           <a:p>
             <a:pPr algn="ctr"/>
             <a:r>
-              <a:rPr sz="1200" b="1">
+              <a:rPr sz="1100" b="1">
                 <a:solidFill>
                   <a:srgbClr val="00A89C"/>
                 </a:solidFill>
@@ -8013,20 +7555,20 @@
       </p:sp>
       <p:sp>
         <p:nvSpPr>
-          <p:cNvPr id="22" name="Rectangle 21"/>
+          <p:cNvPr id="18" name="Rectangle 17"/>
           <p:cNvSpPr/>
           <p:nvPr/>
         </p:nvSpPr>
         <p:spPr>
           <a:xfrm>
-            <a:off x="457200" y="3941063"/>
-            <a:ext cx="11247120" cy="868680"/>
+            <a:off x="457200" y="3849624"/>
+            <a:ext cx="11247120" cy="1078992"/>
           </a:xfrm>
           <a:prstGeom prst="rect">
             <a:avLst/>
           </a:prstGeom>
           <a:solidFill>
-            <a:srgbClr val="F5F5F5"/>
+            <a:srgbClr val="F4F4F4"/>
           </a:solidFill>
           <a:ln>
             <a:noFill/>
@@ -8056,14 +7598,14 @@
       </p:sp>
       <p:sp>
         <p:nvSpPr>
-          <p:cNvPr id="23" name="Rectangle 22"/>
+          <p:cNvPr id="19" name="Rectangle 18"/>
           <p:cNvSpPr/>
           <p:nvPr/>
         </p:nvSpPr>
         <p:spPr>
           <a:xfrm>
-            <a:off x="457200" y="3941063"/>
-            <a:ext cx="137160" cy="868680"/>
+            <a:off x="457200" y="3849624"/>
+            <a:ext cx="128016" cy="1078992"/>
           </a:xfrm>
           <a:prstGeom prst="rect">
             <a:avLst/>
@@ -8099,14 +7641,14 @@
       </p:sp>
       <p:sp>
         <p:nvSpPr>
-          <p:cNvPr id="24" name="TextBox 23"/>
+          <p:cNvPr id="20" name="TextBox 19"/>
           <p:cNvSpPr txBox="1"/>
           <p:nvPr/>
         </p:nvSpPr>
         <p:spPr>
           <a:xfrm>
-            <a:off x="731520" y="3986783"/>
-            <a:ext cx="2560320" cy="347472"/>
+            <a:off x="731520" y="3941063"/>
+            <a:ext cx="2560320" cy="365760"/>
           </a:xfrm>
           <a:prstGeom prst="rect">
             <a:avLst/>
@@ -8134,14 +7676,14 @@
       </p:sp>
       <p:sp>
         <p:nvSpPr>
-          <p:cNvPr id="25" name="TextBox 24"/>
+          <p:cNvPr id="21" name="TextBox 20"/>
           <p:cNvSpPr txBox="1"/>
           <p:nvPr/>
         </p:nvSpPr>
         <p:spPr>
           <a:xfrm>
             <a:off x="731520" y="4352544"/>
-            <a:ext cx="10515600" cy="347472"/>
+            <a:ext cx="10332720" cy="411480"/>
           </a:xfrm>
           <a:prstGeom prst="rect">
             <a:avLst/>
@@ -8156,27 +7698,27 @@
           <a:p>
             <a:pPr algn="l"/>
             <a:r>
-              <a:rPr sz="1100" b="0">
+              <a:rPr sz="1000" b="0">
                 <a:solidFill>
                   <a:srgbClr val="1A1A1A"/>
                 </a:solidFill>
                 <a:latin typeface="Calibri"/>
               </a:rPr>
-              <a:t>Grab Trip Data · GXS Transaction API · User Profile &amp; Preferences</a:t>
-            </a:r>
-          </a:p>
-        </p:txBody>
-      </p:sp>
-      <p:sp>
-        <p:nvSpPr>
-          <p:cNvPr id="26" name="TextBox 25"/>
+              <a:t>Grab Trip Data  ·  GXS Transaction API  ·  User Profiles  ·  Redis Cache  ·  PostgreSQL</a:t>
+            </a:r>
+          </a:p>
+        </p:txBody>
+      </p:sp>
+      <p:sp>
+        <p:nvSpPr>
+          <p:cNvPr id="22" name="TextBox 21"/>
           <p:cNvSpPr txBox="1"/>
           <p:nvPr/>
         </p:nvSpPr>
         <p:spPr>
           <a:xfrm>
-            <a:off x="5852160" y="4809744"/>
-            <a:ext cx="457200" cy="274320"/>
+            <a:off x="5943600" y="4901183"/>
+            <a:ext cx="457200" cy="256032"/>
           </a:xfrm>
           <a:prstGeom prst="rect">
             <a:avLst/>
@@ -8191,7 +7733,7 @@
           <a:p>
             <a:pPr algn="ctr"/>
             <a:r>
-              <a:rPr sz="1200" b="1">
+              <a:rPr sz="1100" b="1">
                 <a:solidFill>
                   <a:srgbClr val="00A89C"/>
                 </a:solidFill>
@@ -8204,20 +7746,20 @@
       </p:sp>
       <p:sp>
         <p:nvSpPr>
-          <p:cNvPr id="27" name="Rectangle 26"/>
+          <p:cNvPr id="23" name="Rectangle 22"/>
           <p:cNvSpPr/>
           <p:nvPr/>
         </p:nvSpPr>
         <p:spPr>
           <a:xfrm>
-            <a:off x="457200" y="5020056"/>
-            <a:ext cx="11247120" cy="868680"/>
+            <a:off x="457200" y="5111496"/>
+            <a:ext cx="11247120" cy="1078992"/>
           </a:xfrm>
           <a:prstGeom prst="rect">
             <a:avLst/>
           </a:prstGeom>
           <a:solidFill>
-            <a:srgbClr val="F5F5F5"/>
+            <a:srgbClr val="F4F4F4"/>
           </a:solidFill>
           <a:ln>
             <a:noFill/>
@@ -8247,14 +7789,14 @@
       </p:sp>
       <p:sp>
         <p:nvSpPr>
-          <p:cNvPr id="28" name="Rectangle 27"/>
+          <p:cNvPr id="24" name="Rectangle 23"/>
           <p:cNvSpPr/>
           <p:nvPr/>
         </p:nvSpPr>
         <p:spPr>
           <a:xfrm>
-            <a:off x="457200" y="5020056"/>
-            <a:ext cx="137160" cy="868680"/>
+            <a:off x="457200" y="5111496"/>
+            <a:ext cx="128016" cy="1078992"/>
           </a:xfrm>
           <a:prstGeom prst="rect">
             <a:avLst/>
@@ -8290,14 +7832,14 @@
       </p:sp>
       <p:sp>
         <p:nvSpPr>
-          <p:cNvPr id="29" name="TextBox 28"/>
+          <p:cNvPr id="25" name="TextBox 24"/>
           <p:cNvSpPr txBox="1"/>
           <p:nvPr/>
         </p:nvSpPr>
         <p:spPr>
           <a:xfrm>
-            <a:off x="731520" y="5065776"/>
-            <a:ext cx="2560320" cy="347472"/>
+            <a:off x="731520" y="5202936"/>
+            <a:ext cx="2560320" cy="365760"/>
           </a:xfrm>
           <a:prstGeom prst="rect">
             <a:avLst/>
@@ -8325,14 +7867,14 @@
       </p:sp>
       <p:sp>
         <p:nvSpPr>
-          <p:cNvPr id="30" name="TextBox 29"/>
+          <p:cNvPr id="26" name="TextBox 25"/>
           <p:cNvSpPr txBox="1"/>
           <p:nvPr/>
         </p:nvSpPr>
         <p:spPr>
           <a:xfrm>
-            <a:off x="731520" y="5431536"/>
-            <a:ext cx="10515600" cy="347472"/>
+            <a:off x="731520" y="5614416"/>
+            <a:ext cx="10332720" cy="411480"/>
           </a:xfrm>
           <a:prstGeom prst="rect">
             <a:avLst/>
@@ -8347,27 +7889,27 @@
           <a:p>
             <a:pPr algn="l"/>
             <a:r>
-              <a:rPr sz="1100" b="0">
+              <a:rPr sz="1000" b="0">
                 <a:solidFill>
                   <a:srgbClr val="1A1A1A"/>
                 </a:solidFill>
                 <a:latin typeface="Calibri"/>
               </a:rPr>
-              <a:t>GXS Bank API – Savings Pots · Interest Engine · KYC / Compliance</a:t>
-            </a:r>
-          </a:p>
-        </p:txBody>
-      </p:sp>
-      <p:sp>
-        <p:nvSpPr>
-          <p:cNvPr id="31" name="TextBox 30"/>
+              <a:t>GXS Bank API  ·  Savings Pots  ·  Interest Engine  ·  KYC / Compliance</a:t>
+            </a:r>
+          </a:p>
+        </p:txBody>
+      </p:sp>
+      <p:sp>
+        <p:nvSpPr>
+          <p:cNvPr id="27" name="TextBox 26"/>
           <p:cNvSpPr txBox="1"/>
           <p:nvPr/>
         </p:nvSpPr>
         <p:spPr>
           <a:xfrm>
-            <a:off x="457200" y="6080760"/>
-            <a:ext cx="11247120" cy="347472"/>
+            <a:off x="457200" y="6309360"/>
+            <a:ext cx="11247120" cy="274320"/>
           </a:xfrm>
           <a:prstGeom prst="rect">
             <a:avLst/>
@@ -8382,13 +7924,13 @@
           <a:p>
             <a:pPr algn="l"/>
             <a:r>
-              <a:rPr sz="1000" b="0">
+              <a:rPr sz="900" b="0">
                 <a:solidFill>
                   <a:srgbClr val="006E5E"/>
                 </a:solidFill>
                 <a:latin typeface="Calibri"/>
               </a:rPr>
-              <a:t>Tech Stack: Python · FastAPI · LangChain / Claude API · PostgreSQL · Redis · React Native</a:t>
+              <a:t>Stack: Python · FastAPI · LangChain · Claude API · PostgreSQL · Redis · React Native</a:t>
             </a:r>
           </a:p>
         </p:txBody>
@@ -8456,57 +7998,93 @@
       </p:sp>
       <p:sp>
         <p:nvSpPr>
-          <p:cNvPr id="3" name="Rectangle 2"/>
+          <p:cNvPr id="3" name="TextBox 2"/>
+          <p:cNvSpPr txBox="1"/>
+          <p:nvPr/>
+        </p:nvSpPr>
+        <p:spPr>
+          <a:xfrm>
+            <a:off x="164592" y="91440"/>
+            <a:ext cx="1280160" cy="347472"/>
+          </a:xfrm>
+          <a:prstGeom prst="rect">
+            <a:avLst/>
+          </a:prstGeom>
+          <a:noFill/>
+        </p:spPr>
+        <p:txBody>
+          <a:bodyPr wrap="square">
+            <a:spAutoFit/>
+          </a:bodyPr>
+          <a:lstStyle/>
+          <a:p>
+            <a:pPr algn="l"/>
+            <a:r>
+              <a:rPr sz="1800" b="1">
+                <a:solidFill>
+                  <a:srgbClr val="00B14F"/>
+                </a:solidFill>
+                <a:latin typeface="Calibri"/>
+              </a:rPr>
+              <a:t>Grab</a:t>
+            </a:r>
+          </a:p>
+        </p:txBody>
+      </p:sp>
+      <p:sp>
+        <p:nvSpPr>
+          <p:cNvPr id="4" name="TextBox 3"/>
+          <p:cNvSpPr txBox="1"/>
+          <p:nvPr/>
+        </p:nvSpPr>
+        <p:spPr>
+          <a:xfrm>
+            <a:off x="9326880" y="91440"/>
+            <a:ext cx="2743200" cy="347472"/>
+          </a:xfrm>
+          <a:prstGeom prst="rect">
+            <a:avLst/>
+          </a:prstGeom>
+          <a:noFill/>
+        </p:spPr>
+        <p:txBody>
+          <a:bodyPr wrap="square">
+            <a:spAutoFit/>
+          </a:bodyPr>
+          <a:lstStyle/>
+          <a:p>
+            <a:pPr algn="r"/>
+            <a:r>
+              <a:rPr sz="1600" b="1">
+                <a:solidFill>
+                  <a:srgbClr val="006E5E"/>
+                </a:solidFill>
+                <a:latin typeface="Calibri"/>
+              </a:rPr>
+              <a:t>GrabHack</a:t>
+            </a:r>
+            <a:r>
+              <a:rPr sz="1100" b="0">
+                <a:solidFill>
+                  <a:srgbClr val="006E5E"/>
+                </a:solidFill>
+                <a:latin typeface="Calibri"/>
+              </a:rPr>
+              <a:t>2.0</a:t>
+            </a:r>
+          </a:p>
+        </p:txBody>
+      </p:sp>
+      <p:sp>
+        <p:nvSpPr>
+          <p:cNvPr id="5" name="Rectangle 4"/>
           <p:cNvSpPr/>
           <p:nvPr/>
         </p:nvSpPr>
         <p:spPr>
           <a:xfrm>
-            <a:off x="0" y="0"/>
-            <a:ext cx="12188952" cy="411480"/>
-          </a:xfrm>
-          <a:prstGeom prst="rect">
-            <a:avLst/>
-          </a:prstGeom>
-          <a:solidFill>
-            <a:srgbClr val="FFFFFF"/>
-          </a:solidFill>
-          <a:ln>
-            <a:noFill/>
-          </a:ln>
-        </p:spPr>
-        <p:style>
-          <a:lnRef idx="1">
-            <a:schemeClr val="accent1"/>
-          </a:lnRef>
-          <a:fillRef idx="3">
-            <a:schemeClr val="accent1"/>
-          </a:fillRef>
-          <a:effectRef idx="2">
-            <a:schemeClr val="accent1"/>
-          </a:effectRef>
-          <a:fontRef idx="minor">
-            <a:schemeClr val="lt1"/>
-          </a:fontRef>
-        </p:style>
-        <p:txBody>
-          <a:bodyPr rtlCol="0" anchor="ctr"/>
-          <a:lstStyle/>
-          <a:p>
-            <a:pPr algn="ctr"/>
-          </a:p>
-        </p:txBody>
-      </p:sp>
-      <p:sp>
-        <p:nvSpPr>
-          <p:cNvPr id="4" name="Rectangle 3"/>
-          <p:cNvSpPr/>
-          <p:nvPr/>
-        </p:nvSpPr>
-        <p:spPr>
-          <a:xfrm>
-            <a:off x="0" y="393192"/>
-            <a:ext cx="12188952" cy="27432"/>
+            <a:off x="0" y="6656832"/>
+            <a:ext cx="12188952" cy="201168"/>
           </a:xfrm>
           <a:prstGeom prst="rect">
             <a:avLst/>
@@ -8542,14 +8120,14 @@
       </p:sp>
       <p:sp>
         <p:nvSpPr>
-          <p:cNvPr id="5" name="TextBox 4"/>
+          <p:cNvPr id="6" name="TextBox 5"/>
           <p:cNvSpPr txBox="1"/>
           <p:nvPr/>
         </p:nvSpPr>
         <p:spPr>
           <a:xfrm>
-            <a:off x="182880" y="45720"/>
-            <a:ext cx="1097280" cy="320040"/>
+            <a:off x="457200" y="548640"/>
+            <a:ext cx="8229600" cy="502920"/>
           </a:xfrm>
           <a:prstGeom prst="rect">
             <a:avLst/>
@@ -8564,48 +8142,13 @@
           <a:p>
             <a:pPr algn="l"/>
             <a:r>
-              <a:rPr sz="1600" b="1">
-                <a:solidFill>
-                  <a:srgbClr val="00B14F"/>
+              <a:rPr sz="2600" b="1">
+                <a:solidFill>
+                  <a:srgbClr val="006E5E"/>
                 </a:solidFill>
                 <a:latin typeface="Calibri"/>
               </a:rPr>
-              <a:t>Grab</a:t>
-            </a:r>
-          </a:p>
-        </p:txBody>
-      </p:sp>
-      <p:sp>
-        <p:nvSpPr>
-          <p:cNvPr id="6" name="TextBox 5"/>
-          <p:cNvSpPr txBox="1"/>
-          <p:nvPr/>
-        </p:nvSpPr>
-        <p:spPr>
-          <a:xfrm>
-            <a:off x="10515600" y="45720"/>
-            <a:ext cx="1554480" cy="320040"/>
-          </a:xfrm>
-          <a:prstGeom prst="rect">
-            <a:avLst/>
-          </a:prstGeom>
-          <a:noFill/>
-        </p:spPr>
-        <p:txBody>
-          <a:bodyPr wrap="square">
-            <a:spAutoFit/>
-          </a:bodyPr>
-          <a:lstStyle/>
-          <a:p>
-            <a:pPr algn="r"/>
-            <a:r>
-              <a:rPr sz="1300" b="1">
-                <a:solidFill>
-                  <a:srgbClr val="006E5E"/>
-                </a:solidFill>
-                <a:latin typeface="Calibri"/>
-              </a:rPr>
-              <a:t>GrabHack 2.0</a:t>
+              <a:t>Impact &amp; Value Proposition</a:t>
             </a:r>
           </a:p>
         </p:txBody>
@@ -8618,8 +8161,8 @@
         </p:nvSpPr>
         <p:spPr>
           <a:xfrm>
-            <a:off x="0" y="6583680"/>
-            <a:ext cx="12188952" cy="274320"/>
+            <a:off x="457200" y="1115568"/>
+            <a:ext cx="11247120" cy="45720"/>
           </a:xfrm>
           <a:prstGeom prst="rect">
             <a:avLst/>
@@ -8661,8 +8204,507 @@
         </p:nvSpPr>
         <p:spPr>
           <a:xfrm>
-            <a:off x="457200" y="548640"/>
-            <a:ext cx="2560320" cy="256032"/>
+            <a:off x="502920" y="1325880"/>
+            <a:ext cx="2697480" cy="1874519"/>
+          </a:xfrm>
+          <a:prstGeom prst="rect">
+            <a:avLst/>
+          </a:prstGeom>
+          <a:solidFill>
+            <a:srgbClr val="006E5E"/>
+          </a:solidFill>
+          <a:ln>
+            <a:noFill/>
+          </a:ln>
+        </p:spPr>
+        <p:style>
+          <a:lnRef idx="1">
+            <a:schemeClr val="accent1"/>
+          </a:lnRef>
+          <a:fillRef idx="3">
+            <a:schemeClr val="accent1"/>
+          </a:fillRef>
+          <a:effectRef idx="2">
+            <a:schemeClr val="accent1"/>
+          </a:effectRef>
+          <a:fontRef idx="minor">
+            <a:schemeClr val="lt1"/>
+          </a:fontRef>
+        </p:style>
+        <p:txBody>
+          <a:bodyPr rtlCol="0" anchor="ctr"/>
+          <a:lstStyle/>
+          <a:p>
+            <a:pPr algn="ctr"/>
+          </a:p>
+        </p:txBody>
+      </p:sp>
+      <p:sp>
+        <p:nvSpPr>
+          <p:cNvPr id="9" name="TextBox 8"/>
+          <p:cNvSpPr txBox="1"/>
+          <p:nvPr/>
+        </p:nvSpPr>
+        <p:spPr>
+          <a:xfrm>
+            <a:off x="594360" y="1417320"/>
+            <a:ext cx="2514600" cy="841248"/>
+          </a:xfrm>
+          <a:prstGeom prst="rect">
+            <a:avLst/>
+          </a:prstGeom>
+          <a:noFill/>
+        </p:spPr>
+        <p:txBody>
+          <a:bodyPr wrap="square">
+            <a:spAutoFit/>
+          </a:bodyPr>
+          <a:lstStyle/>
+          <a:p>
+            <a:pPr algn="ctr"/>
+            <a:r>
+              <a:rPr sz="3400" b="1">
+                <a:solidFill>
+                  <a:srgbClr val="C8F000"/>
+                </a:solidFill>
+                <a:latin typeface="Calibri"/>
+              </a:rPr>
+              <a:t>3M+</a:t>
+            </a:r>
+          </a:p>
+        </p:txBody>
+      </p:sp>
+      <p:sp>
+        <p:nvSpPr>
+          <p:cNvPr id="10" name="TextBox 9"/>
+          <p:cNvSpPr txBox="1"/>
+          <p:nvPr/>
+        </p:nvSpPr>
+        <p:spPr>
+          <a:xfrm>
+            <a:off x="594360" y="2267712"/>
+            <a:ext cx="2514600" cy="731520"/>
+          </a:xfrm>
+          <a:prstGeom prst="rect">
+            <a:avLst/>
+          </a:prstGeom>
+          <a:noFill/>
+        </p:spPr>
+        <p:txBody>
+          <a:bodyPr wrap="square">
+            <a:spAutoFit/>
+          </a:bodyPr>
+          <a:lstStyle/>
+          <a:p>
+            <a:pPr algn="ctr"/>
+            <a:r>
+              <a:rPr sz="1100" b="0">
+                <a:solidFill>
+                  <a:srgbClr val="FFFFFF"/>
+                </a:solidFill>
+                <a:latin typeface="Calibri"/>
+              </a:rPr>
+              <a:t>Grab gig workers
+across SEA</a:t>
+            </a:r>
+          </a:p>
+        </p:txBody>
+      </p:sp>
+      <p:sp>
+        <p:nvSpPr>
+          <p:cNvPr id="11" name="Rectangle 10"/>
+          <p:cNvSpPr/>
+          <p:nvPr/>
+        </p:nvSpPr>
+        <p:spPr>
+          <a:xfrm>
+            <a:off x="3429000" y="1325880"/>
+            <a:ext cx="2697480" cy="1874519"/>
+          </a:xfrm>
+          <a:prstGeom prst="rect">
+            <a:avLst/>
+          </a:prstGeom>
+          <a:solidFill>
+            <a:srgbClr val="006E5E"/>
+          </a:solidFill>
+          <a:ln>
+            <a:noFill/>
+          </a:ln>
+        </p:spPr>
+        <p:style>
+          <a:lnRef idx="1">
+            <a:schemeClr val="accent1"/>
+          </a:lnRef>
+          <a:fillRef idx="3">
+            <a:schemeClr val="accent1"/>
+          </a:fillRef>
+          <a:effectRef idx="2">
+            <a:schemeClr val="accent1"/>
+          </a:effectRef>
+          <a:fontRef idx="minor">
+            <a:schemeClr val="lt1"/>
+          </a:fontRef>
+        </p:style>
+        <p:txBody>
+          <a:bodyPr rtlCol="0" anchor="ctr"/>
+          <a:lstStyle/>
+          <a:p>
+            <a:pPr algn="ctr"/>
+          </a:p>
+        </p:txBody>
+      </p:sp>
+      <p:sp>
+        <p:nvSpPr>
+          <p:cNvPr id="12" name="TextBox 11"/>
+          <p:cNvSpPr txBox="1"/>
+          <p:nvPr/>
+        </p:nvSpPr>
+        <p:spPr>
+          <a:xfrm>
+            <a:off x="3520440" y="1417320"/>
+            <a:ext cx="2514600" cy="841248"/>
+          </a:xfrm>
+          <a:prstGeom prst="rect">
+            <a:avLst/>
+          </a:prstGeom>
+          <a:noFill/>
+        </p:spPr>
+        <p:txBody>
+          <a:bodyPr wrap="square">
+            <a:spAutoFit/>
+          </a:bodyPr>
+          <a:lstStyle/>
+          <a:p>
+            <a:pPr algn="ctr"/>
+            <a:r>
+              <a:rPr sz="3400" b="1">
+                <a:solidFill>
+                  <a:srgbClr val="C8F000"/>
+                </a:solidFill>
+                <a:latin typeface="Calibri"/>
+              </a:rPr>
+              <a:t>40%</a:t>
+            </a:r>
+          </a:p>
+        </p:txBody>
+      </p:sp>
+      <p:sp>
+        <p:nvSpPr>
+          <p:cNvPr id="13" name="TextBox 12"/>
+          <p:cNvSpPr txBox="1"/>
+          <p:nvPr/>
+        </p:nvSpPr>
+        <p:spPr>
+          <a:xfrm>
+            <a:off x="3520440" y="2267712"/>
+            <a:ext cx="2514600" cy="731520"/>
+          </a:xfrm>
+          <a:prstGeom prst="rect">
+            <a:avLst/>
+          </a:prstGeom>
+          <a:noFill/>
+        </p:spPr>
+        <p:txBody>
+          <a:bodyPr wrap="square">
+            <a:spAutoFit/>
+          </a:bodyPr>
+          <a:lstStyle/>
+          <a:p>
+            <a:pPr algn="ctr"/>
+            <a:r>
+              <a:rPr sz="1100" b="0">
+                <a:solidFill>
+                  <a:srgbClr val="FFFFFF"/>
+                </a:solidFill>
+                <a:latin typeface="Calibri"/>
+              </a:rPr>
+              <a:t>Income volatility
+for gig workers</a:t>
+            </a:r>
+          </a:p>
+        </p:txBody>
+      </p:sp>
+      <p:sp>
+        <p:nvSpPr>
+          <p:cNvPr id="14" name="Rectangle 13"/>
+          <p:cNvSpPr/>
+          <p:nvPr/>
+        </p:nvSpPr>
+        <p:spPr>
+          <a:xfrm>
+            <a:off x="6355080" y="1325880"/>
+            <a:ext cx="2697480" cy="1874519"/>
+          </a:xfrm>
+          <a:prstGeom prst="rect">
+            <a:avLst/>
+          </a:prstGeom>
+          <a:solidFill>
+            <a:srgbClr val="006E5E"/>
+          </a:solidFill>
+          <a:ln>
+            <a:noFill/>
+          </a:ln>
+        </p:spPr>
+        <p:style>
+          <a:lnRef idx="1">
+            <a:schemeClr val="accent1"/>
+          </a:lnRef>
+          <a:fillRef idx="3">
+            <a:schemeClr val="accent1"/>
+          </a:fillRef>
+          <a:effectRef idx="2">
+            <a:schemeClr val="accent1"/>
+          </a:effectRef>
+          <a:fontRef idx="minor">
+            <a:schemeClr val="lt1"/>
+          </a:fontRef>
+        </p:style>
+        <p:txBody>
+          <a:bodyPr rtlCol="0" anchor="ctr"/>
+          <a:lstStyle/>
+          <a:p>
+            <a:pPr algn="ctr"/>
+          </a:p>
+        </p:txBody>
+      </p:sp>
+      <p:sp>
+        <p:nvSpPr>
+          <p:cNvPr id="15" name="TextBox 14"/>
+          <p:cNvSpPr txBox="1"/>
+          <p:nvPr/>
+        </p:nvSpPr>
+        <p:spPr>
+          <a:xfrm>
+            <a:off x="6446520" y="1417320"/>
+            <a:ext cx="2514600" cy="841248"/>
+          </a:xfrm>
+          <a:prstGeom prst="rect">
+            <a:avLst/>
+          </a:prstGeom>
+          <a:noFill/>
+        </p:spPr>
+        <p:txBody>
+          <a:bodyPr wrap="square">
+            <a:spAutoFit/>
+          </a:bodyPr>
+          <a:lstStyle/>
+          <a:p>
+            <a:pPr algn="ctr"/>
+            <a:r>
+              <a:rPr sz="3400" b="1">
+                <a:solidFill>
+                  <a:srgbClr val="C8F000"/>
+                </a:solidFill>
+                <a:latin typeface="Calibri"/>
+              </a:rPr>
+              <a:t>8x</a:t>
+            </a:r>
+          </a:p>
+        </p:txBody>
+      </p:sp>
+      <p:sp>
+        <p:nvSpPr>
+          <p:cNvPr id="16" name="TextBox 15"/>
+          <p:cNvSpPr txBox="1"/>
+          <p:nvPr/>
+        </p:nvSpPr>
+        <p:spPr>
+          <a:xfrm>
+            <a:off x="6446520" y="2267712"/>
+            <a:ext cx="2514600" cy="731520"/>
+          </a:xfrm>
+          <a:prstGeom prst="rect">
+            <a:avLst/>
+          </a:prstGeom>
+          <a:noFill/>
+        </p:spPr>
+        <p:txBody>
+          <a:bodyPr wrap="square">
+            <a:spAutoFit/>
+          </a:bodyPr>
+          <a:lstStyle/>
+          <a:p>
+            <a:pPr algn="ctr"/>
+            <a:r>
+              <a:rPr sz="1100" b="0">
+                <a:solidFill>
+                  <a:srgbClr val="FFFFFF"/>
+                </a:solidFill>
+                <a:latin typeface="Calibri"/>
+              </a:rPr>
+              <a:t>Higher savings rate
+with AI nudges</a:t>
+            </a:r>
+          </a:p>
+        </p:txBody>
+      </p:sp>
+      <p:sp>
+        <p:nvSpPr>
+          <p:cNvPr id="17" name="Rectangle 16"/>
+          <p:cNvSpPr/>
+          <p:nvPr/>
+        </p:nvSpPr>
+        <p:spPr>
+          <a:xfrm>
+            <a:off x="9281160" y="1325880"/>
+            <a:ext cx="2697480" cy="1874519"/>
+          </a:xfrm>
+          <a:prstGeom prst="rect">
+            <a:avLst/>
+          </a:prstGeom>
+          <a:solidFill>
+            <a:srgbClr val="006E5E"/>
+          </a:solidFill>
+          <a:ln>
+            <a:noFill/>
+          </a:ln>
+        </p:spPr>
+        <p:style>
+          <a:lnRef idx="1">
+            <a:schemeClr val="accent1"/>
+          </a:lnRef>
+          <a:fillRef idx="3">
+            <a:schemeClr val="accent1"/>
+          </a:fillRef>
+          <a:effectRef idx="2">
+            <a:schemeClr val="accent1"/>
+          </a:effectRef>
+          <a:fontRef idx="minor">
+            <a:schemeClr val="lt1"/>
+          </a:fontRef>
+        </p:style>
+        <p:txBody>
+          <a:bodyPr rtlCol="0" anchor="ctr"/>
+          <a:lstStyle/>
+          <a:p>
+            <a:pPr algn="ctr"/>
+          </a:p>
+        </p:txBody>
+      </p:sp>
+      <p:sp>
+        <p:nvSpPr>
+          <p:cNvPr id="18" name="TextBox 17"/>
+          <p:cNvSpPr txBox="1"/>
+          <p:nvPr/>
+        </p:nvSpPr>
+        <p:spPr>
+          <a:xfrm>
+            <a:off x="9372600" y="1417320"/>
+            <a:ext cx="2514600" cy="841248"/>
+          </a:xfrm>
+          <a:prstGeom prst="rect">
+            <a:avLst/>
+          </a:prstGeom>
+          <a:noFill/>
+        </p:spPr>
+        <p:txBody>
+          <a:bodyPr wrap="square">
+            <a:spAutoFit/>
+          </a:bodyPr>
+          <a:lstStyle/>
+          <a:p>
+            <a:pPr algn="ctr"/>
+            <a:r>
+              <a:rPr sz="3400" b="1">
+                <a:solidFill>
+                  <a:srgbClr val="C8F000"/>
+                </a:solidFill>
+                <a:latin typeface="Calibri"/>
+              </a:rPr>
+              <a:t>$500M+</a:t>
+            </a:r>
+          </a:p>
+        </p:txBody>
+      </p:sp>
+      <p:sp>
+        <p:nvSpPr>
+          <p:cNvPr id="19" name="TextBox 18"/>
+          <p:cNvSpPr txBox="1"/>
+          <p:nvPr/>
+        </p:nvSpPr>
+        <p:spPr>
+          <a:xfrm>
+            <a:off x="9372600" y="2267712"/>
+            <a:ext cx="2514600" cy="731520"/>
+          </a:xfrm>
+          <a:prstGeom prst="rect">
+            <a:avLst/>
+          </a:prstGeom>
+          <a:noFill/>
+        </p:spPr>
+        <p:txBody>
+          <a:bodyPr wrap="square">
+            <a:spAutoFit/>
+          </a:bodyPr>
+          <a:lstStyle/>
+          <a:p>
+            <a:pPr algn="ctr"/>
+            <a:r>
+              <a:rPr sz="1100" b="0">
+                <a:solidFill>
+                  <a:srgbClr val="FFFFFF"/>
+                </a:solidFill>
+                <a:latin typeface="Calibri"/>
+              </a:rPr>
+              <a:t>GXS deposit
+growth potential</a:t>
+            </a:r>
+          </a:p>
+        </p:txBody>
+      </p:sp>
+      <p:sp>
+        <p:nvSpPr>
+          <p:cNvPr id="20" name="Rectangle 19"/>
+          <p:cNvSpPr/>
+          <p:nvPr/>
+        </p:nvSpPr>
+        <p:spPr>
+          <a:xfrm>
+            <a:off x="502920" y="3429000"/>
+            <a:ext cx="5577840" cy="2926080"/>
+          </a:xfrm>
+          <a:prstGeom prst="rect">
+            <a:avLst/>
+          </a:prstGeom>
+          <a:solidFill>
+            <a:srgbClr val="F4F4F4"/>
+          </a:solidFill>
+          <a:ln>
+            <a:noFill/>
+          </a:ln>
+        </p:spPr>
+        <p:style>
+          <a:lnRef idx="1">
+            <a:schemeClr val="accent1"/>
+          </a:lnRef>
+          <a:fillRef idx="3">
+            <a:schemeClr val="accent1"/>
+          </a:fillRef>
+          <a:effectRef idx="2">
+            <a:schemeClr val="accent1"/>
+          </a:effectRef>
+          <a:fontRef idx="minor">
+            <a:schemeClr val="lt1"/>
+          </a:fontRef>
+        </p:style>
+        <p:txBody>
+          <a:bodyPr rtlCol="0" anchor="ctr"/>
+          <a:lstStyle/>
+          <a:p>
+            <a:pPr algn="ctr"/>
+          </a:p>
+        </p:txBody>
+      </p:sp>
+      <p:sp>
+        <p:nvSpPr>
+          <p:cNvPr id="21" name="Rectangle 20"/>
+          <p:cNvSpPr/>
+          <p:nvPr/>
+        </p:nvSpPr>
+        <p:spPr>
+          <a:xfrm>
+            <a:off x="502920" y="3429000"/>
+            <a:ext cx="5577840" cy="73152"/>
           </a:xfrm>
           <a:prstGeom prst="rect">
             <a:avLst/>
@@ -8698,14 +8740,14 @@
       </p:sp>
       <p:sp>
         <p:nvSpPr>
-          <p:cNvPr id="9" name="TextBox 8"/>
+          <p:cNvPr id="22" name="TextBox 21"/>
           <p:cNvSpPr txBox="1"/>
           <p:nvPr/>
         </p:nvSpPr>
         <p:spPr>
           <a:xfrm>
-            <a:off x="502920" y="548640"/>
-            <a:ext cx="2468880" cy="256032"/>
+            <a:off x="685800" y="3547872"/>
+            <a:ext cx="5212080" cy="384048"/>
           </a:xfrm>
           <a:prstGeom prst="rect">
             <a:avLst/>
@@ -8720,27 +8762,27 @@
           <a:p>
             <a:pPr algn="l"/>
             <a:r>
-              <a:rPr sz="900" b="1">
-                <a:solidFill>
-                  <a:srgbClr val="FFFFFF"/>
+              <a:rPr sz="1400" b="1">
+                <a:solidFill>
+                  <a:srgbClr val="006E5E"/>
                 </a:solidFill>
                 <a:latin typeface="Calibri"/>
               </a:rPr>
-              <a:t>IMPACT &amp; VALUE PROPOSITION</a:t>
-            </a:r>
-          </a:p>
-        </p:txBody>
-      </p:sp>
-      <p:sp>
-        <p:nvSpPr>
-          <p:cNvPr id="10" name="TextBox 9"/>
+              <a:t>For Gig Workers</a:t>
+            </a:r>
+          </a:p>
+        </p:txBody>
+      </p:sp>
+      <p:sp>
+        <p:nvSpPr>
+          <p:cNvPr id="23" name="TextBox 22"/>
           <p:cNvSpPr txBox="1"/>
           <p:nvPr/>
         </p:nvSpPr>
         <p:spPr>
           <a:xfrm>
-            <a:off x="457200" y="960120"/>
-            <a:ext cx="8229600" cy="548640"/>
+            <a:off x="731520" y="4023360"/>
+            <a:ext cx="5166360" cy="502920"/>
           </a:xfrm>
           <a:prstGeom prst="rect">
             <a:avLst/>
@@ -8755,33 +8797,103 @@
           <a:p>
             <a:pPr algn="l"/>
             <a:r>
-              <a:rPr sz="2800" b="1">
-                <a:solidFill>
-                  <a:srgbClr val="006E5E"/>
+              <a:rPr sz="1100" b="0">
+                <a:solidFill>
+                  <a:srgbClr val="1A1A1A"/>
                 </a:solidFill>
                 <a:latin typeface="Calibri"/>
               </a:rPr>
-              <a:t>Why It Matters</a:t>
-            </a:r>
-          </a:p>
-        </p:txBody>
-      </p:sp>
-      <p:sp>
-        <p:nvSpPr>
-          <p:cNvPr id="11" name="Rectangle 10"/>
+              <a:t>•  Build financial resilience with zero friction</a:t>
+            </a:r>
+          </a:p>
+        </p:txBody>
+      </p:sp>
+      <p:sp>
+        <p:nvSpPr>
+          <p:cNvPr id="24" name="TextBox 23"/>
+          <p:cNvSpPr txBox="1"/>
+          <p:nvPr/>
+        </p:nvSpPr>
+        <p:spPr>
+          <a:xfrm>
+            <a:off x="731520" y="4663440"/>
+            <a:ext cx="5166360" cy="502920"/>
+          </a:xfrm>
+          <a:prstGeom prst="rect">
+            <a:avLst/>
+          </a:prstGeom>
+          <a:noFill/>
+        </p:spPr>
+        <p:txBody>
+          <a:bodyPr wrap="square">
+            <a:spAutoFit/>
+          </a:bodyPr>
+          <a:lstStyle/>
+          <a:p>
+            <a:pPr algn="l"/>
+            <a:r>
+              <a:rPr sz="1100" b="0">
+                <a:solidFill>
+                  <a:srgbClr val="1A1A1A"/>
+                </a:solidFill>
+                <a:latin typeface="Calibri"/>
+              </a:rPr>
+              <a:t>•  Personalised savings plans aligned to income cycles</a:t>
+            </a:r>
+          </a:p>
+        </p:txBody>
+      </p:sp>
+      <p:sp>
+        <p:nvSpPr>
+          <p:cNvPr id="25" name="TextBox 24"/>
+          <p:cNvSpPr txBox="1"/>
+          <p:nvPr/>
+        </p:nvSpPr>
+        <p:spPr>
+          <a:xfrm>
+            <a:off x="731520" y="5303520"/>
+            <a:ext cx="5166360" cy="502920"/>
+          </a:xfrm>
+          <a:prstGeom prst="rect">
+            <a:avLst/>
+          </a:prstGeom>
+          <a:noFill/>
+        </p:spPr>
+        <p:txBody>
+          <a:bodyPr wrap="square">
+            <a:spAutoFit/>
+          </a:bodyPr>
+          <a:lstStyle/>
+          <a:p>
+            <a:pPr algn="l"/>
+            <a:r>
+              <a:rPr sz="1100" b="0">
+                <a:solidFill>
+                  <a:srgbClr val="1A1A1A"/>
+                </a:solidFill>
+                <a:latin typeface="Calibri"/>
+              </a:rPr>
+              <a:t>•  Access to GXS high-yield savings accounts</a:t>
+            </a:r>
+          </a:p>
+        </p:txBody>
+      </p:sp>
+      <p:sp>
+        <p:nvSpPr>
+          <p:cNvPr id="26" name="Rectangle 25"/>
           <p:cNvSpPr/>
           <p:nvPr/>
         </p:nvSpPr>
         <p:spPr>
           <a:xfrm>
-            <a:off x="457200" y="1554480"/>
-            <a:ext cx="11247120" cy="45720"/>
+            <a:off x="6400800" y="3429000"/>
+            <a:ext cx="5577840" cy="2926080"/>
           </a:xfrm>
           <a:prstGeom prst="rect">
             <a:avLst/>
           </a:prstGeom>
           <a:solidFill>
-            <a:srgbClr val="C8F000"/>
+            <a:srgbClr val="F4F4F4"/>
           </a:solidFill>
           <a:ln>
             <a:noFill/>
@@ -8811,513 +8923,14 @@
       </p:sp>
       <p:sp>
         <p:nvSpPr>
-          <p:cNvPr id="12" name="Rectangle 11"/>
+          <p:cNvPr id="27" name="Rectangle 26"/>
           <p:cNvSpPr/>
           <p:nvPr/>
         </p:nvSpPr>
         <p:spPr>
           <a:xfrm>
-            <a:off x="548640" y="1828800"/>
-            <a:ext cx="2606040" cy="1828800"/>
-          </a:xfrm>
-          <a:prstGeom prst="rect">
-            <a:avLst/>
-          </a:prstGeom>
-          <a:solidFill>
-            <a:srgbClr val="006E5E"/>
-          </a:solidFill>
-          <a:ln>
-            <a:noFill/>
-          </a:ln>
-        </p:spPr>
-        <p:style>
-          <a:lnRef idx="1">
-            <a:schemeClr val="accent1"/>
-          </a:lnRef>
-          <a:fillRef idx="3">
-            <a:schemeClr val="accent1"/>
-          </a:fillRef>
-          <a:effectRef idx="2">
-            <a:schemeClr val="accent1"/>
-          </a:effectRef>
-          <a:fontRef idx="minor">
-            <a:schemeClr val="lt1"/>
-          </a:fontRef>
-        </p:style>
-        <p:txBody>
-          <a:bodyPr rtlCol="0" anchor="ctr"/>
-          <a:lstStyle/>
-          <a:p>
-            <a:pPr algn="ctr"/>
-          </a:p>
-        </p:txBody>
-      </p:sp>
-      <p:sp>
-        <p:nvSpPr>
-          <p:cNvPr id="13" name="TextBox 12"/>
-          <p:cNvSpPr txBox="1"/>
-          <p:nvPr/>
-        </p:nvSpPr>
-        <p:spPr>
-          <a:xfrm>
-            <a:off x="640080" y="1965960"/>
-            <a:ext cx="2423160" cy="822960"/>
-          </a:xfrm>
-          <a:prstGeom prst="rect">
-            <a:avLst/>
-          </a:prstGeom>
-          <a:noFill/>
-        </p:spPr>
-        <p:txBody>
-          <a:bodyPr wrap="square">
-            <a:spAutoFit/>
-          </a:bodyPr>
-          <a:lstStyle/>
-          <a:p>
-            <a:pPr algn="ctr"/>
-            <a:r>
-              <a:rPr sz="3400" b="1">
-                <a:solidFill>
-                  <a:srgbClr val="C8F000"/>
-                </a:solidFill>
-                <a:latin typeface="Calibri"/>
-              </a:rPr>
-              <a:t>3M+</a:t>
-            </a:r>
-          </a:p>
-        </p:txBody>
-      </p:sp>
-      <p:sp>
-        <p:nvSpPr>
-          <p:cNvPr id="14" name="TextBox 13"/>
-          <p:cNvSpPr txBox="1"/>
-          <p:nvPr/>
-        </p:nvSpPr>
-        <p:spPr>
-          <a:xfrm>
-            <a:off x="640080" y="2788920"/>
-            <a:ext cx="2423160" cy="731520"/>
-          </a:xfrm>
-          <a:prstGeom prst="rect">
-            <a:avLst/>
-          </a:prstGeom>
-          <a:noFill/>
-        </p:spPr>
-        <p:txBody>
-          <a:bodyPr wrap="square">
-            <a:spAutoFit/>
-          </a:bodyPr>
-          <a:lstStyle/>
-          <a:p>
-            <a:pPr algn="ctr"/>
-            <a:r>
-              <a:rPr sz="1100" b="0">
-                <a:solidFill>
-                  <a:srgbClr val="FFFFFF"/>
-                </a:solidFill>
-                <a:latin typeface="Calibri"/>
-              </a:rPr>
-              <a:t>Grab gig workers
-across SEA</a:t>
-            </a:r>
-          </a:p>
-        </p:txBody>
-      </p:sp>
-      <p:sp>
-        <p:nvSpPr>
-          <p:cNvPr id="15" name="Rectangle 14"/>
-          <p:cNvSpPr/>
-          <p:nvPr/>
-        </p:nvSpPr>
-        <p:spPr>
-          <a:xfrm>
-            <a:off x="3456432" y="1828800"/>
-            <a:ext cx="2606040" cy="1828800"/>
-          </a:xfrm>
-          <a:prstGeom prst="rect">
-            <a:avLst/>
-          </a:prstGeom>
-          <a:solidFill>
-            <a:srgbClr val="006E5E"/>
-          </a:solidFill>
-          <a:ln>
-            <a:noFill/>
-          </a:ln>
-        </p:spPr>
-        <p:style>
-          <a:lnRef idx="1">
-            <a:schemeClr val="accent1"/>
-          </a:lnRef>
-          <a:fillRef idx="3">
-            <a:schemeClr val="accent1"/>
-          </a:fillRef>
-          <a:effectRef idx="2">
-            <a:schemeClr val="accent1"/>
-          </a:effectRef>
-          <a:fontRef idx="minor">
-            <a:schemeClr val="lt1"/>
-          </a:fontRef>
-        </p:style>
-        <p:txBody>
-          <a:bodyPr rtlCol="0" anchor="ctr"/>
-          <a:lstStyle/>
-          <a:p>
-            <a:pPr algn="ctr"/>
-          </a:p>
-        </p:txBody>
-      </p:sp>
-      <p:sp>
-        <p:nvSpPr>
-          <p:cNvPr id="16" name="TextBox 15"/>
-          <p:cNvSpPr txBox="1"/>
-          <p:nvPr/>
-        </p:nvSpPr>
-        <p:spPr>
-          <a:xfrm>
-            <a:off x="3547872" y="1965960"/>
-            <a:ext cx="2423160" cy="822960"/>
-          </a:xfrm>
-          <a:prstGeom prst="rect">
-            <a:avLst/>
-          </a:prstGeom>
-          <a:noFill/>
-        </p:spPr>
-        <p:txBody>
-          <a:bodyPr wrap="square">
-            <a:spAutoFit/>
-          </a:bodyPr>
-          <a:lstStyle/>
-          <a:p>
-            <a:pPr algn="ctr"/>
-            <a:r>
-              <a:rPr sz="3400" b="1">
-                <a:solidFill>
-                  <a:srgbClr val="C8F000"/>
-                </a:solidFill>
-                <a:latin typeface="Calibri"/>
-              </a:rPr>
-              <a:t>40%</a:t>
-            </a:r>
-          </a:p>
-        </p:txBody>
-      </p:sp>
-      <p:sp>
-        <p:nvSpPr>
-          <p:cNvPr id="17" name="TextBox 16"/>
-          <p:cNvSpPr txBox="1"/>
-          <p:nvPr/>
-        </p:nvSpPr>
-        <p:spPr>
-          <a:xfrm>
-            <a:off x="3547872" y="2788920"/>
-            <a:ext cx="2423160" cy="731520"/>
-          </a:xfrm>
-          <a:prstGeom prst="rect">
-            <a:avLst/>
-          </a:prstGeom>
-          <a:noFill/>
-        </p:spPr>
-        <p:txBody>
-          <a:bodyPr wrap="square">
-            <a:spAutoFit/>
-          </a:bodyPr>
-          <a:lstStyle/>
-          <a:p>
-            <a:pPr algn="ctr"/>
-            <a:r>
-              <a:rPr sz="1100" b="0">
-                <a:solidFill>
-                  <a:srgbClr val="FFFFFF"/>
-                </a:solidFill>
-                <a:latin typeface="Calibri"/>
-              </a:rPr>
-              <a:t>Average income
-volatility for gig workers</a:t>
-            </a:r>
-          </a:p>
-        </p:txBody>
-      </p:sp>
-      <p:sp>
-        <p:nvSpPr>
-          <p:cNvPr id="18" name="Rectangle 17"/>
-          <p:cNvSpPr/>
-          <p:nvPr/>
-        </p:nvSpPr>
-        <p:spPr>
-          <a:xfrm>
-            <a:off x="6364224" y="1828800"/>
-            <a:ext cx="2606040" cy="1828800"/>
-          </a:xfrm>
-          <a:prstGeom prst="rect">
-            <a:avLst/>
-          </a:prstGeom>
-          <a:solidFill>
-            <a:srgbClr val="006E5E"/>
-          </a:solidFill>
-          <a:ln>
-            <a:noFill/>
-          </a:ln>
-        </p:spPr>
-        <p:style>
-          <a:lnRef idx="1">
-            <a:schemeClr val="accent1"/>
-          </a:lnRef>
-          <a:fillRef idx="3">
-            <a:schemeClr val="accent1"/>
-          </a:fillRef>
-          <a:effectRef idx="2">
-            <a:schemeClr val="accent1"/>
-          </a:effectRef>
-          <a:fontRef idx="minor">
-            <a:schemeClr val="lt1"/>
-          </a:fontRef>
-        </p:style>
-        <p:txBody>
-          <a:bodyPr rtlCol="0" anchor="ctr"/>
-          <a:lstStyle/>
-          <a:p>
-            <a:pPr algn="ctr"/>
-          </a:p>
-        </p:txBody>
-      </p:sp>
-      <p:sp>
-        <p:nvSpPr>
-          <p:cNvPr id="19" name="TextBox 18"/>
-          <p:cNvSpPr txBox="1"/>
-          <p:nvPr/>
-        </p:nvSpPr>
-        <p:spPr>
-          <a:xfrm>
-            <a:off x="6455664" y="1965960"/>
-            <a:ext cx="2423160" cy="822960"/>
-          </a:xfrm>
-          <a:prstGeom prst="rect">
-            <a:avLst/>
-          </a:prstGeom>
-          <a:noFill/>
-        </p:spPr>
-        <p:txBody>
-          <a:bodyPr wrap="square">
-            <a:spAutoFit/>
-          </a:bodyPr>
-          <a:lstStyle/>
-          <a:p>
-            <a:pPr algn="ctr"/>
-            <a:r>
-              <a:rPr sz="3400" b="1">
-                <a:solidFill>
-                  <a:srgbClr val="C8F000"/>
-                </a:solidFill>
-                <a:latin typeface="Calibri"/>
-              </a:rPr>
-              <a:t>8x</a:t>
-            </a:r>
-          </a:p>
-        </p:txBody>
-      </p:sp>
-      <p:sp>
-        <p:nvSpPr>
-          <p:cNvPr id="20" name="TextBox 19"/>
-          <p:cNvSpPr txBox="1"/>
-          <p:nvPr/>
-        </p:nvSpPr>
-        <p:spPr>
-          <a:xfrm>
-            <a:off x="6455664" y="2788920"/>
-            <a:ext cx="2423160" cy="731520"/>
-          </a:xfrm>
-          <a:prstGeom prst="rect">
-            <a:avLst/>
-          </a:prstGeom>
-          <a:noFill/>
-        </p:spPr>
-        <p:txBody>
-          <a:bodyPr wrap="square">
-            <a:spAutoFit/>
-          </a:bodyPr>
-          <a:lstStyle/>
-          <a:p>
-            <a:pPr algn="ctr"/>
-            <a:r>
-              <a:rPr sz="1100" b="0">
-                <a:solidFill>
-                  <a:srgbClr val="FFFFFF"/>
-                </a:solidFill>
-                <a:latin typeface="Calibri"/>
-              </a:rPr>
-              <a:t>Higher savings rate
-with AI nudging (research)</a:t>
-            </a:r>
-          </a:p>
-        </p:txBody>
-      </p:sp>
-      <p:sp>
-        <p:nvSpPr>
-          <p:cNvPr id="21" name="Rectangle 20"/>
-          <p:cNvSpPr/>
-          <p:nvPr/>
-        </p:nvSpPr>
-        <p:spPr>
-          <a:xfrm>
-            <a:off x="9272016" y="1828800"/>
-            <a:ext cx="2606040" cy="1828800"/>
-          </a:xfrm>
-          <a:prstGeom prst="rect">
-            <a:avLst/>
-          </a:prstGeom>
-          <a:solidFill>
-            <a:srgbClr val="006E5E"/>
-          </a:solidFill>
-          <a:ln>
-            <a:noFill/>
-          </a:ln>
-        </p:spPr>
-        <p:style>
-          <a:lnRef idx="1">
-            <a:schemeClr val="accent1"/>
-          </a:lnRef>
-          <a:fillRef idx="3">
-            <a:schemeClr val="accent1"/>
-          </a:fillRef>
-          <a:effectRef idx="2">
-            <a:schemeClr val="accent1"/>
-          </a:effectRef>
-          <a:fontRef idx="minor">
-            <a:schemeClr val="lt1"/>
-          </a:fontRef>
-        </p:style>
-        <p:txBody>
-          <a:bodyPr rtlCol="0" anchor="ctr"/>
-          <a:lstStyle/>
-          <a:p>
-            <a:pPr algn="ctr"/>
-          </a:p>
-        </p:txBody>
-      </p:sp>
-      <p:sp>
-        <p:nvSpPr>
-          <p:cNvPr id="22" name="TextBox 21"/>
-          <p:cNvSpPr txBox="1"/>
-          <p:nvPr/>
-        </p:nvSpPr>
-        <p:spPr>
-          <a:xfrm>
-            <a:off x="9363456" y="1965960"/>
-            <a:ext cx="2423160" cy="822960"/>
-          </a:xfrm>
-          <a:prstGeom prst="rect">
-            <a:avLst/>
-          </a:prstGeom>
-          <a:noFill/>
-        </p:spPr>
-        <p:txBody>
-          <a:bodyPr wrap="square">
-            <a:spAutoFit/>
-          </a:bodyPr>
-          <a:lstStyle/>
-          <a:p>
-            <a:pPr algn="ctr"/>
-            <a:r>
-              <a:rPr sz="3400" b="1">
-                <a:solidFill>
-                  <a:srgbClr val="C8F000"/>
-                </a:solidFill>
-                <a:latin typeface="Calibri"/>
-              </a:rPr>
-              <a:t>$500M+</a:t>
-            </a:r>
-          </a:p>
-        </p:txBody>
-      </p:sp>
-      <p:sp>
-        <p:nvSpPr>
-          <p:cNvPr id="23" name="TextBox 22"/>
-          <p:cNvSpPr txBox="1"/>
-          <p:nvPr/>
-        </p:nvSpPr>
-        <p:spPr>
-          <a:xfrm>
-            <a:off x="9363456" y="2788920"/>
-            <a:ext cx="2423160" cy="731520"/>
-          </a:xfrm>
-          <a:prstGeom prst="rect">
-            <a:avLst/>
-          </a:prstGeom>
-          <a:noFill/>
-        </p:spPr>
-        <p:txBody>
-          <a:bodyPr wrap="square">
-            <a:spAutoFit/>
-          </a:bodyPr>
-          <a:lstStyle/>
-          <a:p>
-            <a:pPr algn="ctr"/>
-            <a:r>
-              <a:rPr sz="1100" b="0">
-                <a:solidFill>
-                  <a:srgbClr val="FFFFFF"/>
-                </a:solidFill>
-                <a:latin typeface="Calibri"/>
-              </a:rPr>
-              <a:t>Potential GXS
-deposit growth</a:t>
-            </a:r>
-          </a:p>
-        </p:txBody>
-      </p:sp>
-      <p:sp>
-        <p:nvSpPr>
-          <p:cNvPr id="24" name="Rectangle 23"/>
-          <p:cNvSpPr/>
-          <p:nvPr/>
-        </p:nvSpPr>
-        <p:spPr>
-          <a:xfrm>
-            <a:off x="548640" y="3931920"/>
-            <a:ext cx="5486400" cy="2331720"/>
-          </a:xfrm>
-          <a:prstGeom prst="rect">
-            <a:avLst/>
-          </a:prstGeom>
-          <a:solidFill>
-            <a:srgbClr val="F5F5F5"/>
-          </a:solidFill>
-          <a:ln>
-            <a:noFill/>
-          </a:ln>
-        </p:spPr>
-        <p:style>
-          <a:lnRef idx="1">
-            <a:schemeClr val="accent1"/>
-          </a:lnRef>
-          <a:fillRef idx="3">
-            <a:schemeClr val="accent1"/>
-          </a:fillRef>
-          <a:effectRef idx="2">
-            <a:schemeClr val="accent1"/>
-          </a:effectRef>
-          <a:fontRef idx="minor">
-            <a:schemeClr val="lt1"/>
-          </a:fontRef>
-        </p:style>
-        <p:txBody>
-          <a:bodyPr rtlCol="0" anchor="ctr"/>
-          <a:lstStyle/>
-          <a:p>
-            <a:pPr algn="ctr"/>
-          </a:p>
-        </p:txBody>
-      </p:sp>
-      <p:sp>
-        <p:nvSpPr>
-          <p:cNvPr id="25" name="Rectangle 24"/>
-          <p:cNvSpPr/>
-          <p:nvPr/>
-        </p:nvSpPr>
-        <p:spPr>
-          <a:xfrm>
-            <a:off x="548640" y="3931920"/>
-            <a:ext cx="5486400" cy="73152"/>
+            <a:off x="6400800" y="3429000"/>
+            <a:ext cx="5577840" cy="73152"/>
           </a:xfrm>
           <a:prstGeom prst="rect">
             <a:avLst/>
@@ -9353,14 +8966,14 @@
       </p:sp>
       <p:sp>
         <p:nvSpPr>
-          <p:cNvPr id="26" name="TextBox 25"/>
+          <p:cNvPr id="28" name="TextBox 27"/>
           <p:cNvSpPr txBox="1"/>
           <p:nvPr/>
         </p:nvSpPr>
         <p:spPr>
           <a:xfrm>
-            <a:off x="731520" y="4041648"/>
-            <a:ext cx="5029200" cy="365760"/>
+            <a:off x="6583680" y="3547872"/>
+            <a:ext cx="5212080" cy="384048"/>
           </a:xfrm>
           <a:prstGeom prst="rect">
             <a:avLst/>
@@ -9381,21 +8994,21 @@
                 </a:solidFill>
                 <a:latin typeface="Calibri"/>
               </a:rPr>
-              <a:t>For Gig Workers</a:t>
-            </a:r>
-          </a:p>
-        </p:txBody>
-      </p:sp>
-      <p:sp>
-        <p:nvSpPr>
-          <p:cNvPr id="27" name="TextBox 26"/>
+              <a:t>For Grab / GxS</a:t>
+            </a:r>
+          </a:p>
+        </p:txBody>
+      </p:sp>
+      <p:sp>
+        <p:nvSpPr>
+          <p:cNvPr id="29" name="TextBox 28"/>
           <p:cNvSpPr txBox="1"/>
           <p:nvPr/>
         </p:nvSpPr>
         <p:spPr>
           <a:xfrm>
-            <a:off x="777240" y="4498848"/>
-            <a:ext cx="5029200" cy="411480"/>
+            <a:off x="6629400" y="4023360"/>
+            <a:ext cx="5166360" cy="502920"/>
           </a:xfrm>
           <a:prstGeom prst="rect">
             <a:avLst/>
@@ -9416,21 +9029,21 @@
                 </a:solidFill>
                 <a:latin typeface="Calibri"/>
               </a:rPr>
-              <a:t>•  Build financial resilience with zero friction</a:t>
-            </a:r>
-          </a:p>
-        </p:txBody>
-      </p:sp>
-      <p:sp>
-        <p:nvSpPr>
-          <p:cNvPr id="28" name="TextBox 27"/>
+              <a:t>•  Increase GXS deposit book &amp; ARPU</a:t>
+            </a:r>
+          </a:p>
+        </p:txBody>
+      </p:sp>
+      <p:sp>
+        <p:nvSpPr>
+          <p:cNvPr id="30" name="TextBox 29"/>
           <p:cNvSpPr txBox="1"/>
           <p:nvPr/>
         </p:nvSpPr>
         <p:spPr>
           <a:xfrm>
-            <a:off x="777240" y="5001768"/>
-            <a:ext cx="5029200" cy="411480"/>
+            <a:off x="6629400" y="4663440"/>
+            <a:ext cx="5166360" cy="502920"/>
           </a:xfrm>
           <a:prstGeom prst="rect">
             <a:avLst/>
@@ -9451,21 +9064,21 @@
                 </a:solidFill>
                 <a:latin typeface="Calibri"/>
               </a:rPr>
-              <a:t>•  Personalised savings plans aligned to income cycles</a:t>
-            </a:r>
-          </a:p>
-        </p:txBody>
-      </p:sp>
-      <p:sp>
-        <p:nvSpPr>
-          <p:cNvPr id="29" name="TextBox 28"/>
+              <a:t>•  Deepen platform stickiness &amp; worker loyalty</a:t>
+            </a:r>
+          </a:p>
+        </p:txBody>
+      </p:sp>
+      <p:sp>
+        <p:nvSpPr>
+          <p:cNvPr id="31" name="TextBox 30"/>
           <p:cNvSpPr txBox="1"/>
           <p:nvPr/>
         </p:nvSpPr>
         <p:spPr>
           <a:xfrm>
-            <a:off x="777240" y="5504688"/>
-            <a:ext cx="5029200" cy="411480"/>
+            <a:off x="6629400" y="5303520"/>
+            <a:ext cx="5166360" cy="502920"/>
           </a:xfrm>
           <a:prstGeom prst="rect">
             <a:avLst/>
@@ -9486,233 +9099,7 @@
                 </a:solidFill>
                 <a:latin typeface="Calibri"/>
               </a:rPr>
-              <a:t>•  Access to GXS high-yield savings accounts</a:t>
-            </a:r>
-          </a:p>
-        </p:txBody>
-      </p:sp>
-      <p:sp>
-        <p:nvSpPr>
-          <p:cNvPr id="30" name="Rectangle 29"/>
-          <p:cNvSpPr/>
-          <p:nvPr/>
-        </p:nvSpPr>
-        <p:spPr>
-          <a:xfrm>
-            <a:off x="6400800" y="3931920"/>
-            <a:ext cx="5486400" cy="2331720"/>
-          </a:xfrm>
-          <a:prstGeom prst="rect">
-            <a:avLst/>
-          </a:prstGeom>
-          <a:solidFill>
-            <a:srgbClr val="F5F5F5"/>
-          </a:solidFill>
-          <a:ln>
-            <a:noFill/>
-          </a:ln>
-        </p:spPr>
-        <p:style>
-          <a:lnRef idx="1">
-            <a:schemeClr val="accent1"/>
-          </a:lnRef>
-          <a:fillRef idx="3">
-            <a:schemeClr val="accent1"/>
-          </a:fillRef>
-          <a:effectRef idx="2">
-            <a:schemeClr val="accent1"/>
-          </a:effectRef>
-          <a:fontRef idx="minor">
-            <a:schemeClr val="lt1"/>
-          </a:fontRef>
-        </p:style>
-        <p:txBody>
-          <a:bodyPr rtlCol="0" anchor="ctr"/>
-          <a:lstStyle/>
-          <a:p>
-            <a:pPr algn="ctr"/>
-          </a:p>
-        </p:txBody>
-      </p:sp>
-      <p:sp>
-        <p:nvSpPr>
-          <p:cNvPr id="31" name="Rectangle 30"/>
-          <p:cNvSpPr/>
-          <p:nvPr/>
-        </p:nvSpPr>
-        <p:spPr>
-          <a:xfrm>
-            <a:off x="6400800" y="3931920"/>
-            <a:ext cx="5486400" cy="73152"/>
-          </a:xfrm>
-          <a:prstGeom prst="rect">
-            <a:avLst/>
-          </a:prstGeom>
-          <a:solidFill>
-            <a:srgbClr val="00A89C"/>
-          </a:solidFill>
-          <a:ln>
-            <a:noFill/>
-          </a:ln>
-        </p:spPr>
-        <p:style>
-          <a:lnRef idx="1">
-            <a:schemeClr val="accent1"/>
-          </a:lnRef>
-          <a:fillRef idx="3">
-            <a:schemeClr val="accent1"/>
-          </a:fillRef>
-          <a:effectRef idx="2">
-            <a:schemeClr val="accent1"/>
-          </a:effectRef>
-          <a:fontRef idx="minor">
-            <a:schemeClr val="lt1"/>
-          </a:fontRef>
-        </p:style>
-        <p:txBody>
-          <a:bodyPr rtlCol="0" anchor="ctr"/>
-          <a:lstStyle/>
-          <a:p>
-            <a:pPr algn="ctr"/>
-          </a:p>
-        </p:txBody>
-      </p:sp>
-      <p:sp>
-        <p:nvSpPr>
-          <p:cNvPr id="32" name="TextBox 31"/>
-          <p:cNvSpPr txBox="1"/>
-          <p:nvPr/>
-        </p:nvSpPr>
-        <p:spPr>
-          <a:xfrm>
-            <a:off x="6583680" y="4041648"/>
-            <a:ext cx="5029200" cy="365760"/>
-          </a:xfrm>
-          <a:prstGeom prst="rect">
-            <a:avLst/>
-          </a:prstGeom>
-          <a:noFill/>
-        </p:spPr>
-        <p:txBody>
-          <a:bodyPr wrap="square">
-            <a:spAutoFit/>
-          </a:bodyPr>
-          <a:lstStyle/>
-          <a:p>
-            <a:pPr algn="l"/>
-            <a:r>
-              <a:rPr sz="1400" b="1">
-                <a:solidFill>
-                  <a:srgbClr val="006E5E"/>
-                </a:solidFill>
-                <a:latin typeface="Calibri"/>
-              </a:rPr>
-              <a:t>For Grab / GxS</a:t>
-            </a:r>
-          </a:p>
-        </p:txBody>
-      </p:sp>
-      <p:sp>
-        <p:nvSpPr>
-          <p:cNvPr id="33" name="TextBox 32"/>
-          <p:cNvSpPr txBox="1"/>
-          <p:nvPr/>
-        </p:nvSpPr>
-        <p:spPr>
-          <a:xfrm>
-            <a:off x="6629400" y="4498848"/>
-            <a:ext cx="5029200" cy="411480"/>
-          </a:xfrm>
-          <a:prstGeom prst="rect">
-            <a:avLst/>
-          </a:prstGeom>
-          <a:noFill/>
-        </p:spPr>
-        <p:txBody>
-          <a:bodyPr wrap="square">
-            <a:spAutoFit/>
-          </a:bodyPr>
-          <a:lstStyle/>
-          <a:p>
-            <a:pPr algn="l"/>
-            <a:r>
-              <a:rPr sz="1100" b="0">
-                <a:solidFill>
-                  <a:srgbClr val="1A1A1A"/>
-                </a:solidFill>
-                <a:latin typeface="Calibri"/>
-              </a:rPr>
-              <a:t>•  Increase GXS deposit book &amp; ARPU</a:t>
-            </a:r>
-          </a:p>
-        </p:txBody>
-      </p:sp>
-      <p:sp>
-        <p:nvSpPr>
-          <p:cNvPr id="34" name="TextBox 33"/>
-          <p:cNvSpPr txBox="1"/>
-          <p:nvPr/>
-        </p:nvSpPr>
-        <p:spPr>
-          <a:xfrm>
-            <a:off x="6629400" y="5001768"/>
-            <a:ext cx="5029200" cy="411480"/>
-          </a:xfrm>
-          <a:prstGeom prst="rect">
-            <a:avLst/>
-          </a:prstGeom>
-          <a:noFill/>
-        </p:spPr>
-        <p:txBody>
-          <a:bodyPr wrap="square">
-            <a:spAutoFit/>
-          </a:bodyPr>
-          <a:lstStyle/>
-          <a:p>
-            <a:pPr algn="l"/>
-            <a:r>
-              <a:rPr sz="1100" b="0">
-                <a:solidFill>
-                  <a:srgbClr val="1A1A1A"/>
-                </a:solidFill>
-                <a:latin typeface="Calibri"/>
-              </a:rPr>
-              <a:t>•  Deepen platform stickiness &amp; worker loyalty</a:t>
-            </a:r>
-          </a:p>
-        </p:txBody>
-      </p:sp>
-      <p:sp>
-        <p:nvSpPr>
-          <p:cNvPr id="35" name="TextBox 34"/>
-          <p:cNvSpPr txBox="1"/>
-          <p:nvPr/>
-        </p:nvSpPr>
-        <p:spPr>
-          <a:xfrm>
-            <a:off x="6629400" y="5504688"/>
-            <a:ext cx="5029200" cy="411480"/>
-          </a:xfrm>
-          <a:prstGeom prst="rect">
-            <a:avLst/>
-          </a:prstGeom>
-          <a:noFill/>
-        </p:spPr>
-        <p:txBody>
-          <a:bodyPr wrap="square">
-            <a:spAutoFit/>
-          </a:bodyPr>
-          <a:lstStyle/>
-          <a:p>
-            <a:pPr algn="l"/>
-            <a:r>
-              <a:rPr sz="1100" b="0">
-                <a:solidFill>
-                  <a:srgbClr val="1A1A1A"/>
-                </a:solidFill>
-                <a:latin typeface="Calibri"/>
-              </a:rPr>
-              <a:t>•  ESG impact: financial inclusion for underserved segment</a:t>
+              <a:t>•  ESG impact: financial inclusion for the underserved</a:t>
             </a:r>
           </a:p>
         </p:txBody>
@@ -9780,57 +9167,93 @@
       </p:sp>
       <p:sp>
         <p:nvSpPr>
-          <p:cNvPr id="3" name="Rectangle 2"/>
+          <p:cNvPr id="3" name="TextBox 2"/>
+          <p:cNvSpPr txBox="1"/>
+          <p:nvPr/>
+        </p:nvSpPr>
+        <p:spPr>
+          <a:xfrm>
+            <a:off x="164592" y="91440"/>
+            <a:ext cx="1280160" cy="347472"/>
+          </a:xfrm>
+          <a:prstGeom prst="rect">
+            <a:avLst/>
+          </a:prstGeom>
+          <a:noFill/>
+        </p:spPr>
+        <p:txBody>
+          <a:bodyPr wrap="square">
+            <a:spAutoFit/>
+          </a:bodyPr>
+          <a:lstStyle/>
+          <a:p>
+            <a:pPr algn="l"/>
+            <a:r>
+              <a:rPr sz="1800" b="1">
+                <a:solidFill>
+                  <a:srgbClr val="00B14F"/>
+                </a:solidFill>
+                <a:latin typeface="Calibri"/>
+              </a:rPr>
+              <a:t>Grab</a:t>
+            </a:r>
+          </a:p>
+        </p:txBody>
+      </p:sp>
+      <p:sp>
+        <p:nvSpPr>
+          <p:cNvPr id="4" name="TextBox 3"/>
+          <p:cNvSpPr txBox="1"/>
+          <p:nvPr/>
+        </p:nvSpPr>
+        <p:spPr>
+          <a:xfrm>
+            <a:off x="9326880" y="91440"/>
+            <a:ext cx="2743200" cy="347472"/>
+          </a:xfrm>
+          <a:prstGeom prst="rect">
+            <a:avLst/>
+          </a:prstGeom>
+          <a:noFill/>
+        </p:spPr>
+        <p:txBody>
+          <a:bodyPr wrap="square">
+            <a:spAutoFit/>
+          </a:bodyPr>
+          <a:lstStyle/>
+          <a:p>
+            <a:pPr algn="r"/>
+            <a:r>
+              <a:rPr sz="1600" b="1">
+                <a:solidFill>
+                  <a:srgbClr val="006E5E"/>
+                </a:solidFill>
+                <a:latin typeface="Calibri"/>
+              </a:rPr>
+              <a:t>GrabHack</a:t>
+            </a:r>
+            <a:r>
+              <a:rPr sz="1100" b="0">
+                <a:solidFill>
+                  <a:srgbClr val="006E5E"/>
+                </a:solidFill>
+                <a:latin typeface="Calibri"/>
+              </a:rPr>
+              <a:t>2.0</a:t>
+            </a:r>
+          </a:p>
+        </p:txBody>
+      </p:sp>
+      <p:sp>
+        <p:nvSpPr>
+          <p:cNvPr id="5" name="Rectangle 4"/>
           <p:cNvSpPr/>
           <p:nvPr/>
         </p:nvSpPr>
         <p:spPr>
           <a:xfrm>
-            <a:off x="0" y="0"/>
-            <a:ext cx="12188952" cy="411480"/>
-          </a:xfrm>
-          <a:prstGeom prst="rect">
-            <a:avLst/>
-          </a:prstGeom>
-          <a:solidFill>
-            <a:srgbClr val="FFFFFF"/>
-          </a:solidFill>
-          <a:ln>
-            <a:noFill/>
-          </a:ln>
-        </p:spPr>
-        <p:style>
-          <a:lnRef idx="1">
-            <a:schemeClr val="accent1"/>
-          </a:lnRef>
-          <a:fillRef idx="3">
-            <a:schemeClr val="accent1"/>
-          </a:fillRef>
-          <a:effectRef idx="2">
-            <a:schemeClr val="accent1"/>
-          </a:effectRef>
-          <a:fontRef idx="minor">
-            <a:schemeClr val="lt1"/>
-          </a:fontRef>
-        </p:style>
-        <p:txBody>
-          <a:bodyPr rtlCol="0" anchor="ctr"/>
-          <a:lstStyle/>
-          <a:p>
-            <a:pPr algn="ctr"/>
-          </a:p>
-        </p:txBody>
-      </p:sp>
-      <p:sp>
-        <p:nvSpPr>
-          <p:cNvPr id="4" name="Rectangle 3"/>
-          <p:cNvSpPr/>
-          <p:nvPr/>
-        </p:nvSpPr>
-        <p:spPr>
-          <a:xfrm>
-            <a:off x="0" y="393192"/>
-            <a:ext cx="12188952" cy="27432"/>
+            <a:off x="0" y="6656832"/>
+            <a:ext cx="12188952" cy="201168"/>
           </a:xfrm>
           <a:prstGeom prst="rect">
             <a:avLst/>
@@ -9866,14 +9289,14 @@
       </p:sp>
       <p:sp>
         <p:nvSpPr>
-          <p:cNvPr id="5" name="TextBox 4"/>
+          <p:cNvPr id="6" name="TextBox 5"/>
           <p:cNvSpPr txBox="1"/>
           <p:nvPr/>
         </p:nvSpPr>
         <p:spPr>
           <a:xfrm>
-            <a:off x="182880" y="45720"/>
-            <a:ext cx="1097280" cy="320040"/>
+            <a:off x="457200" y="548640"/>
+            <a:ext cx="8229600" cy="502920"/>
           </a:xfrm>
           <a:prstGeom prst="rect">
             <a:avLst/>
@@ -9888,48 +9311,13 @@
           <a:p>
             <a:pPr algn="l"/>
             <a:r>
-              <a:rPr sz="1600" b="1">
-                <a:solidFill>
-                  <a:srgbClr val="00B14F"/>
+              <a:rPr sz="2600" b="1">
+                <a:solidFill>
+                  <a:srgbClr val="006E5E"/>
                 </a:solidFill>
                 <a:latin typeface="Calibri"/>
               </a:rPr>
-              <a:t>Grab</a:t>
-            </a:r>
-          </a:p>
-        </p:txBody>
-      </p:sp>
-      <p:sp>
-        <p:nvSpPr>
-          <p:cNvPr id="6" name="TextBox 5"/>
-          <p:cNvSpPr txBox="1"/>
-          <p:nvPr/>
-        </p:nvSpPr>
-        <p:spPr>
-          <a:xfrm>
-            <a:off x="10515600" y="45720"/>
-            <a:ext cx="1554480" cy="320040"/>
-          </a:xfrm>
-          <a:prstGeom prst="rect">
-            <a:avLst/>
-          </a:prstGeom>
-          <a:noFill/>
-        </p:spPr>
-        <p:txBody>
-          <a:bodyPr wrap="square">
-            <a:spAutoFit/>
-          </a:bodyPr>
-          <a:lstStyle/>
-          <a:p>
-            <a:pPr algn="r"/>
-            <a:r>
-              <a:rPr sz="1300" b="1">
-                <a:solidFill>
-                  <a:srgbClr val="006E5E"/>
-                </a:solidFill>
-                <a:latin typeface="Calibri"/>
-              </a:rPr>
-              <a:t>GrabHack 2.0</a:t>
+              <a:t>Go-To-Market Roadmap</a:t>
             </a:r>
           </a:p>
         </p:txBody>
@@ -9942,8 +9330,8 @@
         </p:nvSpPr>
         <p:spPr>
           <a:xfrm>
-            <a:off x="0" y="6583680"/>
-            <a:ext cx="12188952" cy="274320"/>
+            <a:off x="457200" y="1115568"/>
+            <a:ext cx="11247120" cy="45720"/>
           </a:xfrm>
           <a:prstGeom prst="rect">
             <a:avLst/>
@@ -9985,14 +9373,14 @@
         </p:nvSpPr>
         <p:spPr>
           <a:xfrm>
-            <a:off x="457200" y="548640"/>
-            <a:ext cx="2560320" cy="256032"/>
+            <a:off x="502920" y="1325880"/>
+            <a:ext cx="3657600" cy="5074920"/>
           </a:xfrm>
           <a:prstGeom prst="rect">
             <a:avLst/>
           </a:prstGeom>
           <a:solidFill>
-            <a:srgbClr val="00A89C"/>
+            <a:srgbClr val="F4F4F4"/>
           </a:solidFill>
           <a:ln>
             <a:noFill/>
@@ -10022,170 +9410,14 @@
       </p:sp>
       <p:sp>
         <p:nvSpPr>
-          <p:cNvPr id="9" name="TextBox 8"/>
-          <p:cNvSpPr txBox="1"/>
-          <p:nvPr/>
-        </p:nvSpPr>
-        <p:spPr>
-          <a:xfrm>
-            <a:off x="502920" y="548640"/>
-            <a:ext cx="2468880" cy="256032"/>
-          </a:xfrm>
-          <a:prstGeom prst="rect">
-            <a:avLst/>
-          </a:prstGeom>
-          <a:noFill/>
-        </p:spPr>
-        <p:txBody>
-          <a:bodyPr wrap="square">
-            <a:spAutoFit/>
-          </a:bodyPr>
-          <a:lstStyle/>
-          <a:p>
-            <a:pPr algn="l"/>
-            <a:r>
-              <a:rPr sz="900" b="1">
-                <a:solidFill>
-                  <a:srgbClr val="FFFFFF"/>
-                </a:solidFill>
-                <a:latin typeface="Calibri"/>
-              </a:rPr>
-              <a:t>GO-TO-MARKET</a:t>
-            </a:r>
-          </a:p>
-        </p:txBody>
-      </p:sp>
-      <p:sp>
-        <p:nvSpPr>
-          <p:cNvPr id="10" name="TextBox 9"/>
-          <p:cNvSpPr txBox="1"/>
-          <p:nvPr/>
-        </p:nvSpPr>
-        <p:spPr>
-          <a:xfrm>
-            <a:off x="457200" y="960120"/>
-            <a:ext cx="8229600" cy="548640"/>
-          </a:xfrm>
-          <a:prstGeom prst="rect">
-            <a:avLst/>
-          </a:prstGeom>
-          <a:noFill/>
-        </p:spPr>
-        <p:txBody>
-          <a:bodyPr wrap="square">
-            <a:spAutoFit/>
-          </a:bodyPr>
-          <a:lstStyle/>
-          <a:p>
-            <a:pPr algn="l"/>
-            <a:r>
-              <a:rPr sz="2800" b="1">
-                <a:solidFill>
-                  <a:srgbClr val="006E5E"/>
-                </a:solidFill>
-                <a:latin typeface="Calibri"/>
-              </a:rPr>
-              <a:t>Roadmap &amp; Roll-out</a:t>
-            </a:r>
-          </a:p>
-        </p:txBody>
-      </p:sp>
-      <p:sp>
-        <p:nvSpPr>
-          <p:cNvPr id="11" name="Rectangle 10"/>
+          <p:cNvPr id="9" name="Rectangle 8"/>
           <p:cNvSpPr/>
           <p:nvPr/>
         </p:nvSpPr>
         <p:spPr>
           <a:xfrm>
-            <a:off x="457200" y="1554480"/>
-            <a:ext cx="11247120" cy="45720"/>
-          </a:xfrm>
-          <a:prstGeom prst="rect">
-            <a:avLst/>
-          </a:prstGeom>
-          <a:solidFill>
-            <a:srgbClr val="C8F000"/>
-          </a:solidFill>
-          <a:ln>
-            <a:noFill/>
-          </a:ln>
-        </p:spPr>
-        <p:style>
-          <a:lnRef idx="1">
-            <a:schemeClr val="accent1"/>
-          </a:lnRef>
-          <a:fillRef idx="3">
-            <a:schemeClr val="accent1"/>
-          </a:fillRef>
-          <a:effectRef idx="2">
-            <a:schemeClr val="accent1"/>
-          </a:effectRef>
-          <a:fontRef idx="minor">
-            <a:schemeClr val="lt1"/>
-          </a:fontRef>
-        </p:style>
-        <p:txBody>
-          <a:bodyPr rtlCol="0" anchor="ctr"/>
-          <a:lstStyle/>
-          <a:p>
-            <a:pPr algn="ctr"/>
-          </a:p>
-        </p:txBody>
-      </p:sp>
-      <p:sp>
-        <p:nvSpPr>
-          <p:cNvPr id="12" name="Rectangle 11"/>
-          <p:cNvSpPr/>
-          <p:nvPr/>
-        </p:nvSpPr>
-        <p:spPr>
-          <a:xfrm>
-            <a:off x="502920" y="1828800"/>
-            <a:ext cx="3611880" cy="4389120"/>
-          </a:xfrm>
-          <a:prstGeom prst="rect">
-            <a:avLst/>
-          </a:prstGeom>
-          <a:solidFill>
-            <a:srgbClr val="F5F5F5"/>
-          </a:solidFill>
-          <a:ln>
-            <a:noFill/>
-          </a:ln>
-        </p:spPr>
-        <p:style>
-          <a:lnRef idx="1">
-            <a:schemeClr val="accent1"/>
-          </a:lnRef>
-          <a:fillRef idx="3">
-            <a:schemeClr val="accent1"/>
-          </a:fillRef>
-          <a:effectRef idx="2">
-            <a:schemeClr val="accent1"/>
-          </a:effectRef>
-          <a:fontRef idx="minor">
-            <a:schemeClr val="lt1"/>
-          </a:fontRef>
-        </p:style>
-        <p:txBody>
-          <a:bodyPr rtlCol="0" anchor="ctr"/>
-          <a:lstStyle/>
-          <a:p>
-            <a:pPr algn="ctr"/>
-          </a:p>
-        </p:txBody>
-      </p:sp>
-      <p:sp>
-        <p:nvSpPr>
-          <p:cNvPr id="13" name="Rectangle 12"/>
-          <p:cNvSpPr/>
-          <p:nvPr/>
-        </p:nvSpPr>
-        <p:spPr>
-          <a:xfrm>
-            <a:off x="502920" y="1828800"/>
-            <a:ext cx="3611880" cy="731520"/>
+            <a:off x="502920" y="1325880"/>
+            <a:ext cx="3657600" cy="777240"/>
           </a:xfrm>
           <a:prstGeom prst="rect">
             <a:avLst/>
@@ -10221,14 +9453,14 @@
       </p:sp>
       <p:sp>
         <p:nvSpPr>
-          <p:cNvPr id="14" name="TextBox 13"/>
+          <p:cNvPr id="10" name="TextBox 9"/>
           <p:cNvSpPr txBox="1"/>
           <p:nvPr/>
         </p:nvSpPr>
         <p:spPr>
           <a:xfrm>
-            <a:off x="640080" y="1874519"/>
-            <a:ext cx="3337560" cy="640080"/>
+            <a:off x="667512" y="1371600"/>
+            <a:ext cx="3337560" cy="685800"/>
           </a:xfrm>
           <a:prstGeom prst="rect">
             <a:avLst/>
@@ -10257,14 +9489,14 @@
       </p:sp>
       <p:sp>
         <p:nvSpPr>
-          <p:cNvPr id="15" name="TextBox 14"/>
+          <p:cNvPr id="11" name="TextBox 10"/>
           <p:cNvSpPr txBox="1"/>
           <p:nvPr/>
         </p:nvSpPr>
         <p:spPr>
           <a:xfrm>
-            <a:off x="640080" y="2606040"/>
-            <a:ext cx="3337560" cy="411480"/>
+            <a:off x="667512" y="2176272"/>
+            <a:ext cx="3337560" cy="438912"/>
           </a:xfrm>
           <a:prstGeom prst="rect">
             <a:avLst/>
@@ -10292,14 +9524,14 @@
       </p:sp>
       <p:sp>
         <p:nvSpPr>
-          <p:cNvPr id="16" name="TextBox 15"/>
+          <p:cNvPr id="12" name="TextBox 11"/>
           <p:cNvSpPr txBox="1"/>
           <p:nvPr/>
         </p:nvSpPr>
         <p:spPr>
           <a:xfrm>
-            <a:off x="640080" y="3063240"/>
-            <a:ext cx="3337560" cy="3017520"/>
+            <a:off x="667512" y="2697480"/>
+            <a:ext cx="3337560" cy="3520440"/>
           </a:xfrm>
           <a:prstGeom prst="rect">
             <a:avLst/>
@@ -10314,13 +9546,13 @@
           <a:p>
             <a:pPr algn="l"/>
             <a:r>
-              <a:rPr sz="1000" b="0">
+              <a:rPr sz="1100" b="0">
                 <a:solidFill>
                   <a:srgbClr val="1A1A1A"/>
                 </a:solidFill>
                 <a:latin typeface="Calibri"/>
               </a:rPr>
-              <a:t>• 5,000 Grab drivers in Singapore
+              <a:t>• 5,000 Grab drivers – Singapore
 • Basic income analytics
 • Manual savings rules
 • GXS pot integration</a:t>
@@ -10330,14 +9562,14 @@
       </p:sp>
       <p:sp>
         <p:nvSpPr>
-          <p:cNvPr id="17" name="TextBox 16"/>
+          <p:cNvPr id="13" name="TextBox 12"/>
           <p:cNvSpPr txBox="1"/>
           <p:nvPr/>
         </p:nvSpPr>
         <p:spPr>
           <a:xfrm>
-            <a:off x="4114800" y="3657600"/>
-            <a:ext cx="365760" cy="457200"/>
+            <a:off x="4160520" y="3520440"/>
+            <a:ext cx="347472" cy="502920"/>
           </a:xfrm>
           <a:prstGeom prst="rect">
             <a:avLst/>
@@ -10365,20 +9597,20 @@
       </p:sp>
       <p:sp>
         <p:nvSpPr>
-          <p:cNvPr id="18" name="Rectangle 17"/>
+          <p:cNvPr id="14" name="Rectangle 13"/>
           <p:cNvSpPr/>
           <p:nvPr/>
         </p:nvSpPr>
         <p:spPr>
           <a:xfrm>
-            <a:off x="4416552" y="1828800"/>
-            <a:ext cx="3611880" cy="4389120"/>
+            <a:off x="4434840" y="1325880"/>
+            <a:ext cx="3657600" cy="5074920"/>
           </a:xfrm>
           <a:prstGeom prst="rect">
             <a:avLst/>
           </a:prstGeom>
           <a:solidFill>
-            <a:srgbClr val="F5F5F5"/>
+            <a:srgbClr val="F4F4F4"/>
           </a:solidFill>
           <a:ln>
             <a:noFill/>
@@ -10408,14 +9640,14 @@
       </p:sp>
       <p:sp>
         <p:nvSpPr>
-          <p:cNvPr id="19" name="Rectangle 18"/>
+          <p:cNvPr id="15" name="Rectangle 14"/>
           <p:cNvSpPr/>
           <p:nvPr/>
         </p:nvSpPr>
         <p:spPr>
           <a:xfrm>
-            <a:off x="4416552" y="1828800"/>
-            <a:ext cx="3611880" cy="731520"/>
+            <a:off x="4434840" y="1325880"/>
+            <a:ext cx="3657600" cy="777240"/>
           </a:xfrm>
           <a:prstGeom prst="rect">
             <a:avLst/>
@@ -10451,14 +9683,14 @@
       </p:sp>
       <p:sp>
         <p:nvSpPr>
-          <p:cNvPr id="20" name="TextBox 19"/>
+          <p:cNvPr id="16" name="TextBox 15"/>
           <p:cNvSpPr txBox="1"/>
           <p:nvPr/>
         </p:nvSpPr>
         <p:spPr>
           <a:xfrm>
-            <a:off x="4553712" y="1874519"/>
-            <a:ext cx="3337560" cy="640080"/>
+            <a:off x="4599431" y="1371600"/>
+            <a:ext cx="3337560" cy="685800"/>
           </a:xfrm>
           <a:prstGeom prst="rect">
             <a:avLst/>
@@ -10487,14 +9719,14 @@
       </p:sp>
       <p:sp>
         <p:nvSpPr>
-          <p:cNvPr id="21" name="TextBox 20"/>
+          <p:cNvPr id="17" name="TextBox 16"/>
           <p:cNvSpPr txBox="1"/>
           <p:nvPr/>
         </p:nvSpPr>
         <p:spPr>
           <a:xfrm>
-            <a:off x="4553712" y="2606040"/>
-            <a:ext cx="3337560" cy="411480"/>
+            <a:off x="4599431" y="2176272"/>
+            <a:ext cx="3337560" cy="438912"/>
           </a:xfrm>
           <a:prstGeom prst="rect">
             <a:avLst/>
@@ -10522,14 +9754,14 @@
       </p:sp>
       <p:sp>
         <p:nvSpPr>
-          <p:cNvPr id="22" name="TextBox 21"/>
+          <p:cNvPr id="18" name="TextBox 17"/>
           <p:cNvSpPr txBox="1"/>
           <p:nvPr/>
         </p:nvSpPr>
         <p:spPr>
           <a:xfrm>
-            <a:off x="4553712" y="3063240"/>
-            <a:ext cx="3337560" cy="3017520"/>
+            <a:off x="4599431" y="2697480"/>
+            <a:ext cx="3337560" cy="3520440"/>
           </a:xfrm>
           <a:prstGeom prst="rect">
             <a:avLst/>
@@ -10544,30 +9776,30 @@
           <a:p>
             <a:pPr algn="l"/>
             <a:r>
-              <a:rPr sz="1000" b="0">
+              <a:rPr sz="1100" b="0">
                 <a:solidFill>
                   <a:srgbClr val="1A1A1A"/>
                 </a:solidFill>
                 <a:latin typeface="Calibri"/>
               </a:rPr>
-              <a:t>• AI agent with natural language
+              <a:t>• Natural-language AI agent
 • Smart micro-savings automation
-• Goal-based savings pots
-• Nudge engine v1</a:t>
-            </a:r>
-          </a:p>
-        </p:txBody>
-      </p:sp>
-      <p:sp>
-        <p:nvSpPr>
-          <p:cNvPr id="23" name="TextBox 22"/>
+• Goal-based pots &amp; nudge engine
+• Behaviour analytics v1</a:t>
+            </a:r>
+          </a:p>
+        </p:txBody>
+      </p:sp>
+      <p:sp>
+        <p:nvSpPr>
+          <p:cNvPr id="19" name="TextBox 18"/>
           <p:cNvSpPr txBox="1"/>
           <p:nvPr/>
         </p:nvSpPr>
         <p:spPr>
           <a:xfrm>
-            <a:off x="8028432" y="3657600"/>
-            <a:ext cx="365760" cy="457200"/>
+            <a:off x="8092440" y="3520440"/>
+            <a:ext cx="347472" cy="502920"/>
           </a:xfrm>
           <a:prstGeom prst="rect">
             <a:avLst/>
@@ -10595,20 +9827,20 @@
       </p:sp>
       <p:sp>
         <p:nvSpPr>
-          <p:cNvPr id="24" name="Rectangle 23"/>
+          <p:cNvPr id="20" name="Rectangle 19"/>
           <p:cNvSpPr/>
           <p:nvPr/>
         </p:nvSpPr>
         <p:spPr>
           <a:xfrm>
-            <a:off x="8330184" y="1828800"/>
-            <a:ext cx="3611880" cy="4389120"/>
+            <a:off x="8366760" y="1325880"/>
+            <a:ext cx="3657600" cy="5074920"/>
           </a:xfrm>
           <a:prstGeom prst="rect">
             <a:avLst/>
           </a:prstGeom>
           <a:solidFill>
-            <a:srgbClr val="F5F5F5"/>
+            <a:srgbClr val="F4F4F4"/>
           </a:solidFill>
           <a:ln>
             <a:noFill/>
@@ -10638,14 +9870,14 @@
       </p:sp>
       <p:sp>
         <p:nvSpPr>
-          <p:cNvPr id="25" name="Rectangle 24"/>
+          <p:cNvPr id="21" name="Rectangle 20"/>
           <p:cNvSpPr/>
           <p:nvPr/>
         </p:nvSpPr>
         <p:spPr>
           <a:xfrm>
-            <a:off x="8330184" y="1828800"/>
-            <a:ext cx="3611880" cy="731520"/>
+            <a:off x="8366760" y="1325880"/>
+            <a:ext cx="3657600" cy="777240"/>
           </a:xfrm>
           <a:prstGeom prst="rect">
             <a:avLst/>
@@ -10681,14 +9913,14 @@
       </p:sp>
       <p:sp>
         <p:nvSpPr>
-          <p:cNvPr id="26" name="TextBox 25"/>
+          <p:cNvPr id="22" name="TextBox 21"/>
           <p:cNvSpPr txBox="1"/>
           <p:nvPr/>
         </p:nvSpPr>
         <p:spPr>
           <a:xfrm>
-            <a:off x="8467344" y="1874519"/>
-            <a:ext cx="3337560" cy="640080"/>
+            <a:off x="8531352" y="1371600"/>
+            <a:ext cx="3337560" cy="685800"/>
           </a:xfrm>
           <a:prstGeom prst="rect">
             <a:avLst/>
@@ -10717,14 +9949,14 @@
       </p:sp>
       <p:sp>
         <p:nvSpPr>
-          <p:cNvPr id="27" name="TextBox 26"/>
+          <p:cNvPr id="23" name="TextBox 22"/>
           <p:cNvSpPr txBox="1"/>
           <p:nvPr/>
         </p:nvSpPr>
         <p:spPr>
           <a:xfrm>
-            <a:off x="8467344" y="2606040"/>
-            <a:ext cx="3337560" cy="411480"/>
+            <a:off x="8531352" y="2176272"/>
+            <a:ext cx="3337560" cy="438912"/>
           </a:xfrm>
           <a:prstGeom prst="rect">
             <a:avLst/>
@@ -10752,14 +9984,14 @@
       </p:sp>
       <p:sp>
         <p:nvSpPr>
-          <p:cNvPr id="28" name="TextBox 27"/>
+          <p:cNvPr id="24" name="TextBox 23"/>
           <p:cNvSpPr txBox="1"/>
           <p:nvPr/>
         </p:nvSpPr>
         <p:spPr>
           <a:xfrm>
-            <a:off x="8467344" y="3063240"/>
-            <a:ext cx="3337560" cy="3017520"/>
+            <a:off x="8531352" y="2697480"/>
+            <a:ext cx="3337560" cy="3520440"/>
           </a:xfrm>
           <a:prstGeom prst="rect">
             <a:avLst/>
@@ -10774,14 +10006,14 @@
           <a:p>
             <a:pPr algn="l"/>
             <a:r>
-              <a:rPr sz="1000" b="0">
+              <a:rPr sz="1100" b="0">
                 <a:solidFill>
                   <a:srgbClr val="1A1A1A"/>
                 </a:solidFill>
                 <a:latin typeface="Calibri"/>
               </a:rPr>
-              <a:t>• All Grab gig workers in SG
-• Expand to MY, ID, PH
+              <a:t>• All gig workers in SG
+• Rollout: MY, ID, PH
 • Gamification &amp; community
 • Insurance micro-products</a:t>
             </a:r>
@@ -10821,6 +10053,178 @@
             <a:avLst/>
           </a:prstGeom>
           <a:solidFill>
+            <a:srgbClr val="C8F000"/>
+          </a:solidFill>
+          <a:ln>
+            <a:noFill/>
+          </a:ln>
+        </p:spPr>
+        <p:style>
+          <a:lnRef idx="1">
+            <a:schemeClr val="accent1"/>
+          </a:lnRef>
+          <a:fillRef idx="3">
+            <a:schemeClr val="accent1"/>
+          </a:fillRef>
+          <a:effectRef idx="2">
+            <a:schemeClr val="accent1"/>
+          </a:effectRef>
+          <a:fontRef idx="minor">
+            <a:schemeClr val="lt1"/>
+          </a:fontRef>
+        </p:style>
+        <p:txBody>
+          <a:bodyPr rtlCol="0" anchor="ctr"/>
+          <a:lstStyle/>
+          <a:p>
+            <a:pPr algn="ctr"/>
+          </a:p>
+        </p:txBody>
+      </p:sp>
+      <p:sp>
+        <p:nvSpPr>
+          <p:cNvPr id="3" name="Oval 2"/>
+          <p:cNvSpPr/>
+          <p:nvPr/>
+        </p:nvSpPr>
+        <p:spPr>
+          <a:xfrm>
+            <a:off x="5212080" y="-228600"/>
+            <a:ext cx="6949440" cy="6949440"/>
+          </a:xfrm>
+          <a:prstGeom prst="ellipse">
+            <a:avLst/>
+          </a:prstGeom>
+          <a:noFill/>
+          <a:ln w="50800">
+            <a:solidFill>
+              <a:srgbClr val="00D4D0"/>
+            </a:solidFill>
+          </a:ln>
+        </p:spPr>
+        <p:style>
+          <a:lnRef idx="1">
+            <a:schemeClr val="accent1"/>
+          </a:lnRef>
+          <a:fillRef idx="3">
+            <a:schemeClr val="accent1"/>
+          </a:fillRef>
+          <a:effectRef idx="2">
+            <a:schemeClr val="accent1"/>
+          </a:effectRef>
+          <a:fontRef idx="minor">
+            <a:schemeClr val="lt1"/>
+          </a:fontRef>
+        </p:style>
+        <p:txBody>
+          <a:bodyPr rtlCol="0" anchor="ctr"/>
+          <a:lstStyle/>
+          <a:p>
+            <a:pPr algn="ctr"/>
+          </a:p>
+        </p:txBody>
+      </p:sp>
+      <p:sp>
+        <p:nvSpPr>
+          <p:cNvPr id="4" name="Oval 3"/>
+          <p:cNvSpPr/>
+          <p:nvPr/>
+        </p:nvSpPr>
+        <p:spPr>
+          <a:xfrm>
+            <a:off x="6126480" y="685800"/>
+            <a:ext cx="5120640" cy="5120640"/>
+          </a:xfrm>
+          <a:prstGeom prst="ellipse">
+            <a:avLst/>
+          </a:prstGeom>
+          <a:noFill/>
+          <a:ln w="50800">
+            <a:solidFill>
+              <a:srgbClr val="00A89C"/>
+            </a:solidFill>
+          </a:ln>
+        </p:spPr>
+        <p:style>
+          <a:lnRef idx="1">
+            <a:schemeClr val="accent1"/>
+          </a:lnRef>
+          <a:fillRef idx="3">
+            <a:schemeClr val="accent1"/>
+          </a:fillRef>
+          <a:effectRef idx="2">
+            <a:schemeClr val="accent1"/>
+          </a:effectRef>
+          <a:fontRef idx="minor">
+            <a:schemeClr val="lt1"/>
+          </a:fontRef>
+        </p:style>
+        <p:txBody>
+          <a:bodyPr rtlCol="0" anchor="ctr"/>
+          <a:lstStyle/>
+          <a:p>
+            <a:pPr algn="ctr"/>
+          </a:p>
+        </p:txBody>
+      </p:sp>
+      <p:sp>
+        <p:nvSpPr>
+          <p:cNvPr id="5" name="Oval 4"/>
+          <p:cNvSpPr/>
+          <p:nvPr/>
+        </p:nvSpPr>
+        <p:spPr>
+          <a:xfrm>
+            <a:off x="7040880" y="1600199"/>
+            <a:ext cx="3291840" cy="3291840"/>
+          </a:xfrm>
+          <a:prstGeom prst="ellipse">
+            <a:avLst/>
+          </a:prstGeom>
+          <a:noFill/>
+          <a:ln w="44450">
+            <a:solidFill>
+              <a:srgbClr val="00D4D0"/>
+            </a:solidFill>
+          </a:ln>
+        </p:spPr>
+        <p:style>
+          <a:lnRef idx="1">
+            <a:schemeClr val="accent1"/>
+          </a:lnRef>
+          <a:fillRef idx="3">
+            <a:schemeClr val="accent1"/>
+          </a:fillRef>
+          <a:effectRef idx="2">
+            <a:schemeClr val="accent1"/>
+          </a:effectRef>
+          <a:fontRef idx="minor">
+            <a:schemeClr val="lt1"/>
+          </a:fontRef>
+        </p:style>
+        <p:txBody>
+          <a:bodyPr rtlCol="0" anchor="ctr"/>
+          <a:lstStyle/>
+          <a:p>
+            <a:pPr algn="ctr"/>
+          </a:p>
+        </p:txBody>
+      </p:sp>
+      <p:sp>
+        <p:nvSpPr>
+          <p:cNvPr id="6" name="Rectangle 5"/>
+          <p:cNvSpPr/>
+          <p:nvPr/>
+        </p:nvSpPr>
+        <p:spPr>
+          <a:xfrm>
+            <a:off x="0" y="0"/>
+            <a:ext cx="6583680" cy="6858000"/>
+          </a:xfrm>
+          <a:prstGeom prst="rect">
+            <a:avLst/>
+          </a:prstGeom>
+          <a:solidFill>
             <a:srgbClr val="006E5E"/>
           </a:solidFill>
           <a:ln>
@@ -10849,59 +10253,40 @@
           </a:p>
         </p:txBody>
       </p:sp>
-      <p:sp>
-        <p:nvSpPr>
-          <p:cNvPr id="3" name="Oval 2"/>
+      <p:pic>
+        <p:nvPicPr>
+          <p:cNvPr id="7" name="Picture 6" descr="vr_cover.jpg"/>
+          <p:cNvPicPr>
+            <a:picLocks noChangeAspect="1"/>
+          </p:cNvPicPr>
+          <p:nvPr/>
+        </p:nvPicPr>
+        <p:blipFill>
+          <a:blip r:embed="rId2"/>
+          <a:stretch>
+            <a:fillRect/>
+          </a:stretch>
+        </p:blipFill>
+        <p:spPr>
+          <a:xfrm>
+            <a:off x="5120640" y="0"/>
+            <a:ext cx="7068312" cy="6858000"/>
+          </a:xfrm>
+          <a:prstGeom prst="rect">
+            <a:avLst/>
+          </a:prstGeom>
+        </p:spPr>
+      </p:pic>
+      <p:sp>
+        <p:nvSpPr>
+          <p:cNvPr id="8" name="Rectangle 7"/>
           <p:cNvSpPr/>
           <p:nvPr/>
         </p:nvSpPr>
         <p:spPr>
           <a:xfrm>
-            <a:off x="7772400" y="457200"/>
-            <a:ext cx="6400800" cy="6400800"/>
-          </a:xfrm>
-          <a:prstGeom prst="ellipse">
-            <a:avLst/>
-          </a:prstGeom>
-          <a:noFill/>
-          <a:ln w="38100">
-            <a:solidFill>
-              <a:srgbClr val="00A89C"/>
-            </a:solidFill>
-          </a:ln>
-        </p:spPr>
-        <p:style>
-          <a:lnRef idx="1">
-            <a:schemeClr val="accent1"/>
-          </a:lnRef>
-          <a:fillRef idx="3">
-            <a:schemeClr val="accent1"/>
-          </a:fillRef>
-          <a:effectRef idx="2">
-            <a:schemeClr val="accent1"/>
-          </a:effectRef>
-          <a:fontRef idx="minor">
-            <a:schemeClr val="lt1"/>
-          </a:fontRef>
-        </p:style>
-        <p:txBody>
-          <a:bodyPr rtlCol="0" anchor="ctr"/>
-          <a:lstStyle/>
-          <a:p>
-            <a:pPr algn="ctr"/>
-          </a:p>
-        </p:txBody>
-      </p:sp>
-      <p:sp>
-        <p:nvSpPr>
-          <p:cNvPr id="4" name="Rectangle 3"/>
-          <p:cNvSpPr/>
-          <p:nvPr/>
-        </p:nvSpPr>
-        <p:spPr>
-          <a:xfrm>
             <a:off x="0" y="6309360"/>
-            <a:ext cx="12188952" cy="548640"/>
+            <a:ext cx="6583680" cy="548640"/>
           </a:xfrm>
           <a:prstGeom prst="rect">
             <a:avLst/>
@@ -10937,14 +10322,14 @@
       </p:sp>
       <p:sp>
         <p:nvSpPr>
-          <p:cNvPr id="5" name="TextBox 4"/>
+          <p:cNvPr id="9" name="TextBox 8"/>
           <p:cNvSpPr txBox="1"/>
           <p:nvPr/>
         </p:nvSpPr>
         <p:spPr>
           <a:xfrm>
-            <a:off x="548640" y="1188720"/>
-            <a:ext cx="7315200" cy="640080"/>
+            <a:off x="457200" y="914400"/>
+            <a:ext cx="5943600" cy="594360"/>
           </a:xfrm>
           <a:prstGeom prst="rect">
             <a:avLst/>
@@ -10959,7 +10344,7 @@
           <a:p>
             <a:pPr algn="l"/>
             <a:r>
-              <a:rPr sz="2800" b="1">
+              <a:rPr sz="2600" b="1">
                 <a:solidFill>
                   <a:srgbClr val="C8F000"/>
                 </a:solidFill>
@@ -10972,14 +10357,14 @@
       </p:sp>
       <p:sp>
         <p:nvSpPr>
-          <p:cNvPr id="6" name="TextBox 5"/>
+          <p:cNvPr id="10" name="TextBox 9"/>
           <p:cNvSpPr txBox="1"/>
           <p:nvPr/>
         </p:nvSpPr>
         <p:spPr>
           <a:xfrm>
-            <a:off x="548640" y="1920240"/>
-            <a:ext cx="8229600" cy="731520"/>
+            <a:off x="457200" y="1600200"/>
+            <a:ext cx="5943600" cy="713232"/>
           </a:xfrm>
           <a:prstGeom prst="rect">
             <a:avLst/>
@@ -10994,7 +10379,7 @@
           <a:p>
             <a:pPr algn="l"/>
             <a:r>
-              <a:rPr sz="3800" b="1">
+              <a:rPr sz="3600" b="1">
                 <a:solidFill>
                   <a:srgbClr val="FFFFFF"/>
                 </a:solidFill>
@@ -11007,14 +10392,14 @@
       </p:sp>
       <p:sp>
         <p:nvSpPr>
-          <p:cNvPr id="7" name="TextBox 6"/>
+          <p:cNvPr id="11" name="TextBox 10"/>
           <p:cNvSpPr txBox="1"/>
           <p:nvPr/>
         </p:nvSpPr>
         <p:spPr>
           <a:xfrm>
-            <a:off x="548640" y="2697480"/>
-            <a:ext cx="8229600" cy="548640"/>
+            <a:off x="457200" y="2377440"/>
+            <a:ext cx="5943600" cy="502920"/>
           </a:xfrm>
           <a:prstGeom prst="rect">
             <a:avLst/>
@@ -11029,7 +10414,7 @@
           <a:p>
             <a:pPr algn="l"/>
             <a:r>
-              <a:rPr sz="2200" b="0">
+              <a:rPr sz="2000" b="0">
                 <a:solidFill>
                   <a:srgbClr val="00D4D0"/>
                 </a:solidFill>
@@ -11042,14 +10427,14 @@
       </p:sp>
       <p:sp>
         <p:nvSpPr>
-          <p:cNvPr id="8" name="Rectangle 7"/>
+          <p:cNvPr id="12" name="Rectangle 11"/>
           <p:cNvSpPr/>
           <p:nvPr/>
         </p:nvSpPr>
         <p:spPr>
           <a:xfrm>
-            <a:off x="548640" y="3383280"/>
-            <a:ext cx="4572000" cy="54864"/>
+            <a:off x="457200" y="3017520"/>
+            <a:ext cx="4114800" cy="54864"/>
           </a:xfrm>
           <a:prstGeom prst="rect">
             <a:avLst/>
@@ -11085,14 +10470,14 @@
       </p:sp>
       <p:sp>
         <p:nvSpPr>
-          <p:cNvPr id="9" name="TextBox 8"/>
+          <p:cNvPr id="13" name="TextBox 12"/>
           <p:cNvSpPr txBox="1"/>
           <p:nvPr/>
         </p:nvSpPr>
         <p:spPr>
           <a:xfrm>
-            <a:off x="548640" y="3520440"/>
-            <a:ext cx="7772400" cy="868680"/>
+            <a:off x="457200" y="3154680"/>
+            <a:ext cx="5943600" cy="868680"/>
           </a:xfrm>
           <a:prstGeom prst="rect">
             <a:avLst/>
@@ -11107,7 +10492,7 @@
           <a:p>
             <a:pPr algn="l"/>
             <a:r>
-              <a:rPr sz="1600" b="0">
+              <a:rPr sz="1500" b="0">
                 <a:solidFill>
                   <a:srgbClr val="FFFFFF"/>
                 </a:solidFill>
@@ -11121,14 +10506,14 @@
       </p:sp>
       <p:sp>
         <p:nvSpPr>
-          <p:cNvPr id="10" name="TextBox 9"/>
+          <p:cNvPr id="14" name="TextBox 13"/>
           <p:cNvSpPr txBox="1"/>
           <p:nvPr/>
         </p:nvSpPr>
         <p:spPr>
           <a:xfrm>
-            <a:off x="548640" y="5120640"/>
-            <a:ext cx="3657600" cy="548640"/>
+            <a:off x="457200" y="5029200"/>
+            <a:ext cx="4572000" cy="640080"/>
           </a:xfrm>
           <a:prstGeom prst="rect">
             <a:avLst/>
@@ -11143,7 +10528,7 @@
           <a:p>
             <a:pPr algn="l"/>
             <a:r>
-              <a:rPr sz="2800" b="1">
+              <a:rPr sz="3000" b="1">
                 <a:solidFill>
                   <a:srgbClr val="C8F000"/>
                 </a:solidFill>
@@ -11156,14 +10541,14 @@
       </p:sp>
       <p:sp>
         <p:nvSpPr>
-          <p:cNvPr id="11" name="TextBox 10"/>
+          <p:cNvPr id="15" name="TextBox 14"/>
           <p:cNvSpPr txBox="1"/>
           <p:nvPr/>
         </p:nvSpPr>
         <p:spPr>
           <a:xfrm>
-            <a:off x="548640" y="6309360"/>
-            <a:ext cx="3657600" cy="411480"/>
+            <a:off x="457200" y="6327648"/>
+            <a:ext cx="5486400" cy="347472"/>
           </a:xfrm>
           <a:prstGeom prst="rect">
             <a:avLst/>
@@ -11178,13 +10563,13 @@
           <a:p>
             <a:pPr algn="l"/>
             <a:r>
-              <a:rPr sz="1100" b="0">
+              <a:rPr sz="1000" b="0">
                 <a:solidFill>
                   <a:srgbClr val="006E5E"/>
                 </a:solidFill>
                 <a:latin typeface="Calibri"/>
               </a:rPr>
-              <a:t>Grab  |  GxS  |  unstop</a:t>
+              <a:t>Grab  |  GxS  |  Platform Partner: unstop</a:t>
             </a:r>
           </a:p>
         </p:txBody>
